--- a/decks/monday-marketing-deck/monday-marketing-deck.pptx
+++ b/decks/monday-marketing-deck/monday-marketing-deck.pptx
@@ -115,490 +115,6 @@
     </a:lvl9pPr>
   </p:defaultTextStyle>
 </p:presentation>
-</file>
-
-<file path=ppt/charts/chart1.xml><?xml version="1.0" encoding="utf-8"?>
-<c:chartSpace xmlns:c="http://schemas.openxmlformats.org/drawingml/2006/chart" xmlns:a="http://schemas.openxmlformats.org/drawingml/2006/main" xmlns:r="http://schemas.openxmlformats.org/officeDocument/2006/relationships">
-  <c:date1904 val="0"/>
-  <c:roundedCorners val="1"/>
-  <c:chart>
-    <c:autoTitleDeleted val="1"/>
-    <c:plotArea>
-      <c:layout/>
-      <c:barChart>
-        <c:barDir val="col"/>
-        <c:grouping val="clustered"/>
-        <c:varyColors val="0"/>
-        <c:ser>
-          <c:idx val="0"/>
-          <c:order val="0"/>
-          <c:tx>
-            <c:strRef>
-              <c:f>Sheet1!$B$1</c:f>
-              <c:strCache>
-                <c:ptCount val="1"/>
-                <c:pt idx="0">
-                  <c:v>v</c:v>
-                </c:pt>
-              </c:strCache>
-            </c:strRef>
-          </c:tx>
-          <c:spPr>
-            <a:solidFill>
-              <a:srgbClr val="1F9E7F"/>
-            </a:solidFill>
-            <a:effectLst/>
-          </c:spPr>
-          <c:invertIfNegative val="0"/>
-          <c:dLbls>
-            <c:numFmt formatCode="#,##0" sourceLinked="0"/>
-            <c:txPr>
-              <a:bodyPr/>
-              <a:lstStyle/>
-              <a:p>
-                <a:pPr>
-                  <a:defRPr b="0" i="0" strike="noStrike" sz="1200" u="none">
-                    <a:solidFill>
-                      <a:srgbClr val="000000"/>
-                    </a:solidFill>
-                    <a:latin typeface="Arial"/>
-                  </a:defRPr>
-                </a:pPr>
-              </a:p>
-            </c:txPr>
-            <c:showLegendKey val="0"/>
-            <c:showVal val="0"/>
-            <c:showCatName val="0"/>
-            <c:showSerName val="0"/>
-            <c:showPercent val="0"/>
-            <c:showBubbleSize val="0"/>
-            <c:showLeaderLines val="0"/>
-          </c:dLbls>
-          <c:cat>
-            <c:multiLvlStrRef>
-              <c:f>Sheet1!$A$2:$A$4</c:f>
-              <c:multiLvlStrCache>
-                <c:ptCount val="3"/>
-                <c:lvl>
-                  <c:pt idx="0">
-                    <c:v>UK</c:v>
-                  </c:pt>
-                  <c:pt idx="1">
-                    <c:v>Spain</c:v>
-                  </c:pt>
-                  <c:pt idx="2">
-                    <c:v>France</c:v>
-                  </c:pt>
-                </c:lvl>
-              </c:multiLvlStrCache>
-            </c:multiLvlStrRef>
-          </c:cat>
-          <c:val>
-            <c:numRef>
-              <c:f>Sheet1!$B$2:$B$4</c:f>
-              <c:numCache>
-                <c:formatCode>General</c:formatCode>
-                <c:ptCount val="3"/>
-                <c:pt idx="0">
-                  <c:v>1200</c:v>
-                </c:pt>
-                <c:pt idx="1">
-                  <c:v>800</c:v>
-                </c:pt>
-                <c:pt idx="2">
-                  <c:v>1000</c:v>
-                </c:pt>
-              </c:numCache>
-            </c:numRef>
-          </c:val>
-        </c:ser>
-        <c:dLbls>
-          <c:numFmt formatCode="#,##0" sourceLinked="0"/>
-          <c:txPr>
-            <a:bodyPr/>
-            <a:lstStyle/>
-            <a:p>
-              <a:pPr>
-                <a:defRPr b="0" i="0" strike="noStrike" sz="1200" u="none">
-                  <a:solidFill>
-                    <a:srgbClr val="000000"/>
-                  </a:solidFill>
-                  <a:latin typeface="Arial"/>
-                </a:defRPr>
-              </a:pPr>
-            </a:p>
-          </c:txPr>
-          <c:showLegendKey val="0"/>
-          <c:showVal val="0"/>
-          <c:showCatName val="0"/>
-          <c:showSerName val="0"/>
-          <c:showPercent val="0"/>
-          <c:showBubbleSize val="0"/>
-          <c:showLeaderLines val="0"/>
-        </c:dLbls>
-        <c:gapWidth val="60"/>
-        <c:overlap val="0"/>
-        <c:axId val="2094734554"/>
-        <c:axId val="2094734552"/>
-        <c:axId val="2094734556"/>
-      </c:barChart>
-      <c:catAx>
-        <c:axId val="2094734554"/>
-        <c:scaling>
-          <c:orientation val="minMax"/>
-        </c:scaling>
-        <c:delete val="0"/>
-        <c:axPos val="b"/>
-        <c:numFmt formatCode="General" sourceLinked="1"/>
-        <c:majorTickMark val="out"/>
-        <c:minorTickMark val="none"/>
-        <c:tickLblPos val="low"/>
-        <c:spPr>
-          <a:ln w="12700" cap="flat">
-            <a:solidFill>
-              <a:srgbClr val="888888"/>
-            </a:solidFill>
-            <a:prstDash val="solid"/>
-            <a:round/>
-          </a:ln>
-        </c:spPr>
-        <c:txPr>
-          <a:bodyPr/>
-          <a:lstStyle/>
-          <a:p>
-            <a:pPr>
-              <a:defRPr sz="1100" b="0" i="0" u="none" strike="noStrike">
-                <a:solidFill>
-                  <a:srgbClr val="5B6773"/>
-                </a:solidFill>
-                <a:latin typeface="Arial"/>
-              </a:defRPr>
-            </a:pPr>
-            <a:endParaRPr lang="en-US"/>
-          </a:p>
-        </c:txPr>
-        <c:crossAx val="2094734552"/>
-        <c:crosses val="autoZero"/>
-        <c:auto val="1"/>
-        <c:lblAlgn val="ctr"/>
-        <c:noMultiLvlLbl val="1"/>
-      </c:catAx>
-      <c:valAx>
-        <c:axId val="2094734552"/>
-        <c:scaling>
-          <c:orientation val="minMax"/>
-        </c:scaling>
-        <c:delete val="0"/>
-        <c:axPos val="l"/>
-        <c:majorGridlines>
-          <c:spPr>
-            <a:ln w="6350" cap="flat">
-              <a:solidFill>
-                <a:srgbClr val="EAEEF2"/>
-              </a:solidFill>
-              <a:prstDash val="solid"/>
-              <a:round/>
-            </a:ln>
-          </c:spPr>
-        </c:majorGridlines>
-        <c:numFmt formatCode="General" sourceLinked="0"/>
-        <c:majorTickMark val="out"/>
-        <c:minorTickMark val="none"/>
-        <c:tickLblPos val="nextTo"/>
-        <c:spPr>
-          <a:ln w="12700" cap="flat">
-            <a:solidFill>
-              <a:srgbClr val="888888"/>
-            </a:solidFill>
-            <a:prstDash val="solid"/>
-            <a:round/>
-          </a:ln>
-        </c:spPr>
-        <c:txPr>
-          <a:bodyPr/>
-          <a:lstStyle/>
-          <a:p>
-            <a:pPr>
-              <a:defRPr sz="900" b="0" i="0" u="none" strike="noStrike">
-                <a:solidFill>
-                  <a:srgbClr val="5B6773"/>
-                </a:solidFill>
-                <a:latin typeface="Arial"/>
-              </a:defRPr>
-            </a:pPr>
-            <a:endParaRPr lang="en-US"/>
-          </a:p>
-        </c:txPr>
-        <c:crossAx val="2094734554"/>
-        <c:crosses val="autoZero"/>
-        <c:crossBetween val="between"/>
-      </c:valAx>
-      <c:spPr>
-        <a:noFill/>
-        <a:ln>
-          <a:noFill/>
-        </a:ln>
-        <a:effectLst/>
-      </c:spPr>
-    </c:plotArea>
-    <c:plotVisOnly val="1"/>
-    <c:dispBlanksAs val="span"/>
-  </c:chart>
-  <c:spPr>
-    <a:solidFill>
-      <a:srgbClr val="FFFFFF"/>
-    </a:solidFill>
-    <a:ln>
-      <a:noFill/>
-    </a:ln>
-    <a:effectLst/>
-  </c:spPr>
-  <c:externalData r:id="rId1">
-    <c:autoUpdate val="0"/>
-  </c:externalData>
-</c:chartSpace>
-</file>
-
-<file path=ppt/charts/chart2.xml><?xml version="1.0" encoding="utf-8"?>
-<c:chartSpace xmlns:c="http://schemas.openxmlformats.org/drawingml/2006/chart" xmlns:a="http://schemas.openxmlformats.org/drawingml/2006/main" xmlns:r="http://schemas.openxmlformats.org/officeDocument/2006/relationships">
-  <c:date1904 val="0"/>
-  <c:roundedCorners val="1"/>
-  <c:chart>
-    <c:autoTitleDeleted val="1"/>
-    <c:plotArea>
-      <c:layout/>
-      <c:barChart>
-        <c:barDir val="col"/>
-        <c:grouping val="clustered"/>
-        <c:varyColors val="0"/>
-        <c:ser>
-          <c:idx val="0"/>
-          <c:order val="0"/>
-          <c:tx>
-            <c:strRef>
-              <c:f>Sheet1!$B$1</c:f>
-              <c:strCache>
-                <c:ptCount val="1"/>
-                <c:pt idx="0">
-                  <c:v>v</c:v>
-                </c:pt>
-              </c:strCache>
-            </c:strRef>
-          </c:tx>
-          <c:spPr>
-            <a:solidFill>
-              <a:srgbClr val="D78A27"/>
-            </a:solidFill>
-            <a:effectLst/>
-          </c:spPr>
-          <c:invertIfNegative val="0"/>
-          <c:dLbls>
-            <c:numFmt formatCode="#,##0" sourceLinked="0"/>
-            <c:txPr>
-              <a:bodyPr/>
-              <a:lstStyle/>
-              <a:p>
-                <a:pPr>
-                  <a:defRPr b="0" i="0" strike="noStrike" sz="1200" u="none">
-                    <a:solidFill>
-                      <a:srgbClr val="000000"/>
-                    </a:solidFill>
-                    <a:latin typeface="Arial"/>
-                  </a:defRPr>
-                </a:pPr>
-              </a:p>
-            </c:txPr>
-            <c:showLegendKey val="0"/>
-            <c:showVal val="0"/>
-            <c:showCatName val="0"/>
-            <c:showSerName val="0"/>
-            <c:showPercent val="0"/>
-            <c:showBubbleSize val="0"/>
-            <c:showLeaderLines val="0"/>
-          </c:dLbls>
-          <c:cat>
-            <c:multiLvlStrRef>
-              <c:f>Sheet1!$A$2:$A$4</c:f>
-              <c:multiLvlStrCache>
-                <c:ptCount val="3"/>
-                <c:lvl>
-                  <c:pt idx="0">
-                    <c:v>UK / EN</c:v>
-                  </c:pt>
-                  <c:pt idx="1">
-                    <c:v>Spain</c:v>
-                  </c:pt>
-                  <c:pt idx="2">
-                    <c:v>France</c:v>
-                  </c:pt>
-                </c:lvl>
-              </c:multiLvlStrCache>
-            </c:multiLvlStrRef>
-          </c:cat>
-          <c:val>
-            <c:numRef>
-              <c:f>Sheet1!$B$2:$B$4</c:f>
-              <c:numCache>
-                <c:formatCode>General</c:formatCode>
-                <c:ptCount val="3"/>
-                <c:pt idx="0">
-                  <c:v>600</c:v>
-                </c:pt>
-                <c:pt idx="1">
-                  <c:v>450</c:v>
-                </c:pt>
-                <c:pt idx="2">
-                  <c:v>500</c:v>
-                </c:pt>
-              </c:numCache>
-            </c:numRef>
-          </c:val>
-        </c:ser>
-        <c:dLbls>
-          <c:numFmt formatCode="#,##0" sourceLinked="0"/>
-          <c:txPr>
-            <a:bodyPr/>
-            <a:lstStyle/>
-            <a:p>
-              <a:pPr>
-                <a:defRPr b="0" i="0" strike="noStrike" sz="1200" u="none">
-                  <a:solidFill>
-                    <a:srgbClr val="000000"/>
-                  </a:solidFill>
-                  <a:latin typeface="Arial"/>
-                </a:defRPr>
-              </a:pPr>
-            </a:p>
-          </c:txPr>
-          <c:showLegendKey val="0"/>
-          <c:showVal val="0"/>
-          <c:showCatName val="0"/>
-          <c:showSerName val="0"/>
-          <c:showPercent val="0"/>
-          <c:showBubbleSize val="0"/>
-          <c:showLeaderLines val="0"/>
-        </c:dLbls>
-        <c:gapWidth val="60"/>
-        <c:overlap val="0"/>
-        <c:axId val="2094734554"/>
-        <c:axId val="2094734552"/>
-        <c:axId val="2094734556"/>
-      </c:barChart>
-      <c:catAx>
-        <c:axId val="2094734554"/>
-        <c:scaling>
-          <c:orientation val="minMax"/>
-        </c:scaling>
-        <c:delete val="0"/>
-        <c:axPos val="b"/>
-        <c:numFmt formatCode="General" sourceLinked="1"/>
-        <c:majorTickMark val="out"/>
-        <c:minorTickMark val="none"/>
-        <c:tickLblPos val="low"/>
-        <c:spPr>
-          <a:ln w="12700" cap="flat">
-            <a:solidFill>
-              <a:srgbClr val="888888"/>
-            </a:solidFill>
-            <a:prstDash val="solid"/>
-            <a:round/>
-          </a:ln>
-        </c:spPr>
-        <c:txPr>
-          <a:bodyPr/>
-          <a:lstStyle/>
-          <a:p>
-            <a:pPr>
-              <a:defRPr sz="1100" b="0" i="0" u="none" strike="noStrike">
-                <a:solidFill>
-                  <a:srgbClr val="5B6773"/>
-                </a:solidFill>
-                <a:latin typeface="Arial"/>
-              </a:defRPr>
-            </a:pPr>
-            <a:endParaRPr lang="en-US"/>
-          </a:p>
-        </c:txPr>
-        <c:crossAx val="2094734552"/>
-        <c:crosses val="autoZero"/>
-        <c:auto val="1"/>
-        <c:lblAlgn val="ctr"/>
-        <c:noMultiLvlLbl val="1"/>
-      </c:catAx>
-      <c:valAx>
-        <c:axId val="2094734552"/>
-        <c:scaling>
-          <c:orientation val="minMax"/>
-        </c:scaling>
-        <c:delete val="0"/>
-        <c:axPos val="l"/>
-        <c:majorGridlines>
-          <c:spPr>
-            <a:ln w="6350" cap="flat">
-              <a:solidFill>
-                <a:srgbClr val="EAEEF2"/>
-              </a:solidFill>
-              <a:prstDash val="solid"/>
-              <a:round/>
-            </a:ln>
-          </c:spPr>
-        </c:majorGridlines>
-        <c:numFmt formatCode="General" sourceLinked="0"/>
-        <c:majorTickMark val="out"/>
-        <c:minorTickMark val="none"/>
-        <c:tickLblPos val="nextTo"/>
-        <c:spPr>
-          <a:ln w="12700" cap="flat">
-            <a:solidFill>
-              <a:srgbClr val="888888"/>
-            </a:solidFill>
-            <a:prstDash val="solid"/>
-            <a:round/>
-          </a:ln>
-        </c:spPr>
-        <c:txPr>
-          <a:bodyPr/>
-          <a:lstStyle/>
-          <a:p>
-            <a:pPr>
-              <a:defRPr sz="900" b="0" i="0" u="none" strike="noStrike">
-                <a:solidFill>
-                  <a:srgbClr val="5B6773"/>
-                </a:solidFill>
-                <a:latin typeface="Arial"/>
-              </a:defRPr>
-            </a:pPr>
-            <a:endParaRPr lang="en-US"/>
-          </a:p>
-        </c:txPr>
-        <c:crossAx val="2094734554"/>
-        <c:crosses val="autoZero"/>
-        <c:crossBetween val="between"/>
-      </c:valAx>
-      <c:spPr>
-        <a:noFill/>
-        <a:ln>
-          <a:noFill/>
-        </a:ln>
-        <a:effectLst/>
-      </c:spPr>
-    </c:plotArea>
-    <c:plotVisOnly val="1"/>
-    <c:dispBlanksAs val="span"/>
-  </c:chart>
-  <c:spPr>
-    <a:solidFill>
-      <a:srgbClr val="FFFFFF"/>
-    </a:solidFill>
-    <a:ln>
-      <a:noFill/>
-    </a:ln>
-    <a:effectLst/>
-  </c:spPr>
-  <c:externalData r:id="rId1">
-    <c:autoUpdate val="0"/>
-  </c:externalData>
-</c:chartSpace>
 </file>
 
 <file path=ppt/notesMasters/notesMaster1.xml><?xml version="1.0" encoding="utf-8"?>
@@ -3878,7 +3394,7 @@
           </p:nvPr>
         </p:nvGraphicFramePr>
         <p:xfrm>
-          <a:off x="548640" y="1463040"/>
+          <a:off x="548640" y="1417320"/>
           <a:ext cx="9143771" cy="914400"/>
         </p:xfrm>
         <a:graphic>
@@ -3886,13 +3402,13 @@
             <a:tbl>
               <a:tblPr/>
               <a:tblGrid>
-                <a:gridCol w="1005840"/>
-                <a:gridCol w="1325880"/>
-                <a:gridCol w="1508760"/>
-                <a:gridCol w="1417320"/>
-                <a:gridCol w="1783080"/>
+                <a:gridCol w="3383280"/>
+                <a:gridCol w="1691640"/>
+                <a:gridCol w="1874520"/>
+                <a:gridCol w="1874520"/>
+                <a:gridCol w="2267712"/>
               </a:tblGrid>
-              <a:tr h="457200">
+              <a:tr h="384048">
                 <a:tc>
                   <a:txBody>
                     <a:bodyPr/>
@@ -3910,7 +3426,7 @@
                           <a:ea typeface="Calibri" pitchFamily="34" charset="-122"/>
                           <a:cs typeface="Calibri" pitchFamily="34" charset="-120"/>
                         </a:rPr>
-                        <a:t>Market</a:t>
+                        <a:t>Campaign</a:t>
                       </a:r>
                       <a:endParaRPr lang="en-US" sz="1150" dirty="0">
                         <a:latin typeface="Calibri" charset="0"/>
@@ -4182,7 +3698,7 @@
                           <a:ea typeface="Calibri" pitchFamily="34" charset="-122"/>
                           <a:cs typeface="Calibri" pitchFamily="34" charset="-120"/>
                         </a:rPr>
-                        <a:t>Top campaign</a:t>
+                        <a:t>Top theme</a:t>
                       </a:r>
                       <a:endParaRPr lang="en-US" sz="1150" dirty="0">
                         <a:latin typeface="Calibri" charset="0"/>
@@ -4234,7 +3750,89 @@
                   </a:tcPr>
                 </a:tc>
               </a:tr>
-              <a:tr h="548640">
+              <a:tr h="310896">
+                <a:tc gridSpan="5">
+                  <a:txBody>
+                    <a:bodyPr/>
+                    <a:lstStyle/>
+                    <a:p>
+                      <a:pPr algn="l" indent="0" marL="0">
+                        <a:buNone/>
+                      </a:pPr>
+                      <a:r>
+                        <a:rPr lang="en-US" sz="1200" b="1" dirty="0">
+                          <a:solidFill>
+                            <a:srgbClr val="1F9E7F"/>
+                          </a:solidFill>
+                          <a:latin typeface="Calibri" pitchFamily="34" charset="0"/>
+                          <a:ea typeface="Calibri" pitchFamily="34" charset="-122"/>
+                          <a:cs typeface="Calibri" pitchFamily="34" charset="-120"/>
+                        </a:rPr>
+                        <a:t>Iberia</a:t>
+                      </a:r>
+                      <a:endParaRPr lang="en-US" sz="1200" dirty="0">
+                        <a:latin typeface="Calibri" charset="0"/>
+                        <a:ea typeface="Calibri" charset="0"/>
+                        <a:cs typeface="Calibri" charset="0"/>
+                      </a:endParaRPr>
+                    </a:p>
+                  </a:txBody>
+                  <a:tcPr marL="50800" marR="50800" marT="50800" marB="50800" anchor="ctr">
+                    <a:lnL w="12700" cap="flat" cmpd="sng" algn="ctr">
+                      <a:solidFill>
+                        <a:srgbClr val="DCE2E8"/>
+                      </a:solidFill>
+                      <a:prstDash val="solid"/>
+                      <a:round/>
+                      <a:headEnd type="none" w="med" len="med"/>
+                      <a:tailEnd type="none" w="med" len="med"/>
+                    </a:lnL>
+                    <a:lnR w="12700" cap="flat" cmpd="sng" algn="ctr">
+                      <a:solidFill>
+                        <a:srgbClr val="DCE2E8"/>
+                      </a:solidFill>
+                      <a:prstDash val="solid"/>
+                      <a:round/>
+                      <a:headEnd type="none" w="med" len="med"/>
+                      <a:tailEnd type="none" w="med" len="med"/>
+                    </a:lnR>
+                    <a:lnT w="12700" cap="flat" cmpd="sng" algn="ctr">
+                      <a:solidFill>
+                        <a:srgbClr val="DCE2E8"/>
+                      </a:solidFill>
+                      <a:prstDash val="solid"/>
+                      <a:round/>
+                      <a:headEnd type="none" w="med" len="med"/>
+                      <a:tailEnd type="none" w="med" len="med"/>
+                    </a:lnT>
+                    <a:lnB w="12700" cap="flat" cmpd="sng" algn="ctr">
+                      <a:solidFill>
+                        <a:srgbClr val="DCE2E8"/>
+                      </a:solidFill>
+                      <a:prstDash val="solid"/>
+                      <a:round/>
+                      <a:headEnd type="none" w="med" len="med"/>
+                      <a:tailEnd type="none" w="med" len="med"/>
+                    </a:lnB>
+                    <a:solidFill>
+                      <a:srgbClr val="EAF6F2"/>
+                    </a:solidFill>
+                  </a:tcPr>
+                </a:tc>
+                <a:tc hMerge="1">
+                  <a:tcPr/>
+                </a:tc>
+                <a:tc hMerge="1">
+                  <a:tcPr/>
+                </a:tc>
+                <a:tc hMerge="1">
+                  <a:tcPr/>
+                </a:tc>
+                <a:tc hMerge="1">
+                  <a:tcPr/>
+                </a:tc>
+              </a:tr>
+              <a:tr h="329184">
                 <a:tc>
                   <a:txBody>
                     <a:bodyPr/>
@@ -4244,17 +3842,17 @@
                         <a:buNone/>
                       </a:pPr>
                       <a:r>
-                        <a:rPr lang="en-US" sz="1150" b="1" dirty="0">
+                        <a:rPr lang="en-US" sz="1100" b="1" dirty="0">
                           <a:solidFill>
-                            <a:srgbClr val="1F2733"/>
+                            <a:srgbClr val="D78A27"/>
                           </a:solidFill>
                           <a:latin typeface="Calibri" pitchFamily="34" charset="0"/>
                           <a:ea typeface="Calibri" pitchFamily="34" charset="-122"/>
                           <a:cs typeface="Calibri" pitchFamily="34" charset="-120"/>
                         </a:rPr>
-                        <a:t>UK</a:t>
+                        <a:t>[IB_CAMP_1]</a:t>
                       </a:r>
-                      <a:endParaRPr lang="en-US" sz="1150" dirty="0">
+                      <a:endParaRPr lang="en-US" sz="1100" dirty="0">
                         <a:latin typeface="Calibri" charset="0"/>
                         <a:ea typeface="Calibri" charset="0"/>
                         <a:cs typeface="Calibri" charset="0"/>
@@ -4312,7 +3910,7 @@
                         <a:buNone/>
                       </a:pPr>
                       <a:r>
-                        <a:rPr lang="en-US" sz="1150" b="1" dirty="0">
+                        <a:rPr lang="en-US" sz="1100" b="1" dirty="0">
                           <a:solidFill>
                             <a:srgbClr val="D78A27"/>
                           </a:solidFill>
@@ -4320,9 +3918,9 @@
                           <a:ea typeface="Calibri" pitchFamily="34" charset="-122"/>
                           <a:cs typeface="Calibri" pitchFamily="34" charset="-120"/>
                         </a:rPr>
-                        <a:t>[SPEND_UK]</a:t>
+                        <a:t>[IB_SPEND_1]</a:t>
                       </a:r>
-                      <a:endParaRPr lang="en-US" sz="1150" dirty="0">
+                      <a:endParaRPr lang="en-US" sz="1100" dirty="0">
                         <a:latin typeface="Calibri" charset="0"/>
                         <a:ea typeface="Calibri" charset="0"/>
                         <a:cs typeface="Calibri" charset="0"/>
@@ -4380,7 +3978,7 @@
                         <a:buNone/>
                       </a:pPr>
                       <a:r>
-                        <a:rPr lang="en-US" sz="1150" b="1" dirty="0">
+                        <a:rPr lang="en-US" sz="1100" b="1" dirty="0">
                           <a:solidFill>
                             <a:srgbClr val="D78A27"/>
                           </a:solidFill>
@@ -4388,9 +3986,9 @@
                           <a:ea typeface="Calibri" pitchFamily="34" charset="-122"/>
                           <a:cs typeface="Calibri" pitchFamily="34" charset="-120"/>
                         </a:rPr>
-                        <a:t>[LEADS_UK]</a:t>
+                        <a:t>[IB_LEADS_1]</a:t>
                       </a:r>
-                      <a:endParaRPr lang="en-US" sz="1150" dirty="0">
+                      <a:endParaRPr lang="en-US" sz="1100" dirty="0">
                         <a:latin typeface="Calibri" charset="0"/>
                         <a:ea typeface="Calibri" charset="0"/>
                         <a:cs typeface="Calibri" charset="0"/>
@@ -4448,7 +4046,7 @@
                         <a:buNone/>
                       </a:pPr>
                       <a:r>
-                        <a:rPr lang="en-US" sz="1150" b="1" dirty="0">
+                        <a:rPr lang="en-US" sz="1100" b="1" dirty="0">
                           <a:solidFill>
                             <a:srgbClr val="D78A27"/>
                           </a:solidFill>
@@ -4456,9 +4054,147 @@
                           <a:ea typeface="Calibri" pitchFamily="34" charset="-122"/>
                           <a:cs typeface="Calibri" pitchFamily="34" charset="-120"/>
                         </a:rPr>
-                        <a:t>[CPL_UK]</a:t>
+                        <a:t>[IB_CPL_1]</a:t>
                       </a:r>
-                      <a:endParaRPr lang="en-US" sz="1150" dirty="0">
+                      <a:endParaRPr lang="en-US" sz="1100" dirty="0">
+                        <a:latin typeface="Calibri" charset="0"/>
+                        <a:ea typeface="Calibri" charset="0"/>
+                        <a:cs typeface="Calibri" charset="0"/>
+                      </a:endParaRPr>
+                    </a:p>
+                  </a:txBody>
+                  <a:tcPr marL="50800" marR="50800" marT="50800" marB="50800" anchor="ctr">
+                    <a:lnL w="12700" cap="flat" cmpd="sng" algn="ctr">
+                      <a:solidFill>
+                        <a:srgbClr val="DCE2E8"/>
+                      </a:solidFill>
+                      <a:prstDash val="solid"/>
+                      <a:round/>
+                      <a:headEnd type="none" w="med" len="med"/>
+                      <a:tailEnd type="none" w="med" len="med"/>
+                    </a:lnL>
+                    <a:lnR w="12700" cap="flat" cmpd="sng" algn="ctr">
+                      <a:solidFill>
+                        <a:srgbClr val="DCE2E8"/>
+                      </a:solidFill>
+                      <a:prstDash val="solid"/>
+                      <a:round/>
+                      <a:headEnd type="none" w="med" len="med"/>
+                      <a:tailEnd type="none" w="med" len="med"/>
+                    </a:lnR>
+                    <a:lnT w="12700" cap="flat" cmpd="sng" algn="ctr">
+                      <a:solidFill>
+                        <a:srgbClr val="DCE2E8"/>
+                      </a:solidFill>
+                      <a:prstDash val="solid"/>
+                      <a:round/>
+                      <a:headEnd type="none" w="med" len="med"/>
+                      <a:tailEnd type="none" w="med" len="med"/>
+                    </a:lnT>
+                    <a:lnB w="12700" cap="flat" cmpd="sng" algn="ctr">
+                      <a:solidFill>
+                        <a:srgbClr val="DCE2E8"/>
+                      </a:solidFill>
+                      <a:prstDash val="solid"/>
+                      <a:round/>
+                      <a:headEnd type="none" w="med" len="med"/>
+                      <a:tailEnd type="none" w="med" len="med"/>
+                    </a:lnB>
+                    <a:solidFill>
+                      <a:srgbClr val="FFFFFF"/>
+                    </a:solidFill>
+                  </a:tcPr>
+                </a:tc>
+                <a:tc>
+                  <a:txBody>
+                    <a:bodyPr/>
+                    <a:lstStyle/>
+                    <a:p>
+                      <a:pPr algn="l" indent="0" marL="0">
+                        <a:buNone/>
+                      </a:pPr>
+                      <a:r>
+                        <a:rPr lang="en-US" sz="1100" b="1" dirty="0">
+                          <a:solidFill>
+                            <a:srgbClr val="D78A27"/>
+                          </a:solidFill>
+                          <a:latin typeface="Calibri" pitchFamily="34" charset="0"/>
+                          <a:ea typeface="Calibri" pitchFamily="34" charset="-122"/>
+                          <a:cs typeface="Calibri" pitchFamily="34" charset="-120"/>
+                        </a:rPr>
+                        <a:t>[IB_THEME_1]</a:t>
+                      </a:r>
+                      <a:endParaRPr lang="en-US" sz="1100" dirty="0">
+                        <a:latin typeface="Calibri" charset="0"/>
+                        <a:ea typeface="Calibri" charset="0"/>
+                        <a:cs typeface="Calibri" charset="0"/>
+                      </a:endParaRPr>
+                    </a:p>
+                  </a:txBody>
+                  <a:tcPr marL="50800" marR="50800" marT="50800" marB="50800" anchor="ctr">
+                    <a:lnL w="12700" cap="flat" cmpd="sng" algn="ctr">
+                      <a:solidFill>
+                        <a:srgbClr val="DCE2E8"/>
+                      </a:solidFill>
+                      <a:prstDash val="solid"/>
+                      <a:round/>
+                      <a:headEnd type="none" w="med" len="med"/>
+                      <a:tailEnd type="none" w="med" len="med"/>
+                    </a:lnL>
+                    <a:lnR w="12700" cap="flat" cmpd="sng" algn="ctr">
+                      <a:solidFill>
+                        <a:srgbClr val="DCE2E8"/>
+                      </a:solidFill>
+                      <a:prstDash val="solid"/>
+                      <a:round/>
+                      <a:headEnd type="none" w="med" len="med"/>
+                      <a:tailEnd type="none" w="med" len="med"/>
+                    </a:lnR>
+                    <a:lnT w="12700" cap="flat" cmpd="sng" algn="ctr">
+                      <a:solidFill>
+                        <a:srgbClr val="DCE2E8"/>
+                      </a:solidFill>
+                      <a:prstDash val="solid"/>
+                      <a:round/>
+                      <a:headEnd type="none" w="med" len="med"/>
+                      <a:tailEnd type="none" w="med" len="med"/>
+                    </a:lnT>
+                    <a:lnB w="12700" cap="flat" cmpd="sng" algn="ctr">
+                      <a:solidFill>
+                        <a:srgbClr val="DCE2E8"/>
+                      </a:solidFill>
+                      <a:prstDash val="solid"/>
+                      <a:round/>
+                      <a:headEnd type="none" w="med" len="med"/>
+                      <a:tailEnd type="none" w="med" len="med"/>
+                    </a:lnB>
+                    <a:solidFill>
+                      <a:srgbClr val="FFFFFF"/>
+                    </a:solidFill>
+                  </a:tcPr>
+                </a:tc>
+              </a:tr>
+              <a:tr h="329184">
+                <a:tc>
+                  <a:txBody>
+                    <a:bodyPr/>
+                    <a:lstStyle/>
+                    <a:p>
+                      <a:pPr algn="l" indent="0" marL="0">
+                        <a:buNone/>
+                      </a:pPr>
+                      <a:r>
+                        <a:rPr lang="en-US" sz="1100" b="1" dirty="0">
+                          <a:solidFill>
+                            <a:srgbClr val="D78A27"/>
+                          </a:solidFill>
+                          <a:latin typeface="Calibri" pitchFamily="34" charset="0"/>
+                          <a:ea typeface="Calibri" pitchFamily="34" charset="-122"/>
+                          <a:cs typeface="Calibri" pitchFamily="34" charset="-120"/>
+                        </a:rPr>
+                        <a:t>[IB_CAMP_2]</a:t>
+                      </a:r>
+                      <a:endParaRPr lang="en-US" sz="1100" dirty="0">
                         <a:latin typeface="Calibri" charset="0"/>
                         <a:ea typeface="Calibri" charset="0"/>
                         <a:cs typeface="Calibri" charset="0"/>
@@ -4516,7 +4252,7 @@
                         <a:buNone/>
                       </a:pPr>
                       <a:r>
-                        <a:rPr lang="en-US" sz="1150" b="1" dirty="0">
+                        <a:rPr lang="en-US" sz="1100" b="1" dirty="0">
                           <a:solidFill>
                             <a:srgbClr val="D78A27"/>
                           </a:solidFill>
@@ -4524,79 +4260,9 @@
                           <a:ea typeface="Calibri" pitchFamily="34" charset="-122"/>
                           <a:cs typeface="Calibri" pitchFamily="34" charset="-120"/>
                         </a:rPr>
-                        <a:t>[TOPCAMP_UK]</a:t>
+                        <a:t>[IB_SPEND_2]</a:t>
                       </a:r>
-                      <a:endParaRPr lang="en-US" sz="1150" dirty="0">
-                        <a:latin typeface="Calibri" charset="0"/>
-                        <a:ea typeface="Calibri" charset="0"/>
-                        <a:cs typeface="Calibri" charset="0"/>
-                      </a:endParaRPr>
-                    </a:p>
-                  </a:txBody>
-                  <a:tcPr marL="50800" marR="50800" marT="50800" marB="50800" anchor="ctr">
-                    <a:lnL w="12700" cap="flat" cmpd="sng" algn="ctr">
-                      <a:solidFill>
-                        <a:srgbClr val="DCE2E8"/>
-                      </a:solidFill>
-                      <a:prstDash val="solid"/>
-                      <a:round/>
-                      <a:headEnd type="none" w="med" len="med"/>
-                      <a:tailEnd type="none" w="med" len="med"/>
-                    </a:lnL>
-                    <a:lnR w="12700" cap="flat" cmpd="sng" algn="ctr">
-                      <a:solidFill>
-                        <a:srgbClr val="DCE2E8"/>
-                      </a:solidFill>
-                      <a:prstDash val="solid"/>
-                      <a:round/>
-                      <a:headEnd type="none" w="med" len="med"/>
-                      <a:tailEnd type="none" w="med" len="med"/>
-                    </a:lnR>
-                    <a:lnT w="12700" cap="flat" cmpd="sng" algn="ctr">
-                      <a:solidFill>
-                        <a:srgbClr val="DCE2E8"/>
-                      </a:solidFill>
-                      <a:prstDash val="solid"/>
-                      <a:round/>
-                      <a:headEnd type="none" w="med" len="med"/>
-                      <a:tailEnd type="none" w="med" len="med"/>
-                    </a:lnT>
-                    <a:lnB w="12700" cap="flat" cmpd="sng" algn="ctr">
-                      <a:solidFill>
-                        <a:srgbClr val="DCE2E8"/>
-                      </a:solidFill>
-                      <a:prstDash val="solid"/>
-                      <a:round/>
-                      <a:headEnd type="none" w="med" len="med"/>
-                      <a:tailEnd type="none" w="med" len="med"/>
-                    </a:lnB>
-                    <a:solidFill>
-                      <a:srgbClr val="FFFFFF"/>
-                    </a:solidFill>
-                  </a:tcPr>
-                </a:tc>
-              </a:tr>
-              <a:tr h="548640">
-                <a:tc>
-                  <a:txBody>
-                    <a:bodyPr/>
-                    <a:lstStyle/>
-                    <a:p>
-                      <a:pPr algn="l" indent="0" marL="0">
-                        <a:buNone/>
-                      </a:pPr>
-                      <a:r>
-                        <a:rPr lang="en-US" sz="1150" b="1" dirty="0">
-                          <a:solidFill>
-                            <a:srgbClr val="1F2733"/>
-                          </a:solidFill>
-                          <a:latin typeface="Calibri" pitchFamily="34" charset="0"/>
-                          <a:ea typeface="Calibri" pitchFamily="34" charset="-122"/>
-                          <a:cs typeface="Calibri" pitchFamily="34" charset="-120"/>
-                        </a:rPr>
-                        <a:t>Spain</a:t>
-                      </a:r>
-                      <a:endParaRPr lang="en-US" sz="1150" dirty="0">
+                      <a:endParaRPr lang="en-US" sz="1100" dirty="0">
                         <a:latin typeface="Calibri" charset="0"/>
                         <a:ea typeface="Calibri" charset="0"/>
                         <a:cs typeface="Calibri" charset="0"/>
@@ -4654,7 +4320,7 @@
                         <a:buNone/>
                       </a:pPr>
                       <a:r>
-                        <a:rPr lang="en-US" sz="1150" b="1" dirty="0">
+                        <a:rPr lang="en-US" sz="1100" b="1" dirty="0">
                           <a:solidFill>
                             <a:srgbClr val="D78A27"/>
                           </a:solidFill>
@@ -4662,9 +4328,9 @@
                           <a:ea typeface="Calibri" pitchFamily="34" charset="-122"/>
                           <a:cs typeface="Calibri" pitchFamily="34" charset="-120"/>
                         </a:rPr>
-                        <a:t>[SPEND_ES]</a:t>
+                        <a:t>[IB_LEADS_2]</a:t>
                       </a:r>
-                      <a:endParaRPr lang="en-US" sz="1150" dirty="0">
+                      <a:endParaRPr lang="en-US" sz="1100" dirty="0">
                         <a:latin typeface="Calibri" charset="0"/>
                         <a:ea typeface="Calibri" charset="0"/>
                         <a:cs typeface="Calibri" charset="0"/>
@@ -4722,7 +4388,7 @@
                         <a:buNone/>
                       </a:pPr>
                       <a:r>
-                        <a:rPr lang="en-US" sz="1150" b="1" dirty="0">
+                        <a:rPr lang="en-US" sz="1100" b="1" dirty="0">
                           <a:solidFill>
                             <a:srgbClr val="D78A27"/>
                           </a:solidFill>
@@ -4730,9 +4396,147 @@
                           <a:ea typeface="Calibri" pitchFamily="34" charset="-122"/>
                           <a:cs typeface="Calibri" pitchFamily="34" charset="-120"/>
                         </a:rPr>
-                        <a:t>[LEADS_ES]</a:t>
+                        <a:t>[IB_CPL_2]</a:t>
                       </a:r>
-                      <a:endParaRPr lang="en-US" sz="1150" dirty="0">
+                      <a:endParaRPr lang="en-US" sz="1100" dirty="0">
+                        <a:latin typeface="Calibri" charset="0"/>
+                        <a:ea typeface="Calibri" charset="0"/>
+                        <a:cs typeface="Calibri" charset="0"/>
+                      </a:endParaRPr>
+                    </a:p>
+                  </a:txBody>
+                  <a:tcPr marL="50800" marR="50800" marT="50800" marB="50800" anchor="ctr">
+                    <a:lnL w="12700" cap="flat" cmpd="sng" algn="ctr">
+                      <a:solidFill>
+                        <a:srgbClr val="DCE2E8"/>
+                      </a:solidFill>
+                      <a:prstDash val="solid"/>
+                      <a:round/>
+                      <a:headEnd type="none" w="med" len="med"/>
+                      <a:tailEnd type="none" w="med" len="med"/>
+                    </a:lnL>
+                    <a:lnR w="12700" cap="flat" cmpd="sng" algn="ctr">
+                      <a:solidFill>
+                        <a:srgbClr val="DCE2E8"/>
+                      </a:solidFill>
+                      <a:prstDash val="solid"/>
+                      <a:round/>
+                      <a:headEnd type="none" w="med" len="med"/>
+                      <a:tailEnd type="none" w="med" len="med"/>
+                    </a:lnR>
+                    <a:lnT w="12700" cap="flat" cmpd="sng" algn="ctr">
+                      <a:solidFill>
+                        <a:srgbClr val="DCE2E8"/>
+                      </a:solidFill>
+                      <a:prstDash val="solid"/>
+                      <a:round/>
+                      <a:headEnd type="none" w="med" len="med"/>
+                      <a:tailEnd type="none" w="med" len="med"/>
+                    </a:lnT>
+                    <a:lnB w="12700" cap="flat" cmpd="sng" algn="ctr">
+                      <a:solidFill>
+                        <a:srgbClr val="DCE2E8"/>
+                      </a:solidFill>
+                      <a:prstDash val="solid"/>
+                      <a:round/>
+                      <a:headEnd type="none" w="med" len="med"/>
+                      <a:tailEnd type="none" w="med" len="med"/>
+                    </a:lnB>
+                    <a:solidFill>
+                      <a:srgbClr val="FFFFFF"/>
+                    </a:solidFill>
+                  </a:tcPr>
+                </a:tc>
+                <a:tc>
+                  <a:txBody>
+                    <a:bodyPr/>
+                    <a:lstStyle/>
+                    <a:p>
+                      <a:pPr algn="l" indent="0" marL="0">
+                        <a:buNone/>
+                      </a:pPr>
+                      <a:r>
+                        <a:rPr lang="en-US" sz="1100" b="1" dirty="0">
+                          <a:solidFill>
+                            <a:srgbClr val="D78A27"/>
+                          </a:solidFill>
+                          <a:latin typeface="Calibri" pitchFamily="34" charset="0"/>
+                          <a:ea typeface="Calibri" pitchFamily="34" charset="-122"/>
+                          <a:cs typeface="Calibri" pitchFamily="34" charset="-120"/>
+                        </a:rPr>
+                        <a:t>[IB_THEME_2]</a:t>
+                      </a:r>
+                      <a:endParaRPr lang="en-US" sz="1100" dirty="0">
+                        <a:latin typeface="Calibri" charset="0"/>
+                        <a:ea typeface="Calibri" charset="0"/>
+                        <a:cs typeface="Calibri" charset="0"/>
+                      </a:endParaRPr>
+                    </a:p>
+                  </a:txBody>
+                  <a:tcPr marL="50800" marR="50800" marT="50800" marB="50800" anchor="ctr">
+                    <a:lnL w="12700" cap="flat" cmpd="sng" algn="ctr">
+                      <a:solidFill>
+                        <a:srgbClr val="DCE2E8"/>
+                      </a:solidFill>
+                      <a:prstDash val="solid"/>
+                      <a:round/>
+                      <a:headEnd type="none" w="med" len="med"/>
+                      <a:tailEnd type="none" w="med" len="med"/>
+                    </a:lnL>
+                    <a:lnR w="12700" cap="flat" cmpd="sng" algn="ctr">
+                      <a:solidFill>
+                        <a:srgbClr val="DCE2E8"/>
+                      </a:solidFill>
+                      <a:prstDash val="solid"/>
+                      <a:round/>
+                      <a:headEnd type="none" w="med" len="med"/>
+                      <a:tailEnd type="none" w="med" len="med"/>
+                    </a:lnR>
+                    <a:lnT w="12700" cap="flat" cmpd="sng" algn="ctr">
+                      <a:solidFill>
+                        <a:srgbClr val="DCE2E8"/>
+                      </a:solidFill>
+                      <a:prstDash val="solid"/>
+                      <a:round/>
+                      <a:headEnd type="none" w="med" len="med"/>
+                      <a:tailEnd type="none" w="med" len="med"/>
+                    </a:lnT>
+                    <a:lnB w="12700" cap="flat" cmpd="sng" algn="ctr">
+                      <a:solidFill>
+                        <a:srgbClr val="DCE2E8"/>
+                      </a:solidFill>
+                      <a:prstDash val="solid"/>
+                      <a:round/>
+                      <a:headEnd type="none" w="med" len="med"/>
+                      <a:tailEnd type="none" w="med" len="med"/>
+                    </a:lnB>
+                    <a:solidFill>
+                      <a:srgbClr val="FFFFFF"/>
+                    </a:solidFill>
+                  </a:tcPr>
+                </a:tc>
+              </a:tr>
+              <a:tr h="329184">
+                <a:tc>
+                  <a:txBody>
+                    <a:bodyPr/>
+                    <a:lstStyle/>
+                    <a:p>
+                      <a:pPr algn="l" indent="0" marL="0">
+                        <a:buNone/>
+                      </a:pPr>
+                      <a:r>
+                        <a:rPr lang="en-US" sz="1100" b="1" dirty="0">
+                          <a:solidFill>
+                            <a:srgbClr val="D78A27"/>
+                          </a:solidFill>
+                          <a:latin typeface="Calibri" pitchFamily="34" charset="0"/>
+                          <a:ea typeface="Calibri" pitchFamily="34" charset="-122"/>
+                          <a:cs typeface="Calibri" pitchFamily="34" charset="-120"/>
+                        </a:rPr>
+                        <a:t>[IB_CAMP_3]</a:t>
+                      </a:r>
+                      <a:endParaRPr lang="en-US" sz="1100" dirty="0">
                         <a:latin typeface="Calibri" charset="0"/>
                         <a:ea typeface="Calibri" charset="0"/>
                         <a:cs typeface="Calibri" charset="0"/>
@@ -4790,7 +4594,7 @@
                         <a:buNone/>
                       </a:pPr>
                       <a:r>
-                        <a:rPr lang="en-US" sz="1150" b="1" dirty="0">
+                        <a:rPr lang="en-US" sz="1100" b="1" dirty="0">
                           <a:solidFill>
                             <a:srgbClr val="D78A27"/>
                           </a:solidFill>
@@ -4798,9 +4602,9 @@
                           <a:ea typeface="Calibri" pitchFamily="34" charset="-122"/>
                           <a:cs typeface="Calibri" pitchFamily="34" charset="-120"/>
                         </a:rPr>
-                        <a:t>[CPL_ES]</a:t>
+                        <a:t>[IB_SPEND_3]</a:t>
                       </a:r>
-                      <a:endParaRPr lang="en-US" sz="1150" dirty="0">
+                      <a:endParaRPr lang="en-US" sz="1100" dirty="0">
                         <a:latin typeface="Calibri" charset="0"/>
                         <a:ea typeface="Calibri" charset="0"/>
                         <a:cs typeface="Calibri" charset="0"/>
@@ -4858,7 +4662,7 @@
                         <a:buNone/>
                       </a:pPr>
                       <a:r>
-                        <a:rPr lang="en-US" sz="1150" b="1" dirty="0">
+                        <a:rPr lang="en-US" sz="1100" b="1" dirty="0">
                           <a:solidFill>
                             <a:srgbClr val="D78A27"/>
                           </a:solidFill>
@@ -4866,79 +4670,9 @@
                           <a:ea typeface="Calibri" pitchFamily="34" charset="-122"/>
                           <a:cs typeface="Calibri" pitchFamily="34" charset="-120"/>
                         </a:rPr>
-                        <a:t>[TOPCAMP_ES]</a:t>
+                        <a:t>[IB_LEADS_3]</a:t>
                       </a:r>
-                      <a:endParaRPr lang="en-US" sz="1150" dirty="0">
-                        <a:latin typeface="Calibri" charset="0"/>
-                        <a:ea typeface="Calibri" charset="0"/>
-                        <a:cs typeface="Calibri" charset="0"/>
-                      </a:endParaRPr>
-                    </a:p>
-                  </a:txBody>
-                  <a:tcPr marL="50800" marR="50800" marT="50800" marB="50800" anchor="ctr">
-                    <a:lnL w="12700" cap="flat" cmpd="sng" algn="ctr">
-                      <a:solidFill>
-                        <a:srgbClr val="DCE2E8"/>
-                      </a:solidFill>
-                      <a:prstDash val="solid"/>
-                      <a:round/>
-                      <a:headEnd type="none" w="med" len="med"/>
-                      <a:tailEnd type="none" w="med" len="med"/>
-                    </a:lnL>
-                    <a:lnR w="12700" cap="flat" cmpd="sng" algn="ctr">
-                      <a:solidFill>
-                        <a:srgbClr val="DCE2E8"/>
-                      </a:solidFill>
-                      <a:prstDash val="solid"/>
-                      <a:round/>
-                      <a:headEnd type="none" w="med" len="med"/>
-                      <a:tailEnd type="none" w="med" len="med"/>
-                    </a:lnR>
-                    <a:lnT w="12700" cap="flat" cmpd="sng" algn="ctr">
-                      <a:solidFill>
-                        <a:srgbClr val="DCE2E8"/>
-                      </a:solidFill>
-                      <a:prstDash val="solid"/>
-                      <a:round/>
-                      <a:headEnd type="none" w="med" len="med"/>
-                      <a:tailEnd type="none" w="med" len="med"/>
-                    </a:lnT>
-                    <a:lnB w="12700" cap="flat" cmpd="sng" algn="ctr">
-                      <a:solidFill>
-                        <a:srgbClr val="DCE2E8"/>
-                      </a:solidFill>
-                      <a:prstDash val="solid"/>
-                      <a:round/>
-                      <a:headEnd type="none" w="med" len="med"/>
-                      <a:tailEnd type="none" w="med" len="med"/>
-                    </a:lnB>
-                    <a:solidFill>
-                      <a:srgbClr val="FFFFFF"/>
-                    </a:solidFill>
-                  </a:tcPr>
-                </a:tc>
-              </a:tr>
-              <a:tr h="548640">
-                <a:tc>
-                  <a:txBody>
-                    <a:bodyPr/>
-                    <a:lstStyle/>
-                    <a:p>
-                      <a:pPr algn="l" indent="0" marL="0">
-                        <a:buNone/>
-                      </a:pPr>
-                      <a:r>
-                        <a:rPr lang="en-US" sz="1150" b="1" dirty="0">
-                          <a:solidFill>
-                            <a:srgbClr val="1F2733"/>
-                          </a:solidFill>
-                          <a:latin typeface="Calibri" pitchFamily="34" charset="0"/>
-                          <a:ea typeface="Calibri" pitchFamily="34" charset="-122"/>
-                          <a:cs typeface="Calibri" pitchFamily="34" charset="-120"/>
-                        </a:rPr>
-                        <a:t>France</a:t>
-                      </a:r>
-                      <a:endParaRPr lang="en-US" sz="1150" dirty="0">
+                      <a:endParaRPr lang="en-US" sz="1100" dirty="0">
                         <a:latin typeface="Calibri" charset="0"/>
                         <a:ea typeface="Calibri" charset="0"/>
                         <a:cs typeface="Calibri" charset="0"/>
@@ -4996,7 +4730,7 @@
                         <a:buNone/>
                       </a:pPr>
                       <a:r>
-                        <a:rPr lang="en-US" sz="1150" b="1" dirty="0">
+                        <a:rPr lang="en-US" sz="1100" b="1" dirty="0">
                           <a:solidFill>
                             <a:srgbClr val="D78A27"/>
                           </a:solidFill>
@@ -5004,9 +4738,229 @@
                           <a:ea typeface="Calibri" pitchFamily="34" charset="-122"/>
                           <a:cs typeface="Calibri" pitchFamily="34" charset="-120"/>
                         </a:rPr>
-                        <a:t>[SPEND_FR]</a:t>
+                        <a:t>[IB_CPL_3]</a:t>
                       </a:r>
-                      <a:endParaRPr lang="en-US" sz="1150" dirty="0">
+                      <a:endParaRPr lang="en-US" sz="1100" dirty="0">
+                        <a:latin typeface="Calibri" charset="0"/>
+                        <a:ea typeface="Calibri" charset="0"/>
+                        <a:cs typeface="Calibri" charset="0"/>
+                      </a:endParaRPr>
+                    </a:p>
+                  </a:txBody>
+                  <a:tcPr marL="50800" marR="50800" marT="50800" marB="50800" anchor="ctr">
+                    <a:lnL w="12700" cap="flat" cmpd="sng" algn="ctr">
+                      <a:solidFill>
+                        <a:srgbClr val="DCE2E8"/>
+                      </a:solidFill>
+                      <a:prstDash val="solid"/>
+                      <a:round/>
+                      <a:headEnd type="none" w="med" len="med"/>
+                      <a:tailEnd type="none" w="med" len="med"/>
+                    </a:lnL>
+                    <a:lnR w="12700" cap="flat" cmpd="sng" algn="ctr">
+                      <a:solidFill>
+                        <a:srgbClr val="DCE2E8"/>
+                      </a:solidFill>
+                      <a:prstDash val="solid"/>
+                      <a:round/>
+                      <a:headEnd type="none" w="med" len="med"/>
+                      <a:tailEnd type="none" w="med" len="med"/>
+                    </a:lnR>
+                    <a:lnT w="12700" cap="flat" cmpd="sng" algn="ctr">
+                      <a:solidFill>
+                        <a:srgbClr val="DCE2E8"/>
+                      </a:solidFill>
+                      <a:prstDash val="solid"/>
+                      <a:round/>
+                      <a:headEnd type="none" w="med" len="med"/>
+                      <a:tailEnd type="none" w="med" len="med"/>
+                    </a:lnT>
+                    <a:lnB w="12700" cap="flat" cmpd="sng" algn="ctr">
+                      <a:solidFill>
+                        <a:srgbClr val="DCE2E8"/>
+                      </a:solidFill>
+                      <a:prstDash val="solid"/>
+                      <a:round/>
+                      <a:headEnd type="none" w="med" len="med"/>
+                      <a:tailEnd type="none" w="med" len="med"/>
+                    </a:lnB>
+                    <a:solidFill>
+                      <a:srgbClr val="FFFFFF"/>
+                    </a:solidFill>
+                  </a:tcPr>
+                </a:tc>
+                <a:tc>
+                  <a:txBody>
+                    <a:bodyPr/>
+                    <a:lstStyle/>
+                    <a:p>
+                      <a:pPr algn="l" indent="0" marL="0">
+                        <a:buNone/>
+                      </a:pPr>
+                      <a:r>
+                        <a:rPr lang="en-US" sz="1100" b="1" dirty="0">
+                          <a:solidFill>
+                            <a:srgbClr val="D78A27"/>
+                          </a:solidFill>
+                          <a:latin typeface="Calibri" pitchFamily="34" charset="0"/>
+                          <a:ea typeface="Calibri" pitchFamily="34" charset="-122"/>
+                          <a:cs typeface="Calibri" pitchFamily="34" charset="-120"/>
+                        </a:rPr>
+                        <a:t>[IB_THEME_3]</a:t>
+                      </a:r>
+                      <a:endParaRPr lang="en-US" sz="1100" dirty="0">
+                        <a:latin typeface="Calibri" charset="0"/>
+                        <a:ea typeface="Calibri" charset="0"/>
+                        <a:cs typeface="Calibri" charset="0"/>
+                      </a:endParaRPr>
+                    </a:p>
+                  </a:txBody>
+                  <a:tcPr marL="50800" marR="50800" marT="50800" marB="50800" anchor="ctr">
+                    <a:lnL w="12700" cap="flat" cmpd="sng" algn="ctr">
+                      <a:solidFill>
+                        <a:srgbClr val="DCE2E8"/>
+                      </a:solidFill>
+                      <a:prstDash val="solid"/>
+                      <a:round/>
+                      <a:headEnd type="none" w="med" len="med"/>
+                      <a:tailEnd type="none" w="med" len="med"/>
+                    </a:lnL>
+                    <a:lnR w="12700" cap="flat" cmpd="sng" algn="ctr">
+                      <a:solidFill>
+                        <a:srgbClr val="DCE2E8"/>
+                      </a:solidFill>
+                      <a:prstDash val="solid"/>
+                      <a:round/>
+                      <a:headEnd type="none" w="med" len="med"/>
+                      <a:tailEnd type="none" w="med" len="med"/>
+                    </a:lnR>
+                    <a:lnT w="12700" cap="flat" cmpd="sng" algn="ctr">
+                      <a:solidFill>
+                        <a:srgbClr val="DCE2E8"/>
+                      </a:solidFill>
+                      <a:prstDash val="solid"/>
+                      <a:round/>
+                      <a:headEnd type="none" w="med" len="med"/>
+                      <a:tailEnd type="none" w="med" len="med"/>
+                    </a:lnT>
+                    <a:lnB w="12700" cap="flat" cmpd="sng" algn="ctr">
+                      <a:solidFill>
+                        <a:srgbClr val="DCE2E8"/>
+                      </a:solidFill>
+                      <a:prstDash val="solid"/>
+                      <a:round/>
+                      <a:headEnd type="none" w="med" len="med"/>
+                      <a:tailEnd type="none" w="med" len="med"/>
+                    </a:lnB>
+                    <a:solidFill>
+                      <a:srgbClr val="FFFFFF"/>
+                    </a:solidFill>
+                  </a:tcPr>
+                </a:tc>
+              </a:tr>
+              <a:tr h="310896">
+                <a:tc gridSpan="5">
+                  <a:txBody>
+                    <a:bodyPr/>
+                    <a:lstStyle/>
+                    <a:p>
+                      <a:pPr algn="l" indent="0" marL="0">
+                        <a:buNone/>
+                      </a:pPr>
+                      <a:r>
+                        <a:rPr lang="en-US" sz="1200" b="1" dirty="0">
+                          <a:solidFill>
+                            <a:srgbClr val="1F9E7F"/>
+                          </a:solidFill>
+                          <a:latin typeface="Calibri" pitchFamily="34" charset="0"/>
+                          <a:ea typeface="Calibri" pitchFamily="34" charset="-122"/>
+                          <a:cs typeface="Calibri" pitchFamily="34" charset="-120"/>
+                        </a:rPr>
+                        <a:t>UK</a:t>
+                      </a:r>
+                      <a:endParaRPr lang="en-US" sz="1200" dirty="0">
+                        <a:latin typeface="Calibri" charset="0"/>
+                        <a:ea typeface="Calibri" charset="0"/>
+                        <a:cs typeface="Calibri" charset="0"/>
+                      </a:endParaRPr>
+                    </a:p>
+                  </a:txBody>
+                  <a:tcPr marL="50800" marR="50800" marT="50800" marB="50800" anchor="ctr">
+                    <a:lnL w="12700" cap="flat" cmpd="sng" algn="ctr">
+                      <a:solidFill>
+                        <a:srgbClr val="DCE2E8"/>
+                      </a:solidFill>
+                      <a:prstDash val="solid"/>
+                      <a:round/>
+                      <a:headEnd type="none" w="med" len="med"/>
+                      <a:tailEnd type="none" w="med" len="med"/>
+                    </a:lnL>
+                    <a:lnR w="12700" cap="flat" cmpd="sng" algn="ctr">
+                      <a:solidFill>
+                        <a:srgbClr val="DCE2E8"/>
+                      </a:solidFill>
+                      <a:prstDash val="solid"/>
+                      <a:round/>
+                      <a:headEnd type="none" w="med" len="med"/>
+                      <a:tailEnd type="none" w="med" len="med"/>
+                    </a:lnR>
+                    <a:lnT w="12700" cap="flat" cmpd="sng" algn="ctr">
+                      <a:solidFill>
+                        <a:srgbClr val="DCE2E8"/>
+                      </a:solidFill>
+                      <a:prstDash val="solid"/>
+                      <a:round/>
+                      <a:headEnd type="none" w="med" len="med"/>
+                      <a:tailEnd type="none" w="med" len="med"/>
+                    </a:lnT>
+                    <a:lnB w="12700" cap="flat" cmpd="sng" algn="ctr">
+                      <a:solidFill>
+                        <a:srgbClr val="DCE2E8"/>
+                      </a:solidFill>
+                      <a:prstDash val="solid"/>
+                      <a:round/>
+                      <a:headEnd type="none" w="med" len="med"/>
+                      <a:tailEnd type="none" w="med" len="med"/>
+                    </a:lnB>
+                    <a:solidFill>
+                      <a:srgbClr val="EAF6F2"/>
+                    </a:solidFill>
+                  </a:tcPr>
+                </a:tc>
+                <a:tc hMerge="1">
+                  <a:tcPr/>
+                </a:tc>
+                <a:tc hMerge="1">
+                  <a:tcPr/>
+                </a:tc>
+                <a:tc hMerge="1">
+                  <a:tcPr/>
+                </a:tc>
+                <a:tc hMerge="1">
+                  <a:tcPr/>
+                </a:tc>
+              </a:tr>
+              <a:tr h="329184">
+                <a:tc>
+                  <a:txBody>
+                    <a:bodyPr/>
+                    <a:lstStyle/>
+                    <a:p>
+                      <a:pPr algn="l" indent="0" marL="0">
+                        <a:buNone/>
+                      </a:pPr>
+                      <a:r>
+                        <a:rPr lang="en-US" sz="1100" b="1" dirty="0">
+                          <a:solidFill>
+                            <a:srgbClr val="D78A27"/>
+                          </a:solidFill>
+                          <a:latin typeface="Calibri" pitchFamily="34" charset="0"/>
+                          <a:ea typeface="Calibri" pitchFamily="34" charset="-122"/>
+                          <a:cs typeface="Calibri" pitchFamily="34" charset="-120"/>
+                        </a:rPr>
+                        <a:t>[UK_CAMP_1]</a:t>
+                      </a:r>
+                      <a:endParaRPr lang="en-US" sz="1100" dirty="0">
                         <a:latin typeface="Calibri" charset="0"/>
                         <a:ea typeface="Calibri" charset="0"/>
                         <a:cs typeface="Calibri" charset="0"/>
@@ -5064,7 +5018,7 @@
                         <a:buNone/>
                       </a:pPr>
                       <a:r>
-                        <a:rPr lang="en-US" sz="1150" b="1" dirty="0">
+                        <a:rPr lang="en-US" sz="1100" b="1" dirty="0">
                           <a:solidFill>
                             <a:srgbClr val="D78A27"/>
                           </a:solidFill>
@@ -5072,9 +5026,9 @@
                           <a:ea typeface="Calibri" pitchFamily="34" charset="-122"/>
                           <a:cs typeface="Calibri" pitchFamily="34" charset="-120"/>
                         </a:rPr>
-                        <a:t>[LEADS_FR]</a:t>
+                        <a:t>[UK_SPEND_1]</a:t>
                       </a:r>
-                      <a:endParaRPr lang="en-US" sz="1150" dirty="0">
+                      <a:endParaRPr lang="en-US" sz="1100" dirty="0">
                         <a:latin typeface="Calibri" charset="0"/>
                         <a:ea typeface="Calibri" charset="0"/>
                         <a:cs typeface="Calibri" charset="0"/>
@@ -5132,7 +5086,7 @@
                         <a:buNone/>
                       </a:pPr>
                       <a:r>
-                        <a:rPr lang="en-US" sz="1150" b="1" dirty="0">
+                        <a:rPr lang="en-US" sz="1100" b="1" dirty="0">
                           <a:solidFill>
                             <a:srgbClr val="D78A27"/>
                           </a:solidFill>
@@ -5140,9 +5094,9 @@
                           <a:ea typeface="Calibri" pitchFamily="34" charset="-122"/>
                           <a:cs typeface="Calibri" pitchFamily="34" charset="-120"/>
                         </a:rPr>
-                        <a:t>[CPL_FR]</a:t>
+                        <a:t>[UK_LEADS_1]</a:t>
                       </a:r>
-                      <a:endParaRPr lang="en-US" sz="1150" dirty="0">
+                      <a:endParaRPr lang="en-US" sz="1100" dirty="0">
                         <a:latin typeface="Calibri" charset="0"/>
                         <a:ea typeface="Calibri" charset="0"/>
                         <a:cs typeface="Calibri" charset="0"/>
@@ -5200,7 +5154,7 @@
                         <a:buNone/>
                       </a:pPr>
                       <a:r>
-                        <a:rPr lang="en-US" sz="1150" b="1" dirty="0">
+                        <a:rPr lang="en-US" sz="1100" b="1" dirty="0">
                           <a:solidFill>
                             <a:srgbClr val="D78A27"/>
                           </a:solidFill>
@@ -5208,9 +5162,1869 @@
                           <a:ea typeface="Calibri" pitchFamily="34" charset="-122"/>
                           <a:cs typeface="Calibri" pitchFamily="34" charset="-120"/>
                         </a:rPr>
-                        <a:t>[TOPCAMP_FR]</a:t>
+                        <a:t>[UK_CPL_1]</a:t>
                       </a:r>
-                      <a:endParaRPr lang="en-US" sz="1150" dirty="0">
+                      <a:endParaRPr lang="en-US" sz="1100" dirty="0">
+                        <a:latin typeface="Calibri" charset="0"/>
+                        <a:ea typeface="Calibri" charset="0"/>
+                        <a:cs typeface="Calibri" charset="0"/>
+                      </a:endParaRPr>
+                    </a:p>
+                  </a:txBody>
+                  <a:tcPr marL="50800" marR="50800" marT="50800" marB="50800" anchor="ctr">
+                    <a:lnL w="12700" cap="flat" cmpd="sng" algn="ctr">
+                      <a:solidFill>
+                        <a:srgbClr val="DCE2E8"/>
+                      </a:solidFill>
+                      <a:prstDash val="solid"/>
+                      <a:round/>
+                      <a:headEnd type="none" w="med" len="med"/>
+                      <a:tailEnd type="none" w="med" len="med"/>
+                    </a:lnL>
+                    <a:lnR w="12700" cap="flat" cmpd="sng" algn="ctr">
+                      <a:solidFill>
+                        <a:srgbClr val="DCE2E8"/>
+                      </a:solidFill>
+                      <a:prstDash val="solid"/>
+                      <a:round/>
+                      <a:headEnd type="none" w="med" len="med"/>
+                      <a:tailEnd type="none" w="med" len="med"/>
+                    </a:lnR>
+                    <a:lnT w="12700" cap="flat" cmpd="sng" algn="ctr">
+                      <a:solidFill>
+                        <a:srgbClr val="DCE2E8"/>
+                      </a:solidFill>
+                      <a:prstDash val="solid"/>
+                      <a:round/>
+                      <a:headEnd type="none" w="med" len="med"/>
+                      <a:tailEnd type="none" w="med" len="med"/>
+                    </a:lnT>
+                    <a:lnB w="12700" cap="flat" cmpd="sng" algn="ctr">
+                      <a:solidFill>
+                        <a:srgbClr val="DCE2E8"/>
+                      </a:solidFill>
+                      <a:prstDash val="solid"/>
+                      <a:round/>
+                      <a:headEnd type="none" w="med" len="med"/>
+                      <a:tailEnd type="none" w="med" len="med"/>
+                    </a:lnB>
+                    <a:solidFill>
+                      <a:srgbClr val="FFFFFF"/>
+                    </a:solidFill>
+                  </a:tcPr>
+                </a:tc>
+                <a:tc>
+                  <a:txBody>
+                    <a:bodyPr/>
+                    <a:lstStyle/>
+                    <a:p>
+                      <a:pPr algn="l" indent="0" marL="0">
+                        <a:buNone/>
+                      </a:pPr>
+                      <a:r>
+                        <a:rPr lang="en-US" sz="1100" b="1" dirty="0">
+                          <a:solidFill>
+                            <a:srgbClr val="D78A27"/>
+                          </a:solidFill>
+                          <a:latin typeface="Calibri" pitchFamily="34" charset="0"/>
+                          <a:ea typeface="Calibri" pitchFamily="34" charset="-122"/>
+                          <a:cs typeface="Calibri" pitchFamily="34" charset="-120"/>
+                        </a:rPr>
+                        <a:t>[UK_THEME_1]</a:t>
+                      </a:r>
+                      <a:endParaRPr lang="en-US" sz="1100" dirty="0">
+                        <a:latin typeface="Calibri" charset="0"/>
+                        <a:ea typeface="Calibri" charset="0"/>
+                        <a:cs typeface="Calibri" charset="0"/>
+                      </a:endParaRPr>
+                    </a:p>
+                  </a:txBody>
+                  <a:tcPr marL="50800" marR="50800" marT="50800" marB="50800" anchor="ctr">
+                    <a:lnL w="12700" cap="flat" cmpd="sng" algn="ctr">
+                      <a:solidFill>
+                        <a:srgbClr val="DCE2E8"/>
+                      </a:solidFill>
+                      <a:prstDash val="solid"/>
+                      <a:round/>
+                      <a:headEnd type="none" w="med" len="med"/>
+                      <a:tailEnd type="none" w="med" len="med"/>
+                    </a:lnL>
+                    <a:lnR w="12700" cap="flat" cmpd="sng" algn="ctr">
+                      <a:solidFill>
+                        <a:srgbClr val="DCE2E8"/>
+                      </a:solidFill>
+                      <a:prstDash val="solid"/>
+                      <a:round/>
+                      <a:headEnd type="none" w="med" len="med"/>
+                      <a:tailEnd type="none" w="med" len="med"/>
+                    </a:lnR>
+                    <a:lnT w="12700" cap="flat" cmpd="sng" algn="ctr">
+                      <a:solidFill>
+                        <a:srgbClr val="DCE2E8"/>
+                      </a:solidFill>
+                      <a:prstDash val="solid"/>
+                      <a:round/>
+                      <a:headEnd type="none" w="med" len="med"/>
+                      <a:tailEnd type="none" w="med" len="med"/>
+                    </a:lnT>
+                    <a:lnB w="12700" cap="flat" cmpd="sng" algn="ctr">
+                      <a:solidFill>
+                        <a:srgbClr val="DCE2E8"/>
+                      </a:solidFill>
+                      <a:prstDash val="solid"/>
+                      <a:round/>
+                      <a:headEnd type="none" w="med" len="med"/>
+                      <a:tailEnd type="none" w="med" len="med"/>
+                    </a:lnB>
+                    <a:solidFill>
+                      <a:srgbClr val="FFFFFF"/>
+                    </a:solidFill>
+                  </a:tcPr>
+                </a:tc>
+              </a:tr>
+              <a:tr h="329184">
+                <a:tc>
+                  <a:txBody>
+                    <a:bodyPr/>
+                    <a:lstStyle/>
+                    <a:p>
+                      <a:pPr algn="l" indent="0" marL="0">
+                        <a:buNone/>
+                      </a:pPr>
+                      <a:r>
+                        <a:rPr lang="en-US" sz="1100" b="1" dirty="0">
+                          <a:solidFill>
+                            <a:srgbClr val="D78A27"/>
+                          </a:solidFill>
+                          <a:latin typeface="Calibri" pitchFamily="34" charset="0"/>
+                          <a:ea typeface="Calibri" pitchFamily="34" charset="-122"/>
+                          <a:cs typeface="Calibri" pitchFamily="34" charset="-120"/>
+                        </a:rPr>
+                        <a:t>[UK_CAMP_2]</a:t>
+                      </a:r>
+                      <a:endParaRPr lang="en-US" sz="1100" dirty="0">
+                        <a:latin typeface="Calibri" charset="0"/>
+                        <a:ea typeface="Calibri" charset="0"/>
+                        <a:cs typeface="Calibri" charset="0"/>
+                      </a:endParaRPr>
+                    </a:p>
+                  </a:txBody>
+                  <a:tcPr marL="50800" marR="50800" marT="50800" marB="50800" anchor="ctr">
+                    <a:lnL w="12700" cap="flat" cmpd="sng" algn="ctr">
+                      <a:solidFill>
+                        <a:srgbClr val="DCE2E8"/>
+                      </a:solidFill>
+                      <a:prstDash val="solid"/>
+                      <a:round/>
+                      <a:headEnd type="none" w="med" len="med"/>
+                      <a:tailEnd type="none" w="med" len="med"/>
+                    </a:lnL>
+                    <a:lnR w="12700" cap="flat" cmpd="sng" algn="ctr">
+                      <a:solidFill>
+                        <a:srgbClr val="DCE2E8"/>
+                      </a:solidFill>
+                      <a:prstDash val="solid"/>
+                      <a:round/>
+                      <a:headEnd type="none" w="med" len="med"/>
+                      <a:tailEnd type="none" w="med" len="med"/>
+                    </a:lnR>
+                    <a:lnT w="12700" cap="flat" cmpd="sng" algn="ctr">
+                      <a:solidFill>
+                        <a:srgbClr val="DCE2E8"/>
+                      </a:solidFill>
+                      <a:prstDash val="solid"/>
+                      <a:round/>
+                      <a:headEnd type="none" w="med" len="med"/>
+                      <a:tailEnd type="none" w="med" len="med"/>
+                    </a:lnT>
+                    <a:lnB w="12700" cap="flat" cmpd="sng" algn="ctr">
+                      <a:solidFill>
+                        <a:srgbClr val="DCE2E8"/>
+                      </a:solidFill>
+                      <a:prstDash val="solid"/>
+                      <a:round/>
+                      <a:headEnd type="none" w="med" len="med"/>
+                      <a:tailEnd type="none" w="med" len="med"/>
+                    </a:lnB>
+                    <a:solidFill>
+                      <a:srgbClr val="FFFFFF"/>
+                    </a:solidFill>
+                  </a:tcPr>
+                </a:tc>
+                <a:tc>
+                  <a:txBody>
+                    <a:bodyPr/>
+                    <a:lstStyle/>
+                    <a:p>
+                      <a:pPr algn="ctr" indent="0" marL="0">
+                        <a:buNone/>
+                      </a:pPr>
+                      <a:r>
+                        <a:rPr lang="en-US" sz="1100" b="1" dirty="0">
+                          <a:solidFill>
+                            <a:srgbClr val="D78A27"/>
+                          </a:solidFill>
+                          <a:latin typeface="Calibri" pitchFamily="34" charset="0"/>
+                          <a:ea typeface="Calibri" pitchFamily="34" charset="-122"/>
+                          <a:cs typeface="Calibri" pitchFamily="34" charset="-120"/>
+                        </a:rPr>
+                        <a:t>[UK_SPEND_2]</a:t>
+                      </a:r>
+                      <a:endParaRPr lang="en-US" sz="1100" dirty="0">
+                        <a:latin typeface="Calibri" charset="0"/>
+                        <a:ea typeface="Calibri" charset="0"/>
+                        <a:cs typeface="Calibri" charset="0"/>
+                      </a:endParaRPr>
+                    </a:p>
+                  </a:txBody>
+                  <a:tcPr marL="50800" marR="50800" marT="50800" marB="50800" anchor="ctr">
+                    <a:lnL w="12700" cap="flat" cmpd="sng" algn="ctr">
+                      <a:solidFill>
+                        <a:srgbClr val="DCE2E8"/>
+                      </a:solidFill>
+                      <a:prstDash val="solid"/>
+                      <a:round/>
+                      <a:headEnd type="none" w="med" len="med"/>
+                      <a:tailEnd type="none" w="med" len="med"/>
+                    </a:lnL>
+                    <a:lnR w="12700" cap="flat" cmpd="sng" algn="ctr">
+                      <a:solidFill>
+                        <a:srgbClr val="DCE2E8"/>
+                      </a:solidFill>
+                      <a:prstDash val="solid"/>
+                      <a:round/>
+                      <a:headEnd type="none" w="med" len="med"/>
+                      <a:tailEnd type="none" w="med" len="med"/>
+                    </a:lnR>
+                    <a:lnT w="12700" cap="flat" cmpd="sng" algn="ctr">
+                      <a:solidFill>
+                        <a:srgbClr val="DCE2E8"/>
+                      </a:solidFill>
+                      <a:prstDash val="solid"/>
+                      <a:round/>
+                      <a:headEnd type="none" w="med" len="med"/>
+                      <a:tailEnd type="none" w="med" len="med"/>
+                    </a:lnT>
+                    <a:lnB w="12700" cap="flat" cmpd="sng" algn="ctr">
+                      <a:solidFill>
+                        <a:srgbClr val="DCE2E8"/>
+                      </a:solidFill>
+                      <a:prstDash val="solid"/>
+                      <a:round/>
+                      <a:headEnd type="none" w="med" len="med"/>
+                      <a:tailEnd type="none" w="med" len="med"/>
+                    </a:lnB>
+                    <a:solidFill>
+                      <a:srgbClr val="FFFFFF"/>
+                    </a:solidFill>
+                  </a:tcPr>
+                </a:tc>
+                <a:tc>
+                  <a:txBody>
+                    <a:bodyPr/>
+                    <a:lstStyle/>
+                    <a:p>
+                      <a:pPr algn="ctr" indent="0" marL="0">
+                        <a:buNone/>
+                      </a:pPr>
+                      <a:r>
+                        <a:rPr lang="en-US" sz="1100" b="1" dirty="0">
+                          <a:solidFill>
+                            <a:srgbClr val="D78A27"/>
+                          </a:solidFill>
+                          <a:latin typeface="Calibri" pitchFamily="34" charset="0"/>
+                          <a:ea typeface="Calibri" pitchFamily="34" charset="-122"/>
+                          <a:cs typeface="Calibri" pitchFamily="34" charset="-120"/>
+                        </a:rPr>
+                        <a:t>[UK_LEADS_2]</a:t>
+                      </a:r>
+                      <a:endParaRPr lang="en-US" sz="1100" dirty="0">
+                        <a:latin typeface="Calibri" charset="0"/>
+                        <a:ea typeface="Calibri" charset="0"/>
+                        <a:cs typeface="Calibri" charset="0"/>
+                      </a:endParaRPr>
+                    </a:p>
+                  </a:txBody>
+                  <a:tcPr marL="50800" marR="50800" marT="50800" marB="50800" anchor="ctr">
+                    <a:lnL w="12700" cap="flat" cmpd="sng" algn="ctr">
+                      <a:solidFill>
+                        <a:srgbClr val="DCE2E8"/>
+                      </a:solidFill>
+                      <a:prstDash val="solid"/>
+                      <a:round/>
+                      <a:headEnd type="none" w="med" len="med"/>
+                      <a:tailEnd type="none" w="med" len="med"/>
+                    </a:lnL>
+                    <a:lnR w="12700" cap="flat" cmpd="sng" algn="ctr">
+                      <a:solidFill>
+                        <a:srgbClr val="DCE2E8"/>
+                      </a:solidFill>
+                      <a:prstDash val="solid"/>
+                      <a:round/>
+                      <a:headEnd type="none" w="med" len="med"/>
+                      <a:tailEnd type="none" w="med" len="med"/>
+                    </a:lnR>
+                    <a:lnT w="12700" cap="flat" cmpd="sng" algn="ctr">
+                      <a:solidFill>
+                        <a:srgbClr val="DCE2E8"/>
+                      </a:solidFill>
+                      <a:prstDash val="solid"/>
+                      <a:round/>
+                      <a:headEnd type="none" w="med" len="med"/>
+                      <a:tailEnd type="none" w="med" len="med"/>
+                    </a:lnT>
+                    <a:lnB w="12700" cap="flat" cmpd="sng" algn="ctr">
+                      <a:solidFill>
+                        <a:srgbClr val="DCE2E8"/>
+                      </a:solidFill>
+                      <a:prstDash val="solid"/>
+                      <a:round/>
+                      <a:headEnd type="none" w="med" len="med"/>
+                      <a:tailEnd type="none" w="med" len="med"/>
+                    </a:lnB>
+                    <a:solidFill>
+                      <a:srgbClr val="FFFFFF"/>
+                    </a:solidFill>
+                  </a:tcPr>
+                </a:tc>
+                <a:tc>
+                  <a:txBody>
+                    <a:bodyPr/>
+                    <a:lstStyle/>
+                    <a:p>
+                      <a:pPr algn="ctr" indent="0" marL="0">
+                        <a:buNone/>
+                      </a:pPr>
+                      <a:r>
+                        <a:rPr lang="en-US" sz="1100" b="1" dirty="0">
+                          <a:solidFill>
+                            <a:srgbClr val="D78A27"/>
+                          </a:solidFill>
+                          <a:latin typeface="Calibri" pitchFamily="34" charset="0"/>
+                          <a:ea typeface="Calibri" pitchFamily="34" charset="-122"/>
+                          <a:cs typeface="Calibri" pitchFamily="34" charset="-120"/>
+                        </a:rPr>
+                        <a:t>[UK_CPL_2]</a:t>
+                      </a:r>
+                      <a:endParaRPr lang="en-US" sz="1100" dirty="0">
+                        <a:latin typeface="Calibri" charset="0"/>
+                        <a:ea typeface="Calibri" charset="0"/>
+                        <a:cs typeface="Calibri" charset="0"/>
+                      </a:endParaRPr>
+                    </a:p>
+                  </a:txBody>
+                  <a:tcPr marL="50800" marR="50800" marT="50800" marB="50800" anchor="ctr">
+                    <a:lnL w="12700" cap="flat" cmpd="sng" algn="ctr">
+                      <a:solidFill>
+                        <a:srgbClr val="DCE2E8"/>
+                      </a:solidFill>
+                      <a:prstDash val="solid"/>
+                      <a:round/>
+                      <a:headEnd type="none" w="med" len="med"/>
+                      <a:tailEnd type="none" w="med" len="med"/>
+                    </a:lnL>
+                    <a:lnR w="12700" cap="flat" cmpd="sng" algn="ctr">
+                      <a:solidFill>
+                        <a:srgbClr val="DCE2E8"/>
+                      </a:solidFill>
+                      <a:prstDash val="solid"/>
+                      <a:round/>
+                      <a:headEnd type="none" w="med" len="med"/>
+                      <a:tailEnd type="none" w="med" len="med"/>
+                    </a:lnR>
+                    <a:lnT w="12700" cap="flat" cmpd="sng" algn="ctr">
+                      <a:solidFill>
+                        <a:srgbClr val="DCE2E8"/>
+                      </a:solidFill>
+                      <a:prstDash val="solid"/>
+                      <a:round/>
+                      <a:headEnd type="none" w="med" len="med"/>
+                      <a:tailEnd type="none" w="med" len="med"/>
+                    </a:lnT>
+                    <a:lnB w="12700" cap="flat" cmpd="sng" algn="ctr">
+                      <a:solidFill>
+                        <a:srgbClr val="DCE2E8"/>
+                      </a:solidFill>
+                      <a:prstDash val="solid"/>
+                      <a:round/>
+                      <a:headEnd type="none" w="med" len="med"/>
+                      <a:tailEnd type="none" w="med" len="med"/>
+                    </a:lnB>
+                    <a:solidFill>
+                      <a:srgbClr val="FFFFFF"/>
+                    </a:solidFill>
+                  </a:tcPr>
+                </a:tc>
+                <a:tc>
+                  <a:txBody>
+                    <a:bodyPr/>
+                    <a:lstStyle/>
+                    <a:p>
+                      <a:pPr algn="l" indent="0" marL="0">
+                        <a:buNone/>
+                      </a:pPr>
+                      <a:r>
+                        <a:rPr lang="en-US" sz="1100" b="1" dirty="0">
+                          <a:solidFill>
+                            <a:srgbClr val="D78A27"/>
+                          </a:solidFill>
+                          <a:latin typeface="Calibri" pitchFamily="34" charset="0"/>
+                          <a:ea typeface="Calibri" pitchFamily="34" charset="-122"/>
+                          <a:cs typeface="Calibri" pitchFamily="34" charset="-120"/>
+                        </a:rPr>
+                        <a:t>[UK_THEME_2]</a:t>
+                      </a:r>
+                      <a:endParaRPr lang="en-US" sz="1100" dirty="0">
+                        <a:latin typeface="Calibri" charset="0"/>
+                        <a:ea typeface="Calibri" charset="0"/>
+                        <a:cs typeface="Calibri" charset="0"/>
+                      </a:endParaRPr>
+                    </a:p>
+                  </a:txBody>
+                  <a:tcPr marL="50800" marR="50800" marT="50800" marB="50800" anchor="ctr">
+                    <a:lnL w="12700" cap="flat" cmpd="sng" algn="ctr">
+                      <a:solidFill>
+                        <a:srgbClr val="DCE2E8"/>
+                      </a:solidFill>
+                      <a:prstDash val="solid"/>
+                      <a:round/>
+                      <a:headEnd type="none" w="med" len="med"/>
+                      <a:tailEnd type="none" w="med" len="med"/>
+                    </a:lnL>
+                    <a:lnR w="12700" cap="flat" cmpd="sng" algn="ctr">
+                      <a:solidFill>
+                        <a:srgbClr val="DCE2E8"/>
+                      </a:solidFill>
+                      <a:prstDash val="solid"/>
+                      <a:round/>
+                      <a:headEnd type="none" w="med" len="med"/>
+                      <a:tailEnd type="none" w="med" len="med"/>
+                    </a:lnR>
+                    <a:lnT w="12700" cap="flat" cmpd="sng" algn="ctr">
+                      <a:solidFill>
+                        <a:srgbClr val="DCE2E8"/>
+                      </a:solidFill>
+                      <a:prstDash val="solid"/>
+                      <a:round/>
+                      <a:headEnd type="none" w="med" len="med"/>
+                      <a:tailEnd type="none" w="med" len="med"/>
+                    </a:lnT>
+                    <a:lnB w="12700" cap="flat" cmpd="sng" algn="ctr">
+                      <a:solidFill>
+                        <a:srgbClr val="DCE2E8"/>
+                      </a:solidFill>
+                      <a:prstDash val="solid"/>
+                      <a:round/>
+                      <a:headEnd type="none" w="med" len="med"/>
+                      <a:tailEnd type="none" w="med" len="med"/>
+                    </a:lnB>
+                    <a:solidFill>
+                      <a:srgbClr val="FFFFFF"/>
+                    </a:solidFill>
+                  </a:tcPr>
+                </a:tc>
+              </a:tr>
+              <a:tr h="329184">
+                <a:tc>
+                  <a:txBody>
+                    <a:bodyPr/>
+                    <a:lstStyle/>
+                    <a:p>
+                      <a:pPr algn="l" indent="0" marL="0">
+                        <a:buNone/>
+                      </a:pPr>
+                      <a:r>
+                        <a:rPr lang="en-US" sz="1100" b="1" dirty="0">
+                          <a:solidFill>
+                            <a:srgbClr val="D78A27"/>
+                          </a:solidFill>
+                          <a:latin typeface="Calibri" pitchFamily="34" charset="0"/>
+                          <a:ea typeface="Calibri" pitchFamily="34" charset="-122"/>
+                          <a:cs typeface="Calibri" pitchFamily="34" charset="-120"/>
+                        </a:rPr>
+                        <a:t>[UK_CAMP_3]</a:t>
+                      </a:r>
+                      <a:endParaRPr lang="en-US" sz="1100" dirty="0">
+                        <a:latin typeface="Calibri" charset="0"/>
+                        <a:ea typeface="Calibri" charset="0"/>
+                        <a:cs typeface="Calibri" charset="0"/>
+                      </a:endParaRPr>
+                    </a:p>
+                  </a:txBody>
+                  <a:tcPr marL="50800" marR="50800" marT="50800" marB="50800" anchor="ctr">
+                    <a:lnL w="12700" cap="flat" cmpd="sng" algn="ctr">
+                      <a:solidFill>
+                        <a:srgbClr val="DCE2E8"/>
+                      </a:solidFill>
+                      <a:prstDash val="solid"/>
+                      <a:round/>
+                      <a:headEnd type="none" w="med" len="med"/>
+                      <a:tailEnd type="none" w="med" len="med"/>
+                    </a:lnL>
+                    <a:lnR w="12700" cap="flat" cmpd="sng" algn="ctr">
+                      <a:solidFill>
+                        <a:srgbClr val="DCE2E8"/>
+                      </a:solidFill>
+                      <a:prstDash val="solid"/>
+                      <a:round/>
+                      <a:headEnd type="none" w="med" len="med"/>
+                      <a:tailEnd type="none" w="med" len="med"/>
+                    </a:lnR>
+                    <a:lnT w="12700" cap="flat" cmpd="sng" algn="ctr">
+                      <a:solidFill>
+                        <a:srgbClr val="DCE2E8"/>
+                      </a:solidFill>
+                      <a:prstDash val="solid"/>
+                      <a:round/>
+                      <a:headEnd type="none" w="med" len="med"/>
+                      <a:tailEnd type="none" w="med" len="med"/>
+                    </a:lnT>
+                    <a:lnB w="12700" cap="flat" cmpd="sng" algn="ctr">
+                      <a:solidFill>
+                        <a:srgbClr val="DCE2E8"/>
+                      </a:solidFill>
+                      <a:prstDash val="solid"/>
+                      <a:round/>
+                      <a:headEnd type="none" w="med" len="med"/>
+                      <a:tailEnd type="none" w="med" len="med"/>
+                    </a:lnB>
+                    <a:solidFill>
+                      <a:srgbClr val="FFFFFF"/>
+                    </a:solidFill>
+                  </a:tcPr>
+                </a:tc>
+                <a:tc>
+                  <a:txBody>
+                    <a:bodyPr/>
+                    <a:lstStyle/>
+                    <a:p>
+                      <a:pPr algn="ctr" indent="0" marL="0">
+                        <a:buNone/>
+                      </a:pPr>
+                      <a:r>
+                        <a:rPr lang="en-US" sz="1100" b="1" dirty="0">
+                          <a:solidFill>
+                            <a:srgbClr val="D78A27"/>
+                          </a:solidFill>
+                          <a:latin typeface="Calibri" pitchFamily="34" charset="0"/>
+                          <a:ea typeface="Calibri" pitchFamily="34" charset="-122"/>
+                          <a:cs typeface="Calibri" pitchFamily="34" charset="-120"/>
+                        </a:rPr>
+                        <a:t>[UK_SPEND_3]</a:t>
+                      </a:r>
+                      <a:endParaRPr lang="en-US" sz="1100" dirty="0">
+                        <a:latin typeface="Calibri" charset="0"/>
+                        <a:ea typeface="Calibri" charset="0"/>
+                        <a:cs typeface="Calibri" charset="0"/>
+                      </a:endParaRPr>
+                    </a:p>
+                  </a:txBody>
+                  <a:tcPr marL="50800" marR="50800" marT="50800" marB="50800" anchor="ctr">
+                    <a:lnL w="12700" cap="flat" cmpd="sng" algn="ctr">
+                      <a:solidFill>
+                        <a:srgbClr val="DCE2E8"/>
+                      </a:solidFill>
+                      <a:prstDash val="solid"/>
+                      <a:round/>
+                      <a:headEnd type="none" w="med" len="med"/>
+                      <a:tailEnd type="none" w="med" len="med"/>
+                    </a:lnL>
+                    <a:lnR w="12700" cap="flat" cmpd="sng" algn="ctr">
+                      <a:solidFill>
+                        <a:srgbClr val="DCE2E8"/>
+                      </a:solidFill>
+                      <a:prstDash val="solid"/>
+                      <a:round/>
+                      <a:headEnd type="none" w="med" len="med"/>
+                      <a:tailEnd type="none" w="med" len="med"/>
+                    </a:lnR>
+                    <a:lnT w="12700" cap="flat" cmpd="sng" algn="ctr">
+                      <a:solidFill>
+                        <a:srgbClr val="DCE2E8"/>
+                      </a:solidFill>
+                      <a:prstDash val="solid"/>
+                      <a:round/>
+                      <a:headEnd type="none" w="med" len="med"/>
+                      <a:tailEnd type="none" w="med" len="med"/>
+                    </a:lnT>
+                    <a:lnB w="12700" cap="flat" cmpd="sng" algn="ctr">
+                      <a:solidFill>
+                        <a:srgbClr val="DCE2E8"/>
+                      </a:solidFill>
+                      <a:prstDash val="solid"/>
+                      <a:round/>
+                      <a:headEnd type="none" w="med" len="med"/>
+                      <a:tailEnd type="none" w="med" len="med"/>
+                    </a:lnB>
+                    <a:solidFill>
+                      <a:srgbClr val="FFFFFF"/>
+                    </a:solidFill>
+                  </a:tcPr>
+                </a:tc>
+                <a:tc>
+                  <a:txBody>
+                    <a:bodyPr/>
+                    <a:lstStyle/>
+                    <a:p>
+                      <a:pPr algn="ctr" indent="0" marL="0">
+                        <a:buNone/>
+                      </a:pPr>
+                      <a:r>
+                        <a:rPr lang="en-US" sz="1100" b="1" dirty="0">
+                          <a:solidFill>
+                            <a:srgbClr val="D78A27"/>
+                          </a:solidFill>
+                          <a:latin typeface="Calibri" pitchFamily="34" charset="0"/>
+                          <a:ea typeface="Calibri" pitchFamily="34" charset="-122"/>
+                          <a:cs typeface="Calibri" pitchFamily="34" charset="-120"/>
+                        </a:rPr>
+                        <a:t>[UK_LEADS_3]</a:t>
+                      </a:r>
+                      <a:endParaRPr lang="en-US" sz="1100" dirty="0">
+                        <a:latin typeface="Calibri" charset="0"/>
+                        <a:ea typeface="Calibri" charset="0"/>
+                        <a:cs typeface="Calibri" charset="0"/>
+                      </a:endParaRPr>
+                    </a:p>
+                  </a:txBody>
+                  <a:tcPr marL="50800" marR="50800" marT="50800" marB="50800" anchor="ctr">
+                    <a:lnL w="12700" cap="flat" cmpd="sng" algn="ctr">
+                      <a:solidFill>
+                        <a:srgbClr val="DCE2E8"/>
+                      </a:solidFill>
+                      <a:prstDash val="solid"/>
+                      <a:round/>
+                      <a:headEnd type="none" w="med" len="med"/>
+                      <a:tailEnd type="none" w="med" len="med"/>
+                    </a:lnL>
+                    <a:lnR w="12700" cap="flat" cmpd="sng" algn="ctr">
+                      <a:solidFill>
+                        <a:srgbClr val="DCE2E8"/>
+                      </a:solidFill>
+                      <a:prstDash val="solid"/>
+                      <a:round/>
+                      <a:headEnd type="none" w="med" len="med"/>
+                      <a:tailEnd type="none" w="med" len="med"/>
+                    </a:lnR>
+                    <a:lnT w="12700" cap="flat" cmpd="sng" algn="ctr">
+                      <a:solidFill>
+                        <a:srgbClr val="DCE2E8"/>
+                      </a:solidFill>
+                      <a:prstDash val="solid"/>
+                      <a:round/>
+                      <a:headEnd type="none" w="med" len="med"/>
+                      <a:tailEnd type="none" w="med" len="med"/>
+                    </a:lnT>
+                    <a:lnB w="12700" cap="flat" cmpd="sng" algn="ctr">
+                      <a:solidFill>
+                        <a:srgbClr val="DCE2E8"/>
+                      </a:solidFill>
+                      <a:prstDash val="solid"/>
+                      <a:round/>
+                      <a:headEnd type="none" w="med" len="med"/>
+                      <a:tailEnd type="none" w="med" len="med"/>
+                    </a:lnB>
+                    <a:solidFill>
+                      <a:srgbClr val="FFFFFF"/>
+                    </a:solidFill>
+                  </a:tcPr>
+                </a:tc>
+                <a:tc>
+                  <a:txBody>
+                    <a:bodyPr/>
+                    <a:lstStyle/>
+                    <a:p>
+                      <a:pPr algn="ctr" indent="0" marL="0">
+                        <a:buNone/>
+                      </a:pPr>
+                      <a:r>
+                        <a:rPr lang="en-US" sz="1100" b="1" dirty="0">
+                          <a:solidFill>
+                            <a:srgbClr val="D78A27"/>
+                          </a:solidFill>
+                          <a:latin typeface="Calibri" pitchFamily="34" charset="0"/>
+                          <a:ea typeface="Calibri" pitchFamily="34" charset="-122"/>
+                          <a:cs typeface="Calibri" pitchFamily="34" charset="-120"/>
+                        </a:rPr>
+                        <a:t>[UK_CPL_3]</a:t>
+                      </a:r>
+                      <a:endParaRPr lang="en-US" sz="1100" dirty="0">
+                        <a:latin typeface="Calibri" charset="0"/>
+                        <a:ea typeface="Calibri" charset="0"/>
+                        <a:cs typeface="Calibri" charset="0"/>
+                      </a:endParaRPr>
+                    </a:p>
+                  </a:txBody>
+                  <a:tcPr marL="50800" marR="50800" marT="50800" marB="50800" anchor="ctr">
+                    <a:lnL w="12700" cap="flat" cmpd="sng" algn="ctr">
+                      <a:solidFill>
+                        <a:srgbClr val="DCE2E8"/>
+                      </a:solidFill>
+                      <a:prstDash val="solid"/>
+                      <a:round/>
+                      <a:headEnd type="none" w="med" len="med"/>
+                      <a:tailEnd type="none" w="med" len="med"/>
+                    </a:lnL>
+                    <a:lnR w="12700" cap="flat" cmpd="sng" algn="ctr">
+                      <a:solidFill>
+                        <a:srgbClr val="DCE2E8"/>
+                      </a:solidFill>
+                      <a:prstDash val="solid"/>
+                      <a:round/>
+                      <a:headEnd type="none" w="med" len="med"/>
+                      <a:tailEnd type="none" w="med" len="med"/>
+                    </a:lnR>
+                    <a:lnT w="12700" cap="flat" cmpd="sng" algn="ctr">
+                      <a:solidFill>
+                        <a:srgbClr val="DCE2E8"/>
+                      </a:solidFill>
+                      <a:prstDash val="solid"/>
+                      <a:round/>
+                      <a:headEnd type="none" w="med" len="med"/>
+                      <a:tailEnd type="none" w="med" len="med"/>
+                    </a:lnT>
+                    <a:lnB w="12700" cap="flat" cmpd="sng" algn="ctr">
+                      <a:solidFill>
+                        <a:srgbClr val="DCE2E8"/>
+                      </a:solidFill>
+                      <a:prstDash val="solid"/>
+                      <a:round/>
+                      <a:headEnd type="none" w="med" len="med"/>
+                      <a:tailEnd type="none" w="med" len="med"/>
+                    </a:lnB>
+                    <a:solidFill>
+                      <a:srgbClr val="FFFFFF"/>
+                    </a:solidFill>
+                  </a:tcPr>
+                </a:tc>
+                <a:tc>
+                  <a:txBody>
+                    <a:bodyPr/>
+                    <a:lstStyle/>
+                    <a:p>
+                      <a:pPr algn="l" indent="0" marL="0">
+                        <a:buNone/>
+                      </a:pPr>
+                      <a:r>
+                        <a:rPr lang="en-US" sz="1100" b="1" dirty="0">
+                          <a:solidFill>
+                            <a:srgbClr val="D78A27"/>
+                          </a:solidFill>
+                          <a:latin typeface="Calibri" pitchFamily="34" charset="0"/>
+                          <a:ea typeface="Calibri" pitchFamily="34" charset="-122"/>
+                          <a:cs typeface="Calibri" pitchFamily="34" charset="-120"/>
+                        </a:rPr>
+                        <a:t>[UK_THEME_3]</a:t>
+                      </a:r>
+                      <a:endParaRPr lang="en-US" sz="1100" dirty="0">
+                        <a:latin typeface="Calibri" charset="0"/>
+                        <a:ea typeface="Calibri" charset="0"/>
+                        <a:cs typeface="Calibri" charset="0"/>
+                      </a:endParaRPr>
+                    </a:p>
+                  </a:txBody>
+                  <a:tcPr marL="50800" marR="50800" marT="50800" marB="50800" anchor="ctr">
+                    <a:lnL w="12700" cap="flat" cmpd="sng" algn="ctr">
+                      <a:solidFill>
+                        <a:srgbClr val="DCE2E8"/>
+                      </a:solidFill>
+                      <a:prstDash val="solid"/>
+                      <a:round/>
+                      <a:headEnd type="none" w="med" len="med"/>
+                      <a:tailEnd type="none" w="med" len="med"/>
+                    </a:lnL>
+                    <a:lnR w="12700" cap="flat" cmpd="sng" algn="ctr">
+                      <a:solidFill>
+                        <a:srgbClr val="DCE2E8"/>
+                      </a:solidFill>
+                      <a:prstDash val="solid"/>
+                      <a:round/>
+                      <a:headEnd type="none" w="med" len="med"/>
+                      <a:tailEnd type="none" w="med" len="med"/>
+                    </a:lnR>
+                    <a:lnT w="12700" cap="flat" cmpd="sng" algn="ctr">
+                      <a:solidFill>
+                        <a:srgbClr val="DCE2E8"/>
+                      </a:solidFill>
+                      <a:prstDash val="solid"/>
+                      <a:round/>
+                      <a:headEnd type="none" w="med" len="med"/>
+                      <a:tailEnd type="none" w="med" len="med"/>
+                    </a:lnT>
+                    <a:lnB w="12700" cap="flat" cmpd="sng" algn="ctr">
+                      <a:solidFill>
+                        <a:srgbClr val="DCE2E8"/>
+                      </a:solidFill>
+                      <a:prstDash val="solid"/>
+                      <a:round/>
+                      <a:headEnd type="none" w="med" len="med"/>
+                      <a:tailEnd type="none" w="med" len="med"/>
+                    </a:lnB>
+                    <a:solidFill>
+                      <a:srgbClr val="FFFFFF"/>
+                    </a:solidFill>
+                  </a:tcPr>
+                </a:tc>
+              </a:tr>
+              <a:tr h="310896">
+                <a:tc gridSpan="5">
+                  <a:txBody>
+                    <a:bodyPr/>
+                    <a:lstStyle/>
+                    <a:p>
+                      <a:pPr algn="l" indent="0" marL="0">
+                        <a:buNone/>
+                      </a:pPr>
+                      <a:r>
+                        <a:rPr lang="en-US" sz="1200" b="1" dirty="0">
+                          <a:solidFill>
+                            <a:srgbClr val="1F9E7F"/>
+                          </a:solidFill>
+                          <a:latin typeface="Calibri" pitchFamily="34" charset="0"/>
+                          <a:ea typeface="Calibri" pitchFamily="34" charset="-122"/>
+                          <a:cs typeface="Calibri" pitchFamily="34" charset="-120"/>
+                        </a:rPr>
+                        <a:t>France</a:t>
+                      </a:r>
+                      <a:endParaRPr lang="en-US" sz="1200" dirty="0">
+                        <a:latin typeface="Calibri" charset="0"/>
+                        <a:ea typeface="Calibri" charset="0"/>
+                        <a:cs typeface="Calibri" charset="0"/>
+                      </a:endParaRPr>
+                    </a:p>
+                  </a:txBody>
+                  <a:tcPr marL="50800" marR="50800" marT="50800" marB="50800" anchor="ctr">
+                    <a:lnL w="12700" cap="flat" cmpd="sng" algn="ctr">
+                      <a:solidFill>
+                        <a:srgbClr val="DCE2E8"/>
+                      </a:solidFill>
+                      <a:prstDash val="solid"/>
+                      <a:round/>
+                      <a:headEnd type="none" w="med" len="med"/>
+                      <a:tailEnd type="none" w="med" len="med"/>
+                    </a:lnL>
+                    <a:lnR w="12700" cap="flat" cmpd="sng" algn="ctr">
+                      <a:solidFill>
+                        <a:srgbClr val="DCE2E8"/>
+                      </a:solidFill>
+                      <a:prstDash val="solid"/>
+                      <a:round/>
+                      <a:headEnd type="none" w="med" len="med"/>
+                      <a:tailEnd type="none" w="med" len="med"/>
+                    </a:lnR>
+                    <a:lnT w="12700" cap="flat" cmpd="sng" algn="ctr">
+                      <a:solidFill>
+                        <a:srgbClr val="DCE2E8"/>
+                      </a:solidFill>
+                      <a:prstDash val="solid"/>
+                      <a:round/>
+                      <a:headEnd type="none" w="med" len="med"/>
+                      <a:tailEnd type="none" w="med" len="med"/>
+                    </a:lnT>
+                    <a:lnB w="12700" cap="flat" cmpd="sng" algn="ctr">
+                      <a:solidFill>
+                        <a:srgbClr val="DCE2E8"/>
+                      </a:solidFill>
+                      <a:prstDash val="solid"/>
+                      <a:round/>
+                      <a:headEnd type="none" w="med" len="med"/>
+                      <a:tailEnd type="none" w="med" len="med"/>
+                    </a:lnB>
+                    <a:solidFill>
+                      <a:srgbClr val="EAF6F2"/>
+                    </a:solidFill>
+                  </a:tcPr>
+                </a:tc>
+                <a:tc hMerge="1">
+                  <a:tcPr/>
+                </a:tc>
+                <a:tc hMerge="1">
+                  <a:tcPr/>
+                </a:tc>
+                <a:tc hMerge="1">
+                  <a:tcPr/>
+                </a:tc>
+                <a:tc hMerge="1">
+                  <a:tcPr/>
+                </a:tc>
+              </a:tr>
+              <a:tr h="329184">
+                <a:tc>
+                  <a:txBody>
+                    <a:bodyPr/>
+                    <a:lstStyle/>
+                    <a:p>
+                      <a:pPr algn="l" indent="0" marL="0">
+                        <a:buNone/>
+                      </a:pPr>
+                      <a:r>
+                        <a:rPr lang="en-US" sz="1100" b="1" dirty="0">
+                          <a:solidFill>
+                            <a:srgbClr val="D78A27"/>
+                          </a:solidFill>
+                          <a:latin typeface="Calibri" pitchFamily="34" charset="0"/>
+                          <a:ea typeface="Calibri" pitchFamily="34" charset="-122"/>
+                          <a:cs typeface="Calibri" pitchFamily="34" charset="-120"/>
+                        </a:rPr>
+                        <a:t>[FR_CAMP_1]</a:t>
+                      </a:r>
+                      <a:endParaRPr lang="en-US" sz="1100" dirty="0">
+                        <a:latin typeface="Calibri" charset="0"/>
+                        <a:ea typeface="Calibri" charset="0"/>
+                        <a:cs typeface="Calibri" charset="0"/>
+                      </a:endParaRPr>
+                    </a:p>
+                  </a:txBody>
+                  <a:tcPr marL="50800" marR="50800" marT="50800" marB="50800" anchor="ctr">
+                    <a:lnL w="12700" cap="flat" cmpd="sng" algn="ctr">
+                      <a:solidFill>
+                        <a:srgbClr val="DCE2E8"/>
+                      </a:solidFill>
+                      <a:prstDash val="solid"/>
+                      <a:round/>
+                      <a:headEnd type="none" w="med" len="med"/>
+                      <a:tailEnd type="none" w="med" len="med"/>
+                    </a:lnL>
+                    <a:lnR w="12700" cap="flat" cmpd="sng" algn="ctr">
+                      <a:solidFill>
+                        <a:srgbClr val="DCE2E8"/>
+                      </a:solidFill>
+                      <a:prstDash val="solid"/>
+                      <a:round/>
+                      <a:headEnd type="none" w="med" len="med"/>
+                      <a:tailEnd type="none" w="med" len="med"/>
+                    </a:lnR>
+                    <a:lnT w="12700" cap="flat" cmpd="sng" algn="ctr">
+                      <a:solidFill>
+                        <a:srgbClr val="DCE2E8"/>
+                      </a:solidFill>
+                      <a:prstDash val="solid"/>
+                      <a:round/>
+                      <a:headEnd type="none" w="med" len="med"/>
+                      <a:tailEnd type="none" w="med" len="med"/>
+                    </a:lnT>
+                    <a:lnB w="12700" cap="flat" cmpd="sng" algn="ctr">
+                      <a:solidFill>
+                        <a:srgbClr val="DCE2E8"/>
+                      </a:solidFill>
+                      <a:prstDash val="solid"/>
+                      <a:round/>
+                      <a:headEnd type="none" w="med" len="med"/>
+                      <a:tailEnd type="none" w="med" len="med"/>
+                    </a:lnB>
+                    <a:solidFill>
+                      <a:srgbClr val="FFFFFF"/>
+                    </a:solidFill>
+                  </a:tcPr>
+                </a:tc>
+                <a:tc>
+                  <a:txBody>
+                    <a:bodyPr/>
+                    <a:lstStyle/>
+                    <a:p>
+                      <a:pPr algn="ctr" indent="0" marL="0">
+                        <a:buNone/>
+                      </a:pPr>
+                      <a:r>
+                        <a:rPr lang="en-US" sz="1100" b="1" dirty="0">
+                          <a:solidFill>
+                            <a:srgbClr val="D78A27"/>
+                          </a:solidFill>
+                          <a:latin typeface="Calibri" pitchFamily="34" charset="0"/>
+                          <a:ea typeface="Calibri" pitchFamily="34" charset="-122"/>
+                          <a:cs typeface="Calibri" pitchFamily="34" charset="-120"/>
+                        </a:rPr>
+                        <a:t>[FR_SPEND_1]</a:t>
+                      </a:r>
+                      <a:endParaRPr lang="en-US" sz="1100" dirty="0">
+                        <a:latin typeface="Calibri" charset="0"/>
+                        <a:ea typeface="Calibri" charset="0"/>
+                        <a:cs typeface="Calibri" charset="0"/>
+                      </a:endParaRPr>
+                    </a:p>
+                  </a:txBody>
+                  <a:tcPr marL="50800" marR="50800" marT="50800" marB="50800" anchor="ctr">
+                    <a:lnL w="12700" cap="flat" cmpd="sng" algn="ctr">
+                      <a:solidFill>
+                        <a:srgbClr val="DCE2E8"/>
+                      </a:solidFill>
+                      <a:prstDash val="solid"/>
+                      <a:round/>
+                      <a:headEnd type="none" w="med" len="med"/>
+                      <a:tailEnd type="none" w="med" len="med"/>
+                    </a:lnL>
+                    <a:lnR w="12700" cap="flat" cmpd="sng" algn="ctr">
+                      <a:solidFill>
+                        <a:srgbClr val="DCE2E8"/>
+                      </a:solidFill>
+                      <a:prstDash val="solid"/>
+                      <a:round/>
+                      <a:headEnd type="none" w="med" len="med"/>
+                      <a:tailEnd type="none" w="med" len="med"/>
+                    </a:lnR>
+                    <a:lnT w="12700" cap="flat" cmpd="sng" algn="ctr">
+                      <a:solidFill>
+                        <a:srgbClr val="DCE2E8"/>
+                      </a:solidFill>
+                      <a:prstDash val="solid"/>
+                      <a:round/>
+                      <a:headEnd type="none" w="med" len="med"/>
+                      <a:tailEnd type="none" w="med" len="med"/>
+                    </a:lnT>
+                    <a:lnB w="12700" cap="flat" cmpd="sng" algn="ctr">
+                      <a:solidFill>
+                        <a:srgbClr val="DCE2E8"/>
+                      </a:solidFill>
+                      <a:prstDash val="solid"/>
+                      <a:round/>
+                      <a:headEnd type="none" w="med" len="med"/>
+                      <a:tailEnd type="none" w="med" len="med"/>
+                    </a:lnB>
+                    <a:solidFill>
+                      <a:srgbClr val="FFFFFF"/>
+                    </a:solidFill>
+                  </a:tcPr>
+                </a:tc>
+                <a:tc>
+                  <a:txBody>
+                    <a:bodyPr/>
+                    <a:lstStyle/>
+                    <a:p>
+                      <a:pPr algn="ctr" indent="0" marL="0">
+                        <a:buNone/>
+                      </a:pPr>
+                      <a:r>
+                        <a:rPr lang="en-US" sz="1100" b="1" dirty="0">
+                          <a:solidFill>
+                            <a:srgbClr val="D78A27"/>
+                          </a:solidFill>
+                          <a:latin typeface="Calibri" pitchFamily="34" charset="0"/>
+                          <a:ea typeface="Calibri" pitchFamily="34" charset="-122"/>
+                          <a:cs typeface="Calibri" pitchFamily="34" charset="-120"/>
+                        </a:rPr>
+                        <a:t>[FR_LEADS_1]</a:t>
+                      </a:r>
+                      <a:endParaRPr lang="en-US" sz="1100" dirty="0">
+                        <a:latin typeface="Calibri" charset="0"/>
+                        <a:ea typeface="Calibri" charset="0"/>
+                        <a:cs typeface="Calibri" charset="0"/>
+                      </a:endParaRPr>
+                    </a:p>
+                  </a:txBody>
+                  <a:tcPr marL="50800" marR="50800" marT="50800" marB="50800" anchor="ctr">
+                    <a:lnL w="12700" cap="flat" cmpd="sng" algn="ctr">
+                      <a:solidFill>
+                        <a:srgbClr val="DCE2E8"/>
+                      </a:solidFill>
+                      <a:prstDash val="solid"/>
+                      <a:round/>
+                      <a:headEnd type="none" w="med" len="med"/>
+                      <a:tailEnd type="none" w="med" len="med"/>
+                    </a:lnL>
+                    <a:lnR w="12700" cap="flat" cmpd="sng" algn="ctr">
+                      <a:solidFill>
+                        <a:srgbClr val="DCE2E8"/>
+                      </a:solidFill>
+                      <a:prstDash val="solid"/>
+                      <a:round/>
+                      <a:headEnd type="none" w="med" len="med"/>
+                      <a:tailEnd type="none" w="med" len="med"/>
+                    </a:lnR>
+                    <a:lnT w="12700" cap="flat" cmpd="sng" algn="ctr">
+                      <a:solidFill>
+                        <a:srgbClr val="DCE2E8"/>
+                      </a:solidFill>
+                      <a:prstDash val="solid"/>
+                      <a:round/>
+                      <a:headEnd type="none" w="med" len="med"/>
+                      <a:tailEnd type="none" w="med" len="med"/>
+                    </a:lnT>
+                    <a:lnB w="12700" cap="flat" cmpd="sng" algn="ctr">
+                      <a:solidFill>
+                        <a:srgbClr val="DCE2E8"/>
+                      </a:solidFill>
+                      <a:prstDash val="solid"/>
+                      <a:round/>
+                      <a:headEnd type="none" w="med" len="med"/>
+                      <a:tailEnd type="none" w="med" len="med"/>
+                    </a:lnB>
+                    <a:solidFill>
+                      <a:srgbClr val="FFFFFF"/>
+                    </a:solidFill>
+                  </a:tcPr>
+                </a:tc>
+                <a:tc>
+                  <a:txBody>
+                    <a:bodyPr/>
+                    <a:lstStyle/>
+                    <a:p>
+                      <a:pPr algn="ctr" indent="0" marL="0">
+                        <a:buNone/>
+                      </a:pPr>
+                      <a:r>
+                        <a:rPr lang="en-US" sz="1100" b="1" dirty="0">
+                          <a:solidFill>
+                            <a:srgbClr val="D78A27"/>
+                          </a:solidFill>
+                          <a:latin typeface="Calibri" pitchFamily="34" charset="0"/>
+                          <a:ea typeface="Calibri" pitchFamily="34" charset="-122"/>
+                          <a:cs typeface="Calibri" pitchFamily="34" charset="-120"/>
+                        </a:rPr>
+                        <a:t>[FR_CPL_1]</a:t>
+                      </a:r>
+                      <a:endParaRPr lang="en-US" sz="1100" dirty="0">
+                        <a:latin typeface="Calibri" charset="0"/>
+                        <a:ea typeface="Calibri" charset="0"/>
+                        <a:cs typeface="Calibri" charset="0"/>
+                      </a:endParaRPr>
+                    </a:p>
+                  </a:txBody>
+                  <a:tcPr marL="50800" marR="50800" marT="50800" marB="50800" anchor="ctr">
+                    <a:lnL w="12700" cap="flat" cmpd="sng" algn="ctr">
+                      <a:solidFill>
+                        <a:srgbClr val="DCE2E8"/>
+                      </a:solidFill>
+                      <a:prstDash val="solid"/>
+                      <a:round/>
+                      <a:headEnd type="none" w="med" len="med"/>
+                      <a:tailEnd type="none" w="med" len="med"/>
+                    </a:lnL>
+                    <a:lnR w="12700" cap="flat" cmpd="sng" algn="ctr">
+                      <a:solidFill>
+                        <a:srgbClr val="DCE2E8"/>
+                      </a:solidFill>
+                      <a:prstDash val="solid"/>
+                      <a:round/>
+                      <a:headEnd type="none" w="med" len="med"/>
+                      <a:tailEnd type="none" w="med" len="med"/>
+                    </a:lnR>
+                    <a:lnT w="12700" cap="flat" cmpd="sng" algn="ctr">
+                      <a:solidFill>
+                        <a:srgbClr val="DCE2E8"/>
+                      </a:solidFill>
+                      <a:prstDash val="solid"/>
+                      <a:round/>
+                      <a:headEnd type="none" w="med" len="med"/>
+                      <a:tailEnd type="none" w="med" len="med"/>
+                    </a:lnT>
+                    <a:lnB w="12700" cap="flat" cmpd="sng" algn="ctr">
+                      <a:solidFill>
+                        <a:srgbClr val="DCE2E8"/>
+                      </a:solidFill>
+                      <a:prstDash val="solid"/>
+                      <a:round/>
+                      <a:headEnd type="none" w="med" len="med"/>
+                      <a:tailEnd type="none" w="med" len="med"/>
+                    </a:lnB>
+                    <a:solidFill>
+                      <a:srgbClr val="FFFFFF"/>
+                    </a:solidFill>
+                  </a:tcPr>
+                </a:tc>
+                <a:tc>
+                  <a:txBody>
+                    <a:bodyPr/>
+                    <a:lstStyle/>
+                    <a:p>
+                      <a:pPr algn="l" indent="0" marL="0">
+                        <a:buNone/>
+                      </a:pPr>
+                      <a:r>
+                        <a:rPr lang="en-US" sz="1100" b="1" dirty="0">
+                          <a:solidFill>
+                            <a:srgbClr val="D78A27"/>
+                          </a:solidFill>
+                          <a:latin typeface="Calibri" pitchFamily="34" charset="0"/>
+                          <a:ea typeface="Calibri" pitchFamily="34" charset="-122"/>
+                          <a:cs typeface="Calibri" pitchFamily="34" charset="-120"/>
+                        </a:rPr>
+                        <a:t>[FR_THEME_1]</a:t>
+                      </a:r>
+                      <a:endParaRPr lang="en-US" sz="1100" dirty="0">
+                        <a:latin typeface="Calibri" charset="0"/>
+                        <a:ea typeface="Calibri" charset="0"/>
+                        <a:cs typeface="Calibri" charset="0"/>
+                      </a:endParaRPr>
+                    </a:p>
+                  </a:txBody>
+                  <a:tcPr marL="50800" marR="50800" marT="50800" marB="50800" anchor="ctr">
+                    <a:lnL w="12700" cap="flat" cmpd="sng" algn="ctr">
+                      <a:solidFill>
+                        <a:srgbClr val="DCE2E8"/>
+                      </a:solidFill>
+                      <a:prstDash val="solid"/>
+                      <a:round/>
+                      <a:headEnd type="none" w="med" len="med"/>
+                      <a:tailEnd type="none" w="med" len="med"/>
+                    </a:lnL>
+                    <a:lnR w="12700" cap="flat" cmpd="sng" algn="ctr">
+                      <a:solidFill>
+                        <a:srgbClr val="DCE2E8"/>
+                      </a:solidFill>
+                      <a:prstDash val="solid"/>
+                      <a:round/>
+                      <a:headEnd type="none" w="med" len="med"/>
+                      <a:tailEnd type="none" w="med" len="med"/>
+                    </a:lnR>
+                    <a:lnT w="12700" cap="flat" cmpd="sng" algn="ctr">
+                      <a:solidFill>
+                        <a:srgbClr val="DCE2E8"/>
+                      </a:solidFill>
+                      <a:prstDash val="solid"/>
+                      <a:round/>
+                      <a:headEnd type="none" w="med" len="med"/>
+                      <a:tailEnd type="none" w="med" len="med"/>
+                    </a:lnT>
+                    <a:lnB w="12700" cap="flat" cmpd="sng" algn="ctr">
+                      <a:solidFill>
+                        <a:srgbClr val="DCE2E8"/>
+                      </a:solidFill>
+                      <a:prstDash val="solid"/>
+                      <a:round/>
+                      <a:headEnd type="none" w="med" len="med"/>
+                      <a:tailEnd type="none" w="med" len="med"/>
+                    </a:lnB>
+                    <a:solidFill>
+                      <a:srgbClr val="FFFFFF"/>
+                    </a:solidFill>
+                  </a:tcPr>
+                </a:tc>
+              </a:tr>
+              <a:tr h="329184">
+                <a:tc>
+                  <a:txBody>
+                    <a:bodyPr/>
+                    <a:lstStyle/>
+                    <a:p>
+                      <a:pPr algn="l" indent="0" marL="0">
+                        <a:buNone/>
+                      </a:pPr>
+                      <a:r>
+                        <a:rPr lang="en-US" sz="1100" b="1" dirty="0">
+                          <a:solidFill>
+                            <a:srgbClr val="D78A27"/>
+                          </a:solidFill>
+                          <a:latin typeface="Calibri" pitchFamily="34" charset="0"/>
+                          <a:ea typeface="Calibri" pitchFamily="34" charset="-122"/>
+                          <a:cs typeface="Calibri" pitchFamily="34" charset="-120"/>
+                        </a:rPr>
+                        <a:t>[FR_CAMP_2]</a:t>
+                      </a:r>
+                      <a:endParaRPr lang="en-US" sz="1100" dirty="0">
+                        <a:latin typeface="Calibri" charset="0"/>
+                        <a:ea typeface="Calibri" charset="0"/>
+                        <a:cs typeface="Calibri" charset="0"/>
+                      </a:endParaRPr>
+                    </a:p>
+                  </a:txBody>
+                  <a:tcPr marL="50800" marR="50800" marT="50800" marB="50800" anchor="ctr">
+                    <a:lnL w="12700" cap="flat" cmpd="sng" algn="ctr">
+                      <a:solidFill>
+                        <a:srgbClr val="DCE2E8"/>
+                      </a:solidFill>
+                      <a:prstDash val="solid"/>
+                      <a:round/>
+                      <a:headEnd type="none" w="med" len="med"/>
+                      <a:tailEnd type="none" w="med" len="med"/>
+                    </a:lnL>
+                    <a:lnR w="12700" cap="flat" cmpd="sng" algn="ctr">
+                      <a:solidFill>
+                        <a:srgbClr val="DCE2E8"/>
+                      </a:solidFill>
+                      <a:prstDash val="solid"/>
+                      <a:round/>
+                      <a:headEnd type="none" w="med" len="med"/>
+                      <a:tailEnd type="none" w="med" len="med"/>
+                    </a:lnR>
+                    <a:lnT w="12700" cap="flat" cmpd="sng" algn="ctr">
+                      <a:solidFill>
+                        <a:srgbClr val="DCE2E8"/>
+                      </a:solidFill>
+                      <a:prstDash val="solid"/>
+                      <a:round/>
+                      <a:headEnd type="none" w="med" len="med"/>
+                      <a:tailEnd type="none" w="med" len="med"/>
+                    </a:lnT>
+                    <a:lnB w="12700" cap="flat" cmpd="sng" algn="ctr">
+                      <a:solidFill>
+                        <a:srgbClr val="DCE2E8"/>
+                      </a:solidFill>
+                      <a:prstDash val="solid"/>
+                      <a:round/>
+                      <a:headEnd type="none" w="med" len="med"/>
+                      <a:tailEnd type="none" w="med" len="med"/>
+                    </a:lnB>
+                    <a:solidFill>
+                      <a:srgbClr val="FFFFFF"/>
+                    </a:solidFill>
+                  </a:tcPr>
+                </a:tc>
+                <a:tc>
+                  <a:txBody>
+                    <a:bodyPr/>
+                    <a:lstStyle/>
+                    <a:p>
+                      <a:pPr algn="ctr" indent="0" marL="0">
+                        <a:buNone/>
+                      </a:pPr>
+                      <a:r>
+                        <a:rPr lang="en-US" sz="1100" b="1" dirty="0">
+                          <a:solidFill>
+                            <a:srgbClr val="D78A27"/>
+                          </a:solidFill>
+                          <a:latin typeface="Calibri" pitchFamily="34" charset="0"/>
+                          <a:ea typeface="Calibri" pitchFamily="34" charset="-122"/>
+                          <a:cs typeface="Calibri" pitchFamily="34" charset="-120"/>
+                        </a:rPr>
+                        <a:t>[FR_SPEND_2]</a:t>
+                      </a:r>
+                      <a:endParaRPr lang="en-US" sz="1100" dirty="0">
+                        <a:latin typeface="Calibri" charset="0"/>
+                        <a:ea typeface="Calibri" charset="0"/>
+                        <a:cs typeface="Calibri" charset="0"/>
+                      </a:endParaRPr>
+                    </a:p>
+                  </a:txBody>
+                  <a:tcPr marL="50800" marR="50800" marT="50800" marB="50800" anchor="ctr">
+                    <a:lnL w="12700" cap="flat" cmpd="sng" algn="ctr">
+                      <a:solidFill>
+                        <a:srgbClr val="DCE2E8"/>
+                      </a:solidFill>
+                      <a:prstDash val="solid"/>
+                      <a:round/>
+                      <a:headEnd type="none" w="med" len="med"/>
+                      <a:tailEnd type="none" w="med" len="med"/>
+                    </a:lnL>
+                    <a:lnR w="12700" cap="flat" cmpd="sng" algn="ctr">
+                      <a:solidFill>
+                        <a:srgbClr val="DCE2E8"/>
+                      </a:solidFill>
+                      <a:prstDash val="solid"/>
+                      <a:round/>
+                      <a:headEnd type="none" w="med" len="med"/>
+                      <a:tailEnd type="none" w="med" len="med"/>
+                    </a:lnR>
+                    <a:lnT w="12700" cap="flat" cmpd="sng" algn="ctr">
+                      <a:solidFill>
+                        <a:srgbClr val="DCE2E8"/>
+                      </a:solidFill>
+                      <a:prstDash val="solid"/>
+                      <a:round/>
+                      <a:headEnd type="none" w="med" len="med"/>
+                      <a:tailEnd type="none" w="med" len="med"/>
+                    </a:lnT>
+                    <a:lnB w="12700" cap="flat" cmpd="sng" algn="ctr">
+                      <a:solidFill>
+                        <a:srgbClr val="DCE2E8"/>
+                      </a:solidFill>
+                      <a:prstDash val="solid"/>
+                      <a:round/>
+                      <a:headEnd type="none" w="med" len="med"/>
+                      <a:tailEnd type="none" w="med" len="med"/>
+                    </a:lnB>
+                    <a:solidFill>
+                      <a:srgbClr val="FFFFFF"/>
+                    </a:solidFill>
+                  </a:tcPr>
+                </a:tc>
+                <a:tc>
+                  <a:txBody>
+                    <a:bodyPr/>
+                    <a:lstStyle/>
+                    <a:p>
+                      <a:pPr algn="ctr" indent="0" marL="0">
+                        <a:buNone/>
+                      </a:pPr>
+                      <a:r>
+                        <a:rPr lang="en-US" sz="1100" b="1" dirty="0">
+                          <a:solidFill>
+                            <a:srgbClr val="D78A27"/>
+                          </a:solidFill>
+                          <a:latin typeface="Calibri" pitchFamily="34" charset="0"/>
+                          <a:ea typeface="Calibri" pitchFamily="34" charset="-122"/>
+                          <a:cs typeface="Calibri" pitchFamily="34" charset="-120"/>
+                        </a:rPr>
+                        <a:t>[FR_LEADS_2]</a:t>
+                      </a:r>
+                      <a:endParaRPr lang="en-US" sz="1100" dirty="0">
+                        <a:latin typeface="Calibri" charset="0"/>
+                        <a:ea typeface="Calibri" charset="0"/>
+                        <a:cs typeface="Calibri" charset="0"/>
+                      </a:endParaRPr>
+                    </a:p>
+                  </a:txBody>
+                  <a:tcPr marL="50800" marR="50800" marT="50800" marB="50800" anchor="ctr">
+                    <a:lnL w="12700" cap="flat" cmpd="sng" algn="ctr">
+                      <a:solidFill>
+                        <a:srgbClr val="DCE2E8"/>
+                      </a:solidFill>
+                      <a:prstDash val="solid"/>
+                      <a:round/>
+                      <a:headEnd type="none" w="med" len="med"/>
+                      <a:tailEnd type="none" w="med" len="med"/>
+                    </a:lnL>
+                    <a:lnR w="12700" cap="flat" cmpd="sng" algn="ctr">
+                      <a:solidFill>
+                        <a:srgbClr val="DCE2E8"/>
+                      </a:solidFill>
+                      <a:prstDash val="solid"/>
+                      <a:round/>
+                      <a:headEnd type="none" w="med" len="med"/>
+                      <a:tailEnd type="none" w="med" len="med"/>
+                    </a:lnR>
+                    <a:lnT w="12700" cap="flat" cmpd="sng" algn="ctr">
+                      <a:solidFill>
+                        <a:srgbClr val="DCE2E8"/>
+                      </a:solidFill>
+                      <a:prstDash val="solid"/>
+                      <a:round/>
+                      <a:headEnd type="none" w="med" len="med"/>
+                      <a:tailEnd type="none" w="med" len="med"/>
+                    </a:lnT>
+                    <a:lnB w="12700" cap="flat" cmpd="sng" algn="ctr">
+                      <a:solidFill>
+                        <a:srgbClr val="DCE2E8"/>
+                      </a:solidFill>
+                      <a:prstDash val="solid"/>
+                      <a:round/>
+                      <a:headEnd type="none" w="med" len="med"/>
+                      <a:tailEnd type="none" w="med" len="med"/>
+                    </a:lnB>
+                    <a:solidFill>
+                      <a:srgbClr val="FFFFFF"/>
+                    </a:solidFill>
+                  </a:tcPr>
+                </a:tc>
+                <a:tc>
+                  <a:txBody>
+                    <a:bodyPr/>
+                    <a:lstStyle/>
+                    <a:p>
+                      <a:pPr algn="ctr" indent="0" marL="0">
+                        <a:buNone/>
+                      </a:pPr>
+                      <a:r>
+                        <a:rPr lang="en-US" sz="1100" b="1" dirty="0">
+                          <a:solidFill>
+                            <a:srgbClr val="D78A27"/>
+                          </a:solidFill>
+                          <a:latin typeface="Calibri" pitchFamily="34" charset="0"/>
+                          <a:ea typeface="Calibri" pitchFamily="34" charset="-122"/>
+                          <a:cs typeface="Calibri" pitchFamily="34" charset="-120"/>
+                        </a:rPr>
+                        <a:t>[FR_CPL_2]</a:t>
+                      </a:r>
+                      <a:endParaRPr lang="en-US" sz="1100" dirty="0">
+                        <a:latin typeface="Calibri" charset="0"/>
+                        <a:ea typeface="Calibri" charset="0"/>
+                        <a:cs typeface="Calibri" charset="0"/>
+                      </a:endParaRPr>
+                    </a:p>
+                  </a:txBody>
+                  <a:tcPr marL="50800" marR="50800" marT="50800" marB="50800" anchor="ctr">
+                    <a:lnL w="12700" cap="flat" cmpd="sng" algn="ctr">
+                      <a:solidFill>
+                        <a:srgbClr val="DCE2E8"/>
+                      </a:solidFill>
+                      <a:prstDash val="solid"/>
+                      <a:round/>
+                      <a:headEnd type="none" w="med" len="med"/>
+                      <a:tailEnd type="none" w="med" len="med"/>
+                    </a:lnL>
+                    <a:lnR w="12700" cap="flat" cmpd="sng" algn="ctr">
+                      <a:solidFill>
+                        <a:srgbClr val="DCE2E8"/>
+                      </a:solidFill>
+                      <a:prstDash val="solid"/>
+                      <a:round/>
+                      <a:headEnd type="none" w="med" len="med"/>
+                      <a:tailEnd type="none" w="med" len="med"/>
+                    </a:lnR>
+                    <a:lnT w="12700" cap="flat" cmpd="sng" algn="ctr">
+                      <a:solidFill>
+                        <a:srgbClr val="DCE2E8"/>
+                      </a:solidFill>
+                      <a:prstDash val="solid"/>
+                      <a:round/>
+                      <a:headEnd type="none" w="med" len="med"/>
+                      <a:tailEnd type="none" w="med" len="med"/>
+                    </a:lnT>
+                    <a:lnB w="12700" cap="flat" cmpd="sng" algn="ctr">
+                      <a:solidFill>
+                        <a:srgbClr val="DCE2E8"/>
+                      </a:solidFill>
+                      <a:prstDash val="solid"/>
+                      <a:round/>
+                      <a:headEnd type="none" w="med" len="med"/>
+                      <a:tailEnd type="none" w="med" len="med"/>
+                    </a:lnB>
+                    <a:solidFill>
+                      <a:srgbClr val="FFFFFF"/>
+                    </a:solidFill>
+                  </a:tcPr>
+                </a:tc>
+                <a:tc>
+                  <a:txBody>
+                    <a:bodyPr/>
+                    <a:lstStyle/>
+                    <a:p>
+                      <a:pPr algn="l" indent="0" marL="0">
+                        <a:buNone/>
+                      </a:pPr>
+                      <a:r>
+                        <a:rPr lang="en-US" sz="1100" b="1" dirty="0">
+                          <a:solidFill>
+                            <a:srgbClr val="D78A27"/>
+                          </a:solidFill>
+                          <a:latin typeface="Calibri" pitchFamily="34" charset="0"/>
+                          <a:ea typeface="Calibri" pitchFamily="34" charset="-122"/>
+                          <a:cs typeface="Calibri" pitchFamily="34" charset="-120"/>
+                        </a:rPr>
+                        <a:t>[FR_THEME_2]</a:t>
+                      </a:r>
+                      <a:endParaRPr lang="en-US" sz="1100" dirty="0">
+                        <a:latin typeface="Calibri" charset="0"/>
+                        <a:ea typeface="Calibri" charset="0"/>
+                        <a:cs typeface="Calibri" charset="0"/>
+                      </a:endParaRPr>
+                    </a:p>
+                  </a:txBody>
+                  <a:tcPr marL="50800" marR="50800" marT="50800" marB="50800" anchor="ctr">
+                    <a:lnL w="12700" cap="flat" cmpd="sng" algn="ctr">
+                      <a:solidFill>
+                        <a:srgbClr val="DCE2E8"/>
+                      </a:solidFill>
+                      <a:prstDash val="solid"/>
+                      <a:round/>
+                      <a:headEnd type="none" w="med" len="med"/>
+                      <a:tailEnd type="none" w="med" len="med"/>
+                    </a:lnL>
+                    <a:lnR w="12700" cap="flat" cmpd="sng" algn="ctr">
+                      <a:solidFill>
+                        <a:srgbClr val="DCE2E8"/>
+                      </a:solidFill>
+                      <a:prstDash val="solid"/>
+                      <a:round/>
+                      <a:headEnd type="none" w="med" len="med"/>
+                      <a:tailEnd type="none" w="med" len="med"/>
+                    </a:lnR>
+                    <a:lnT w="12700" cap="flat" cmpd="sng" algn="ctr">
+                      <a:solidFill>
+                        <a:srgbClr val="DCE2E8"/>
+                      </a:solidFill>
+                      <a:prstDash val="solid"/>
+                      <a:round/>
+                      <a:headEnd type="none" w="med" len="med"/>
+                      <a:tailEnd type="none" w="med" len="med"/>
+                    </a:lnT>
+                    <a:lnB w="12700" cap="flat" cmpd="sng" algn="ctr">
+                      <a:solidFill>
+                        <a:srgbClr val="DCE2E8"/>
+                      </a:solidFill>
+                      <a:prstDash val="solid"/>
+                      <a:round/>
+                      <a:headEnd type="none" w="med" len="med"/>
+                      <a:tailEnd type="none" w="med" len="med"/>
+                    </a:lnB>
+                    <a:solidFill>
+                      <a:srgbClr val="FFFFFF"/>
+                    </a:solidFill>
+                  </a:tcPr>
+                </a:tc>
+              </a:tr>
+              <a:tr h="329184">
+                <a:tc>
+                  <a:txBody>
+                    <a:bodyPr/>
+                    <a:lstStyle/>
+                    <a:p>
+                      <a:pPr algn="l" indent="0" marL="0">
+                        <a:buNone/>
+                      </a:pPr>
+                      <a:r>
+                        <a:rPr lang="en-US" sz="1100" b="1" dirty="0">
+                          <a:solidFill>
+                            <a:srgbClr val="D78A27"/>
+                          </a:solidFill>
+                          <a:latin typeface="Calibri" pitchFamily="34" charset="0"/>
+                          <a:ea typeface="Calibri" pitchFamily="34" charset="-122"/>
+                          <a:cs typeface="Calibri" pitchFamily="34" charset="-120"/>
+                        </a:rPr>
+                        <a:t>[FR_CAMP_3]</a:t>
+                      </a:r>
+                      <a:endParaRPr lang="en-US" sz="1100" dirty="0">
+                        <a:latin typeface="Calibri" charset="0"/>
+                        <a:ea typeface="Calibri" charset="0"/>
+                        <a:cs typeface="Calibri" charset="0"/>
+                      </a:endParaRPr>
+                    </a:p>
+                  </a:txBody>
+                  <a:tcPr marL="50800" marR="50800" marT="50800" marB="50800" anchor="ctr">
+                    <a:lnL w="12700" cap="flat" cmpd="sng" algn="ctr">
+                      <a:solidFill>
+                        <a:srgbClr val="DCE2E8"/>
+                      </a:solidFill>
+                      <a:prstDash val="solid"/>
+                      <a:round/>
+                      <a:headEnd type="none" w="med" len="med"/>
+                      <a:tailEnd type="none" w="med" len="med"/>
+                    </a:lnL>
+                    <a:lnR w="12700" cap="flat" cmpd="sng" algn="ctr">
+                      <a:solidFill>
+                        <a:srgbClr val="DCE2E8"/>
+                      </a:solidFill>
+                      <a:prstDash val="solid"/>
+                      <a:round/>
+                      <a:headEnd type="none" w="med" len="med"/>
+                      <a:tailEnd type="none" w="med" len="med"/>
+                    </a:lnR>
+                    <a:lnT w="12700" cap="flat" cmpd="sng" algn="ctr">
+                      <a:solidFill>
+                        <a:srgbClr val="DCE2E8"/>
+                      </a:solidFill>
+                      <a:prstDash val="solid"/>
+                      <a:round/>
+                      <a:headEnd type="none" w="med" len="med"/>
+                      <a:tailEnd type="none" w="med" len="med"/>
+                    </a:lnT>
+                    <a:lnB w="12700" cap="flat" cmpd="sng" algn="ctr">
+                      <a:solidFill>
+                        <a:srgbClr val="DCE2E8"/>
+                      </a:solidFill>
+                      <a:prstDash val="solid"/>
+                      <a:round/>
+                      <a:headEnd type="none" w="med" len="med"/>
+                      <a:tailEnd type="none" w="med" len="med"/>
+                    </a:lnB>
+                    <a:solidFill>
+                      <a:srgbClr val="FFFFFF"/>
+                    </a:solidFill>
+                  </a:tcPr>
+                </a:tc>
+                <a:tc>
+                  <a:txBody>
+                    <a:bodyPr/>
+                    <a:lstStyle/>
+                    <a:p>
+                      <a:pPr algn="ctr" indent="0" marL="0">
+                        <a:buNone/>
+                      </a:pPr>
+                      <a:r>
+                        <a:rPr lang="en-US" sz="1100" b="1" dirty="0">
+                          <a:solidFill>
+                            <a:srgbClr val="D78A27"/>
+                          </a:solidFill>
+                          <a:latin typeface="Calibri" pitchFamily="34" charset="0"/>
+                          <a:ea typeface="Calibri" pitchFamily="34" charset="-122"/>
+                          <a:cs typeface="Calibri" pitchFamily="34" charset="-120"/>
+                        </a:rPr>
+                        <a:t>[FR_SPEND_3]</a:t>
+                      </a:r>
+                      <a:endParaRPr lang="en-US" sz="1100" dirty="0">
+                        <a:latin typeface="Calibri" charset="0"/>
+                        <a:ea typeface="Calibri" charset="0"/>
+                        <a:cs typeface="Calibri" charset="0"/>
+                      </a:endParaRPr>
+                    </a:p>
+                  </a:txBody>
+                  <a:tcPr marL="50800" marR="50800" marT="50800" marB="50800" anchor="ctr">
+                    <a:lnL w="12700" cap="flat" cmpd="sng" algn="ctr">
+                      <a:solidFill>
+                        <a:srgbClr val="DCE2E8"/>
+                      </a:solidFill>
+                      <a:prstDash val="solid"/>
+                      <a:round/>
+                      <a:headEnd type="none" w="med" len="med"/>
+                      <a:tailEnd type="none" w="med" len="med"/>
+                    </a:lnL>
+                    <a:lnR w="12700" cap="flat" cmpd="sng" algn="ctr">
+                      <a:solidFill>
+                        <a:srgbClr val="DCE2E8"/>
+                      </a:solidFill>
+                      <a:prstDash val="solid"/>
+                      <a:round/>
+                      <a:headEnd type="none" w="med" len="med"/>
+                      <a:tailEnd type="none" w="med" len="med"/>
+                    </a:lnR>
+                    <a:lnT w="12700" cap="flat" cmpd="sng" algn="ctr">
+                      <a:solidFill>
+                        <a:srgbClr val="DCE2E8"/>
+                      </a:solidFill>
+                      <a:prstDash val="solid"/>
+                      <a:round/>
+                      <a:headEnd type="none" w="med" len="med"/>
+                      <a:tailEnd type="none" w="med" len="med"/>
+                    </a:lnT>
+                    <a:lnB w="12700" cap="flat" cmpd="sng" algn="ctr">
+                      <a:solidFill>
+                        <a:srgbClr val="DCE2E8"/>
+                      </a:solidFill>
+                      <a:prstDash val="solid"/>
+                      <a:round/>
+                      <a:headEnd type="none" w="med" len="med"/>
+                      <a:tailEnd type="none" w="med" len="med"/>
+                    </a:lnB>
+                    <a:solidFill>
+                      <a:srgbClr val="FFFFFF"/>
+                    </a:solidFill>
+                  </a:tcPr>
+                </a:tc>
+                <a:tc>
+                  <a:txBody>
+                    <a:bodyPr/>
+                    <a:lstStyle/>
+                    <a:p>
+                      <a:pPr algn="ctr" indent="0" marL="0">
+                        <a:buNone/>
+                      </a:pPr>
+                      <a:r>
+                        <a:rPr lang="en-US" sz="1100" b="1" dirty="0">
+                          <a:solidFill>
+                            <a:srgbClr val="D78A27"/>
+                          </a:solidFill>
+                          <a:latin typeface="Calibri" pitchFamily="34" charset="0"/>
+                          <a:ea typeface="Calibri" pitchFamily="34" charset="-122"/>
+                          <a:cs typeface="Calibri" pitchFamily="34" charset="-120"/>
+                        </a:rPr>
+                        <a:t>[FR_LEADS_3]</a:t>
+                      </a:r>
+                      <a:endParaRPr lang="en-US" sz="1100" dirty="0">
+                        <a:latin typeface="Calibri" charset="0"/>
+                        <a:ea typeface="Calibri" charset="0"/>
+                        <a:cs typeface="Calibri" charset="0"/>
+                      </a:endParaRPr>
+                    </a:p>
+                  </a:txBody>
+                  <a:tcPr marL="50800" marR="50800" marT="50800" marB="50800" anchor="ctr">
+                    <a:lnL w="12700" cap="flat" cmpd="sng" algn="ctr">
+                      <a:solidFill>
+                        <a:srgbClr val="DCE2E8"/>
+                      </a:solidFill>
+                      <a:prstDash val="solid"/>
+                      <a:round/>
+                      <a:headEnd type="none" w="med" len="med"/>
+                      <a:tailEnd type="none" w="med" len="med"/>
+                    </a:lnL>
+                    <a:lnR w="12700" cap="flat" cmpd="sng" algn="ctr">
+                      <a:solidFill>
+                        <a:srgbClr val="DCE2E8"/>
+                      </a:solidFill>
+                      <a:prstDash val="solid"/>
+                      <a:round/>
+                      <a:headEnd type="none" w="med" len="med"/>
+                      <a:tailEnd type="none" w="med" len="med"/>
+                    </a:lnR>
+                    <a:lnT w="12700" cap="flat" cmpd="sng" algn="ctr">
+                      <a:solidFill>
+                        <a:srgbClr val="DCE2E8"/>
+                      </a:solidFill>
+                      <a:prstDash val="solid"/>
+                      <a:round/>
+                      <a:headEnd type="none" w="med" len="med"/>
+                      <a:tailEnd type="none" w="med" len="med"/>
+                    </a:lnT>
+                    <a:lnB w="12700" cap="flat" cmpd="sng" algn="ctr">
+                      <a:solidFill>
+                        <a:srgbClr val="DCE2E8"/>
+                      </a:solidFill>
+                      <a:prstDash val="solid"/>
+                      <a:round/>
+                      <a:headEnd type="none" w="med" len="med"/>
+                      <a:tailEnd type="none" w="med" len="med"/>
+                    </a:lnB>
+                    <a:solidFill>
+                      <a:srgbClr val="FFFFFF"/>
+                    </a:solidFill>
+                  </a:tcPr>
+                </a:tc>
+                <a:tc>
+                  <a:txBody>
+                    <a:bodyPr/>
+                    <a:lstStyle/>
+                    <a:p>
+                      <a:pPr algn="ctr" indent="0" marL="0">
+                        <a:buNone/>
+                      </a:pPr>
+                      <a:r>
+                        <a:rPr lang="en-US" sz="1100" b="1" dirty="0">
+                          <a:solidFill>
+                            <a:srgbClr val="D78A27"/>
+                          </a:solidFill>
+                          <a:latin typeface="Calibri" pitchFamily="34" charset="0"/>
+                          <a:ea typeface="Calibri" pitchFamily="34" charset="-122"/>
+                          <a:cs typeface="Calibri" pitchFamily="34" charset="-120"/>
+                        </a:rPr>
+                        <a:t>[FR_CPL_3]</a:t>
+                      </a:r>
+                      <a:endParaRPr lang="en-US" sz="1100" dirty="0">
+                        <a:latin typeface="Calibri" charset="0"/>
+                        <a:ea typeface="Calibri" charset="0"/>
+                        <a:cs typeface="Calibri" charset="0"/>
+                      </a:endParaRPr>
+                    </a:p>
+                  </a:txBody>
+                  <a:tcPr marL="50800" marR="50800" marT="50800" marB="50800" anchor="ctr">
+                    <a:lnL w="12700" cap="flat" cmpd="sng" algn="ctr">
+                      <a:solidFill>
+                        <a:srgbClr val="DCE2E8"/>
+                      </a:solidFill>
+                      <a:prstDash val="solid"/>
+                      <a:round/>
+                      <a:headEnd type="none" w="med" len="med"/>
+                      <a:tailEnd type="none" w="med" len="med"/>
+                    </a:lnL>
+                    <a:lnR w="12700" cap="flat" cmpd="sng" algn="ctr">
+                      <a:solidFill>
+                        <a:srgbClr val="DCE2E8"/>
+                      </a:solidFill>
+                      <a:prstDash val="solid"/>
+                      <a:round/>
+                      <a:headEnd type="none" w="med" len="med"/>
+                      <a:tailEnd type="none" w="med" len="med"/>
+                    </a:lnR>
+                    <a:lnT w="12700" cap="flat" cmpd="sng" algn="ctr">
+                      <a:solidFill>
+                        <a:srgbClr val="DCE2E8"/>
+                      </a:solidFill>
+                      <a:prstDash val="solid"/>
+                      <a:round/>
+                      <a:headEnd type="none" w="med" len="med"/>
+                      <a:tailEnd type="none" w="med" len="med"/>
+                    </a:lnT>
+                    <a:lnB w="12700" cap="flat" cmpd="sng" algn="ctr">
+                      <a:solidFill>
+                        <a:srgbClr val="DCE2E8"/>
+                      </a:solidFill>
+                      <a:prstDash val="solid"/>
+                      <a:round/>
+                      <a:headEnd type="none" w="med" len="med"/>
+                      <a:tailEnd type="none" w="med" len="med"/>
+                    </a:lnB>
+                    <a:solidFill>
+                      <a:srgbClr val="FFFFFF"/>
+                    </a:solidFill>
+                  </a:tcPr>
+                </a:tc>
+                <a:tc>
+                  <a:txBody>
+                    <a:bodyPr/>
+                    <a:lstStyle/>
+                    <a:p>
+                      <a:pPr algn="l" indent="0" marL="0">
+                        <a:buNone/>
+                      </a:pPr>
+                      <a:r>
+                        <a:rPr lang="en-US" sz="1100" b="1" dirty="0">
+                          <a:solidFill>
+                            <a:srgbClr val="D78A27"/>
+                          </a:solidFill>
+                          <a:latin typeface="Calibri" pitchFamily="34" charset="0"/>
+                          <a:ea typeface="Calibri" pitchFamily="34" charset="-122"/>
+                          <a:cs typeface="Calibri" pitchFamily="34" charset="-120"/>
+                        </a:rPr>
+                        <a:t>[FR_THEME_3]</a:t>
+                      </a:r>
+                      <a:endParaRPr lang="en-US" sz="1100" dirty="0">
                         <a:latin typeface="Calibri" charset="0"/>
                         <a:ea typeface="Calibri" charset="0"/>
                         <a:cs typeface="Calibri" charset="0"/>
@@ -5272,8 +7086,8 @@
         </p:nvSpPr>
         <p:spPr>
           <a:xfrm>
-            <a:off x="548640" y="3886200"/>
-            <a:ext cx="7040880" cy="320040"/>
+            <a:off x="548640" y="5852160"/>
+            <a:ext cx="11091672" cy="365760"/>
           </a:xfrm>
           <a:prstGeom prst="rect">
             <a:avLst/>
@@ -5289,424 +7103,7 @@
               <a:buNone/>
             </a:pPr>
             <a:r>
-              <a:rPr lang="en-US" sz="1300" b="1" dirty="0">
-                <a:solidFill>
-                  <a:srgbClr val="1F2733"/>
-                </a:solidFill>
-                <a:latin typeface="Calibri" pitchFamily="34" charset="0"/>
-                <a:ea typeface="Calibri" pitchFamily="34" charset="-122"/>
-                <a:cs typeface="Calibri" pitchFamily="34" charset="-120"/>
-              </a:rPr>
-              <a:t>Best keywords or themes</a:t>
-            </a:r>
-            <a:endParaRPr lang="en-US" sz="1300" dirty="0"/>
-          </a:p>
-        </p:txBody>
-      </p:sp>
-      <p:sp>
-        <p:nvSpPr>
-          <p:cNvPr id="6" name="Shape 3"/>
-          <p:cNvSpPr/>
-          <p:nvPr/>
-        </p:nvSpPr>
-        <p:spPr>
-          <a:xfrm>
-            <a:off x="548640" y="4251960"/>
-            <a:ext cx="2240280" cy="457200"/>
-          </a:xfrm>
-          <a:prstGeom prst="roundRect">
-            <a:avLst>
-              <a:gd name="adj" fmla="val 20000"/>
-            </a:avLst>
-          </a:prstGeom>
-          <a:solidFill>
-            <a:srgbClr val="EAF6F2"/>
-          </a:solidFill>
-          <a:ln/>
-        </p:spPr>
-      </p:sp>
-      <p:sp>
-        <p:nvSpPr>
-          <p:cNvPr id="7" name="Text 4"/>
-          <p:cNvSpPr/>
-          <p:nvPr/>
-        </p:nvSpPr>
-        <p:spPr>
-          <a:xfrm>
-            <a:off x="548640" y="4251960"/>
-            <a:ext cx="2240280" cy="457200"/>
-          </a:xfrm>
-          <a:prstGeom prst="rect">
-            <a:avLst/>
-          </a:prstGeom>
-          <a:noFill/>
-          <a:ln/>
-        </p:spPr>
-        <p:txBody>
-          <a:bodyPr wrap="square" lIns="0" tIns="0" rIns="0" bIns="0" rtlCol="0" anchor="ctr"/>
-          <a:lstStyle/>
-          <a:p>
-            <a:pPr algn="ctr" indent="0" marL="0">
-              <a:buNone/>
-            </a:pPr>
-            <a:r>
-              <a:rPr lang="en-US" sz="1250" b="1" dirty="0">
-                <a:solidFill>
-                  <a:srgbClr val="D78A27"/>
-                </a:solidFill>
-                <a:latin typeface="Calibri" pitchFamily="34" charset="0"/>
-                <a:ea typeface="Calibri" pitchFamily="34" charset="-122"/>
-                <a:cs typeface="Calibri" pitchFamily="34" charset="-120"/>
-              </a:rPr>
-              <a:t>[ KEYWORD_1 ]</a:t>
-            </a:r>
-            <a:endParaRPr lang="en-US" sz="1250" dirty="0"/>
-          </a:p>
-        </p:txBody>
-      </p:sp>
-      <p:sp>
-        <p:nvSpPr>
-          <p:cNvPr id="8" name="Shape 5"/>
-          <p:cNvSpPr/>
-          <p:nvPr/>
-        </p:nvSpPr>
-        <p:spPr>
-          <a:xfrm>
-            <a:off x="2953512" y="4251960"/>
-            <a:ext cx="2240280" cy="457200"/>
-          </a:xfrm>
-          <a:prstGeom prst="roundRect">
-            <a:avLst>
-              <a:gd name="adj" fmla="val 20000"/>
-            </a:avLst>
-          </a:prstGeom>
-          <a:solidFill>
-            <a:srgbClr val="EAF6F2"/>
-          </a:solidFill>
-          <a:ln/>
-        </p:spPr>
-      </p:sp>
-      <p:sp>
-        <p:nvSpPr>
-          <p:cNvPr id="9" name="Text 6"/>
-          <p:cNvSpPr/>
-          <p:nvPr/>
-        </p:nvSpPr>
-        <p:spPr>
-          <a:xfrm>
-            <a:off x="2953512" y="4251960"/>
-            <a:ext cx="2240280" cy="457200"/>
-          </a:xfrm>
-          <a:prstGeom prst="rect">
-            <a:avLst/>
-          </a:prstGeom>
-          <a:noFill/>
-          <a:ln/>
-        </p:spPr>
-        <p:txBody>
-          <a:bodyPr wrap="square" lIns="0" tIns="0" rIns="0" bIns="0" rtlCol="0" anchor="ctr"/>
-          <a:lstStyle/>
-          <a:p>
-            <a:pPr algn="ctr" indent="0" marL="0">
-              <a:buNone/>
-            </a:pPr>
-            <a:r>
-              <a:rPr lang="en-US" sz="1250" b="1" dirty="0">
-                <a:solidFill>
-                  <a:srgbClr val="D78A27"/>
-                </a:solidFill>
-                <a:latin typeface="Calibri" pitchFamily="34" charset="0"/>
-                <a:ea typeface="Calibri" pitchFamily="34" charset="-122"/>
-                <a:cs typeface="Calibri" pitchFamily="34" charset="-120"/>
-              </a:rPr>
-              <a:t>[ KEYWORD_2 ]</a:t>
-            </a:r>
-            <a:endParaRPr lang="en-US" sz="1250" dirty="0"/>
-          </a:p>
-        </p:txBody>
-      </p:sp>
-      <p:sp>
-        <p:nvSpPr>
-          <p:cNvPr id="10" name="Shape 7"/>
-          <p:cNvSpPr/>
-          <p:nvPr/>
-        </p:nvSpPr>
-        <p:spPr>
-          <a:xfrm>
-            <a:off x="5358384" y="4251960"/>
-            <a:ext cx="2240280" cy="457200"/>
-          </a:xfrm>
-          <a:prstGeom prst="roundRect">
-            <a:avLst>
-              <a:gd name="adj" fmla="val 20000"/>
-            </a:avLst>
-          </a:prstGeom>
-          <a:solidFill>
-            <a:srgbClr val="EAF6F2"/>
-          </a:solidFill>
-          <a:ln/>
-        </p:spPr>
-      </p:sp>
-      <p:sp>
-        <p:nvSpPr>
-          <p:cNvPr id="11" name="Text 8"/>
-          <p:cNvSpPr/>
-          <p:nvPr/>
-        </p:nvSpPr>
-        <p:spPr>
-          <a:xfrm>
-            <a:off x="5358384" y="4251960"/>
-            <a:ext cx="2240280" cy="457200"/>
-          </a:xfrm>
-          <a:prstGeom prst="rect">
-            <a:avLst/>
-          </a:prstGeom>
-          <a:noFill/>
-          <a:ln/>
-        </p:spPr>
-        <p:txBody>
-          <a:bodyPr wrap="square" lIns="0" tIns="0" rIns="0" bIns="0" rtlCol="0" anchor="ctr"/>
-          <a:lstStyle/>
-          <a:p>
-            <a:pPr algn="ctr" indent="0" marL="0">
-              <a:buNone/>
-            </a:pPr>
-            <a:r>
-              <a:rPr lang="en-US" sz="1250" b="1" dirty="0">
-                <a:solidFill>
-                  <a:srgbClr val="D78A27"/>
-                </a:solidFill>
-                <a:latin typeface="Calibri" pitchFamily="34" charset="0"/>
-                <a:ea typeface="Calibri" pitchFamily="34" charset="-122"/>
-                <a:cs typeface="Calibri" pitchFamily="34" charset="-120"/>
-              </a:rPr>
-              <a:t>[ KEYWORD_3 ]</a:t>
-            </a:r>
-            <a:endParaRPr lang="en-US" sz="1250" dirty="0"/>
-          </a:p>
-        </p:txBody>
-      </p:sp>
-      <p:sp>
-        <p:nvSpPr>
-          <p:cNvPr id="12" name="Shape 9"/>
-          <p:cNvSpPr/>
-          <p:nvPr/>
-        </p:nvSpPr>
-        <p:spPr>
-          <a:xfrm>
-            <a:off x="548640" y="4983480"/>
-            <a:ext cx="7040880" cy="1234440"/>
-          </a:xfrm>
-          <a:prstGeom prst="roundRect">
-            <a:avLst>
-              <a:gd name="adj" fmla="val 7407"/>
-            </a:avLst>
-          </a:prstGeom>
-          <a:solidFill>
-            <a:srgbClr val="FBF1E0"/>
-          </a:solidFill>
-          <a:ln/>
-        </p:spPr>
-      </p:sp>
-      <p:sp>
-        <p:nvSpPr>
-          <p:cNvPr id="13" name="Text 10"/>
-          <p:cNvSpPr/>
-          <p:nvPr/>
-        </p:nvSpPr>
-        <p:spPr>
-          <a:xfrm>
-            <a:off x="777240" y="5102352"/>
-            <a:ext cx="6583680" cy="274320"/>
-          </a:xfrm>
-          <a:prstGeom prst="rect">
-            <a:avLst/>
-          </a:prstGeom>
-          <a:noFill/>
-          <a:ln/>
-        </p:spPr>
-        <p:txBody>
-          <a:bodyPr wrap="square" lIns="0" tIns="0" rIns="0" bIns="0" rtlCol="0" anchor="t"/>
-          <a:lstStyle/>
-          <a:p>
-            <a:pPr algn="l" indent="0" marL="0">
-              <a:buNone/>
-            </a:pPr>
-            <a:r>
-              <a:rPr lang="en-US" sz="1100" b="1" spc="200" kern="0" dirty="0">
-                <a:solidFill>
-                  <a:srgbClr val="D78A27"/>
-                </a:solidFill>
-                <a:latin typeface="Calibri" pitchFamily="34" charset="0"/>
-                <a:ea typeface="Calibri" pitchFamily="34" charset="-122"/>
-                <a:cs typeface="Calibri" pitchFamily="34" charset="-120"/>
-              </a:rPr>
-              <a:t>CAMPAIGN SPOTLIGHT</a:t>
-            </a:r>
-            <a:endParaRPr lang="en-US" sz="1100" dirty="0"/>
-          </a:p>
-        </p:txBody>
-      </p:sp>
-      <p:sp>
-        <p:nvSpPr>
-          <p:cNvPr id="14" name="Text 11"/>
-          <p:cNvSpPr/>
-          <p:nvPr/>
-        </p:nvSpPr>
-        <p:spPr>
-          <a:xfrm>
-            <a:off x="777240" y="5394960"/>
-            <a:ext cx="6583680" cy="731520"/>
-          </a:xfrm>
-          <a:prstGeom prst="rect">
-            <a:avLst/>
-          </a:prstGeom>
-          <a:noFill/>
-          <a:ln/>
-        </p:spPr>
-        <p:txBody>
-          <a:bodyPr wrap="square" lIns="0" tIns="0" rIns="0" bIns="0" rtlCol="0" anchor="t"/>
-          <a:lstStyle/>
-          <a:p>
-            <a:pPr algn="l" indent="0" marL="0">
-              <a:spcAft>
-                <a:spcPts val="400"/>
-              </a:spcAft>
-              <a:buNone/>
-            </a:pPr>
-            <a:r>
-              <a:rPr lang="en-US" sz="1300" b="1" dirty="0">
-                <a:solidFill>
-                  <a:srgbClr val="D78A27"/>
-                </a:solidFill>
-                <a:latin typeface="Calibri" pitchFamily="34" charset="0"/>
-                <a:ea typeface="Calibri" pitchFamily="34" charset="-122"/>
-                <a:cs typeface="Calibri" pitchFamily="34" charset="-120"/>
-              </a:rPr>
-              <a:t>[ SPOTLIGHT_DESC ]</a:t>
-            </a:r>
-            <a:endParaRPr lang="en-US" sz="1300" dirty="0"/>
-          </a:p>
-          <a:p>
-            <a:pPr algn="l" indent="0" marL="0">
-              <a:spcAft>
-                <a:spcPts val="400"/>
-              </a:spcAft>
-              <a:buNone/>
-            </a:pPr>
-            <a:r>
-              <a:rPr lang="en-US" sz="1300" dirty="0">
-                <a:solidFill>
-                  <a:srgbClr val="1F2733"/>
-                </a:solidFill>
-                <a:latin typeface="Calibri" pitchFamily="34" charset="0"/>
-                <a:ea typeface="Calibri" pitchFamily="34" charset="-122"/>
-                <a:cs typeface="Calibri" pitchFamily="34" charset="-120"/>
-              </a:rPr>
-              <a:t>Audience: </a:t>
-            </a:r>
-            <a:pPr algn="l" indent="0" marL="0">
-              <a:spcAft>
-                <a:spcPts val="400"/>
-              </a:spcAft>
-              <a:buNone/>
-            </a:pPr>
-            <a:r>
-              <a:rPr lang="en-US" sz="1300" b="1" dirty="0">
-                <a:solidFill>
-                  <a:srgbClr val="D78A27"/>
-                </a:solidFill>
-                <a:latin typeface="Calibri" pitchFamily="34" charset="0"/>
-                <a:ea typeface="Calibri" pitchFamily="34" charset="-122"/>
-                <a:cs typeface="Calibri" pitchFamily="34" charset="-120"/>
-              </a:rPr>
-              <a:t>[ SPOTLIGHT_AUDIENCE ]</a:t>
-            </a:r>
-            <a:endParaRPr lang="en-US" sz="1300" dirty="0"/>
-          </a:p>
-        </p:txBody>
-      </p:sp>
-      <p:sp>
-        <p:nvSpPr>
-          <p:cNvPr id="15" name="Text 12"/>
-          <p:cNvSpPr/>
-          <p:nvPr/>
-        </p:nvSpPr>
-        <p:spPr>
-          <a:xfrm>
-            <a:off x="7955280" y="1463040"/>
-            <a:ext cx="3703320" cy="320040"/>
-          </a:xfrm>
-          <a:prstGeom prst="rect">
-            <a:avLst/>
-          </a:prstGeom>
-          <a:noFill/>
-          <a:ln/>
-        </p:spPr>
-        <p:txBody>
-          <a:bodyPr wrap="square" lIns="0" tIns="0" rIns="0" bIns="0" rtlCol="0" anchor="t"/>
-          <a:lstStyle/>
-          <a:p>
-            <a:pPr algn="l" indent="0" marL="0">
-              <a:buNone/>
-            </a:pPr>
-            <a:r>
-              <a:rPr lang="en-US" sz="1300" b="1" dirty="0">
-                <a:solidFill>
-                  <a:srgbClr val="1F2733"/>
-                </a:solidFill>
-                <a:latin typeface="Calibri" pitchFamily="34" charset="0"/>
-                <a:ea typeface="Calibri" pitchFamily="34" charset="-122"/>
-                <a:cs typeface="Calibri" pitchFamily="34" charset="-120"/>
-              </a:rPr>
-              <a:t>Spend by market</a:t>
-            </a:r>
-            <a:endParaRPr lang="en-US" sz="1300" dirty="0"/>
-          </a:p>
-        </p:txBody>
-      </p:sp>
-      <p:graphicFrame>
-        <p:nvGraphicFramePr>
-          <p:cNvPr id="16" name="Chart 0" descr=""/>
-          <p:cNvGraphicFramePr/>
-          <p:nvPr/>
-        </p:nvGraphicFramePr>
-        <p:xfrm>
-          <a:off x="7863840" y="1828800"/>
-          <a:ext cx="3840480" cy="3291840"/>
-        </p:xfrm>
-        <a:graphic xmlns:a="http://schemas.openxmlformats.org/drawingml/2006/main">
-          <a:graphicData uri="http://schemas.openxmlformats.org/drawingml/2006/chart">
-            <c:chart xmlns:c="http://schemas.openxmlformats.org/drawingml/2006/chart" r:id="rId1"/>
-          </a:graphicData>
-        </a:graphic>
-      </p:graphicFrame>
-      <p:sp>
-        <p:nvSpPr>
-          <p:cNvPr id="17" name="Text 13"/>
-          <p:cNvSpPr/>
-          <p:nvPr/>
-        </p:nvSpPr>
-        <p:spPr>
-          <a:xfrm>
-            <a:off x="7955280" y="5138928"/>
-            <a:ext cx="3703320" cy="274320"/>
-          </a:xfrm>
-          <a:prstGeom prst="rect">
-            <a:avLst/>
-          </a:prstGeom>
-          <a:noFill/>
-          <a:ln/>
-        </p:spPr>
-        <p:txBody>
-          <a:bodyPr wrap="square" lIns="0" tIns="0" rIns="0" bIns="0" rtlCol="0" anchor="t"/>
-          <a:lstStyle/>
-          <a:p>
-            <a:pPr algn="l" indent="0" marL="0">
-              <a:buNone/>
-            </a:pPr>
-            <a:r>
-              <a:rPr lang="en-US" sz="1050" i="1" dirty="0">
+              <a:rPr lang="en-US" sz="1100" i="1" dirty="0">
                 <a:solidFill>
                   <a:srgbClr val="5B6773"/>
                 </a:solidFill>
@@ -5714,9 +7111,9 @@
                 <a:ea typeface="Calibri" pitchFamily="34" charset="-122"/>
                 <a:cs typeface="Calibri" pitchFamily="34" charset="-120"/>
               </a:rPr>
-              <a:t>Placeholder values. Replace with Monday figures.</a:t>
+              <a:t>One row per live campaign, grouped by region. Replace the bracketed values with Monday figures, and add or remove rows per region as needed.</a:t>
             </a:r>
-            <a:endParaRPr lang="en-US" sz="1050" dirty="0"/>
+            <a:endParaRPr lang="en-US" sz="1100" dirty="0"/>
           </a:p>
         </p:txBody>
       </p:sp>
@@ -5873,7 +7270,7 @@
           </p:nvPr>
         </p:nvGraphicFramePr>
         <p:xfrm>
-          <a:off x="548640" y="1463040"/>
+          <a:off x="548640" y="1417320"/>
           <a:ext cx="9143771" cy="914400"/>
         </p:xfrm>
         <a:graphic>
@@ -5881,13 +7278,13 @@
             <a:tbl>
               <a:tblPr/>
               <a:tblGrid>
-                <a:gridCol w="960120"/>
-                <a:gridCol w="1554480"/>
-                <a:gridCol w="1371600"/>
-                <a:gridCol w="1554480"/>
-                <a:gridCol w="1600200"/>
+                <a:gridCol w="3200400"/>
+                <a:gridCol w="1691640"/>
+                <a:gridCol w="1737360"/>
+                <a:gridCol w="2011680"/>
+                <a:gridCol w="2450592"/>
               </a:tblGrid>
-              <a:tr h="457200">
+              <a:tr h="384048">
                 <a:tc>
                   <a:txBody>
                     <a:bodyPr/>
@@ -5905,7 +7302,7 @@
                           <a:ea typeface="Calibri" pitchFamily="34" charset="-122"/>
                           <a:cs typeface="Calibri" pitchFamily="34" charset="-120"/>
                         </a:rPr>
-                        <a:t>Market</a:t>
+                        <a:t>Campaign</a:t>
                       </a:r>
                       <a:endParaRPr lang="en-US" sz="1150" dirty="0">
                         <a:latin typeface="Calibri" charset="0"/>
@@ -6229,7 +7626,89 @@
                   </a:tcPr>
                 </a:tc>
               </a:tr>
-              <a:tr h="548640">
+              <a:tr h="310896">
+                <a:tc gridSpan="5">
+                  <a:txBody>
+                    <a:bodyPr/>
+                    <a:lstStyle/>
+                    <a:p>
+                      <a:pPr algn="l" indent="0" marL="0">
+                        <a:buNone/>
+                      </a:pPr>
+                      <a:r>
+                        <a:rPr lang="en-US" sz="1200" b="1" dirty="0">
+                          <a:solidFill>
+                            <a:srgbClr val="D78A27"/>
+                          </a:solidFill>
+                          <a:latin typeface="Calibri" pitchFamily="34" charset="0"/>
+                          <a:ea typeface="Calibri" pitchFamily="34" charset="-122"/>
+                          <a:cs typeface="Calibri" pitchFamily="34" charset="-120"/>
+                        </a:rPr>
+                        <a:t>Iberia</a:t>
+                      </a:r>
+                      <a:endParaRPr lang="en-US" sz="1200" dirty="0">
+                        <a:latin typeface="Calibri" charset="0"/>
+                        <a:ea typeface="Calibri" charset="0"/>
+                        <a:cs typeface="Calibri" charset="0"/>
+                      </a:endParaRPr>
+                    </a:p>
+                  </a:txBody>
+                  <a:tcPr marL="50800" marR="50800" marT="50800" marB="50800" anchor="ctr">
+                    <a:lnL w="12700" cap="flat" cmpd="sng" algn="ctr">
+                      <a:solidFill>
+                        <a:srgbClr val="DCE2E8"/>
+                      </a:solidFill>
+                      <a:prstDash val="solid"/>
+                      <a:round/>
+                      <a:headEnd type="none" w="med" len="med"/>
+                      <a:tailEnd type="none" w="med" len="med"/>
+                    </a:lnL>
+                    <a:lnR w="12700" cap="flat" cmpd="sng" algn="ctr">
+                      <a:solidFill>
+                        <a:srgbClr val="DCE2E8"/>
+                      </a:solidFill>
+                      <a:prstDash val="solid"/>
+                      <a:round/>
+                      <a:headEnd type="none" w="med" len="med"/>
+                      <a:tailEnd type="none" w="med" len="med"/>
+                    </a:lnR>
+                    <a:lnT w="12700" cap="flat" cmpd="sng" algn="ctr">
+                      <a:solidFill>
+                        <a:srgbClr val="DCE2E8"/>
+                      </a:solidFill>
+                      <a:prstDash val="solid"/>
+                      <a:round/>
+                      <a:headEnd type="none" w="med" len="med"/>
+                      <a:tailEnd type="none" w="med" len="med"/>
+                    </a:lnT>
+                    <a:lnB w="12700" cap="flat" cmpd="sng" algn="ctr">
+                      <a:solidFill>
+                        <a:srgbClr val="DCE2E8"/>
+                      </a:solidFill>
+                      <a:prstDash val="solid"/>
+                      <a:round/>
+                      <a:headEnd type="none" w="med" len="med"/>
+                      <a:tailEnd type="none" w="med" len="med"/>
+                    </a:lnB>
+                    <a:solidFill>
+                      <a:srgbClr val="FBF1E0"/>
+                    </a:solidFill>
+                  </a:tcPr>
+                </a:tc>
+                <a:tc hMerge="1">
+                  <a:tcPr/>
+                </a:tc>
+                <a:tc hMerge="1">
+                  <a:tcPr/>
+                </a:tc>
+                <a:tc hMerge="1">
+                  <a:tcPr/>
+                </a:tc>
+                <a:tc hMerge="1">
+                  <a:tcPr/>
+                </a:tc>
+              </a:tr>
+              <a:tr h="329184">
                 <a:tc>
                   <a:txBody>
                     <a:bodyPr/>
@@ -6239,17 +7718,17 @@
                         <a:buNone/>
                       </a:pPr>
                       <a:r>
-                        <a:rPr lang="en-US" sz="1150" b="1" dirty="0">
+                        <a:rPr lang="en-US" sz="1100" b="1" dirty="0">
                           <a:solidFill>
-                            <a:srgbClr val="1F2733"/>
+                            <a:srgbClr val="D78A27"/>
                           </a:solidFill>
                           <a:latin typeface="Calibri" pitchFamily="34" charset="0"/>
                           <a:ea typeface="Calibri" pitchFamily="34" charset="-122"/>
                           <a:cs typeface="Calibri" pitchFamily="34" charset="-120"/>
                         </a:rPr>
-                        <a:t>UK / EN</a:t>
+                        <a:t>[IB_SOC_CAMP_1]</a:t>
                       </a:r>
-                      <a:endParaRPr lang="en-US" sz="1150" dirty="0">
+                      <a:endParaRPr lang="en-US" sz="1100" dirty="0">
                         <a:latin typeface="Calibri" charset="0"/>
                         <a:ea typeface="Calibri" charset="0"/>
                         <a:cs typeface="Calibri" charset="0"/>
@@ -6307,7 +7786,7 @@
                         <a:buNone/>
                       </a:pPr>
                       <a:r>
-                        <a:rPr lang="en-US" sz="1150" b="1" dirty="0">
+                        <a:rPr lang="en-US" sz="1100" b="1" dirty="0">
                           <a:solidFill>
                             <a:srgbClr val="D78A27"/>
                           </a:solidFill>
@@ -6315,9 +7794,9 @@
                           <a:ea typeface="Calibri" pitchFamily="34" charset="-122"/>
                           <a:cs typeface="Calibri" pitchFamily="34" charset="-120"/>
                         </a:rPr>
-                        <a:t>[SOC_SPEND_UK]</a:t>
+                        <a:t>[IB_SOC_SPEND_1]</a:t>
                       </a:r>
-                      <a:endParaRPr lang="en-US" sz="1150" dirty="0">
+                      <a:endParaRPr lang="en-US" sz="1100" dirty="0">
                         <a:latin typeface="Calibri" charset="0"/>
                         <a:ea typeface="Calibri" charset="0"/>
                         <a:cs typeface="Calibri" charset="0"/>
@@ -6375,7 +7854,7 @@
                         <a:buNone/>
                       </a:pPr>
                       <a:r>
-                        <a:rPr lang="en-US" sz="1150" b="1" dirty="0">
+                        <a:rPr lang="en-US" sz="1100" b="1" dirty="0">
                           <a:solidFill>
                             <a:srgbClr val="D78A27"/>
                           </a:solidFill>
@@ -6383,9 +7862,9 @@
                           <a:ea typeface="Calibri" pitchFamily="34" charset="-122"/>
                           <a:cs typeface="Calibri" pitchFamily="34" charset="-120"/>
                         </a:rPr>
-                        <a:t>[SOC_RES_UK]</a:t>
+                        <a:t>[IB_SOC_RES_1]</a:t>
                       </a:r>
-                      <a:endParaRPr lang="en-US" sz="1150" dirty="0">
+                      <a:endParaRPr lang="en-US" sz="1100" dirty="0">
                         <a:latin typeface="Calibri" charset="0"/>
                         <a:ea typeface="Calibri" charset="0"/>
                         <a:cs typeface="Calibri" charset="0"/>
@@ -6443,7 +7922,7 @@
                         <a:buNone/>
                       </a:pPr>
                       <a:r>
-                        <a:rPr lang="en-US" sz="1150" b="1" dirty="0">
+                        <a:rPr lang="en-US" sz="1100" b="1" dirty="0">
                           <a:solidFill>
                             <a:srgbClr val="D78A27"/>
                           </a:solidFill>
@@ -6451,9 +7930,147 @@
                           <a:ea typeface="Calibri" pitchFamily="34" charset="-122"/>
                           <a:cs typeface="Calibri" pitchFamily="34" charset="-120"/>
                         </a:rPr>
-                        <a:t>[SOC_CPR_UK]</a:t>
+                        <a:t>[IB_SOC_CPR_1]</a:t>
                       </a:r>
-                      <a:endParaRPr lang="en-US" sz="1150" dirty="0">
+                      <a:endParaRPr lang="en-US" sz="1100" dirty="0">
+                        <a:latin typeface="Calibri" charset="0"/>
+                        <a:ea typeface="Calibri" charset="0"/>
+                        <a:cs typeface="Calibri" charset="0"/>
+                      </a:endParaRPr>
+                    </a:p>
+                  </a:txBody>
+                  <a:tcPr marL="50800" marR="50800" marT="50800" marB="50800" anchor="ctr">
+                    <a:lnL w="12700" cap="flat" cmpd="sng" algn="ctr">
+                      <a:solidFill>
+                        <a:srgbClr val="DCE2E8"/>
+                      </a:solidFill>
+                      <a:prstDash val="solid"/>
+                      <a:round/>
+                      <a:headEnd type="none" w="med" len="med"/>
+                      <a:tailEnd type="none" w="med" len="med"/>
+                    </a:lnL>
+                    <a:lnR w="12700" cap="flat" cmpd="sng" algn="ctr">
+                      <a:solidFill>
+                        <a:srgbClr val="DCE2E8"/>
+                      </a:solidFill>
+                      <a:prstDash val="solid"/>
+                      <a:round/>
+                      <a:headEnd type="none" w="med" len="med"/>
+                      <a:tailEnd type="none" w="med" len="med"/>
+                    </a:lnR>
+                    <a:lnT w="12700" cap="flat" cmpd="sng" algn="ctr">
+                      <a:solidFill>
+                        <a:srgbClr val="DCE2E8"/>
+                      </a:solidFill>
+                      <a:prstDash val="solid"/>
+                      <a:round/>
+                      <a:headEnd type="none" w="med" len="med"/>
+                      <a:tailEnd type="none" w="med" len="med"/>
+                    </a:lnT>
+                    <a:lnB w="12700" cap="flat" cmpd="sng" algn="ctr">
+                      <a:solidFill>
+                        <a:srgbClr val="DCE2E8"/>
+                      </a:solidFill>
+                      <a:prstDash val="solid"/>
+                      <a:round/>
+                      <a:headEnd type="none" w="med" len="med"/>
+                      <a:tailEnd type="none" w="med" len="med"/>
+                    </a:lnB>
+                    <a:solidFill>
+                      <a:srgbClr val="FFFFFF"/>
+                    </a:solidFill>
+                  </a:tcPr>
+                </a:tc>
+                <a:tc>
+                  <a:txBody>
+                    <a:bodyPr/>
+                    <a:lstStyle/>
+                    <a:p>
+                      <a:pPr algn="l" indent="0" marL="0">
+                        <a:buNone/>
+                      </a:pPr>
+                      <a:r>
+                        <a:rPr lang="en-US" sz="1100" b="1" dirty="0">
+                          <a:solidFill>
+                            <a:srgbClr val="D78A27"/>
+                          </a:solidFill>
+                          <a:latin typeface="Calibri" pitchFamily="34" charset="0"/>
+                          <a:ea typeface="Calibri" pitchFamily="34" charset="-122"/>
+                          <a:cs typeface="Calibri" pitchFamily="34" charset="-120"/>
+                        </a:rPr>
+                        <a:t>[IB_SOC_AUD_1]</a:t>
+                      </a:r>
+                      <a:endParaRPr lang="en-US" sz="1100" dirty="0">
+                        <a:latin typeface="Calibri" charset="0"/>
+                        <a:ea typeface="Calibri" charset="0"/>
+                        <a:cs typeface="Calibri" charset="0"/>
+                      </a:endParaRPr>
+                    </a:p>
+                  </a:txBody>
+                  <a:tcPr marL="50800" marR="50800" marT="50800" marB="50800" anchor="ctr">
+                    <a:lnL w="12700" cap="flat" cmpd="sng" algn="ctr">
+                      <a:solidFill>
+                        <a:srgbClr val="DCE2E8"/>
+                      </a:solidFill>
+                      <a:prstDash val="solid"/>
+                      <a:round/>
+                      <a:headEnd type="none" w="med" len="med"/>
+                      <a:tailEnd type="none" w="med" len="med"/>
+                    </a:lnL>
+                    <a:lnR w="12700" cap="flat" cmpd="sng" algn="ctr">
+                      <a:solidFill>
+                        <a:srgbClr val="DCE2E8"/>
+                      </a:solidFill>
+                      <a:prstDash val="solid"/>
+                      <a:round/>
+                      <a:headEnd type="none" w="med" len="med"/>
+                      <a:tailEnd type="none" w="med" len="med"/>
+                    </a:lnR>
+                    <a:lnT w="12700" cap="flat" cmpd="sng" algn="ctr">
+                      <a:solidFill>
+                        <a:srgbClr val="DCE2E8"/>
+                      </a:solidFill>
+                      <a:prstDash val="solid"/>
+                      <a:round/>
+                      <a:headEnd type="none" w="med" len="med"/>
+                      <a:tailEnd type="none" w="med" len="med"/>
+                    </a:lnT>
+                    <a:lnB w="12700" cap="flat" cmpd="sng" algn="ctr">
+                      <a:solidFill>
+                        <a:srgbClr val="DCE2E8"/>
+                      </a:solidFill>
+                      <a:prstDash val="solid"/>
+                      <a:round/>
+                      <a:headEnd type="none" w="med" len="med"/>
+                      <a:tailEnd type="none" w="med" len="med"/>
+                    </a:lnB>
+                    <a:solidFill>
+                      <a:srgbClr val="FFFFFF"/>
+                    </a:solidFill>
+                  </a:tcPr>
+                </a:tc>
+              </a:tr>
+              <a:tr h="329184">
+                <a:tc>
+                  <a:txBody>
+                    <a:bodyPr/>
+                    <a:lstStyle/>
+                    <a:p>
+                      <a:pPr algn="l" indent="0" marL="0">
+                        <a:buNone/>
+                      </a:pPr>
+                      <a:r>
+                        <a:rPr lang="en-US" sz="1100" b="1" dirty="0">
+                          <a:solidFill>
+                            <a:srgbClr val="D78A27"/>
+                          </a:solidFill>
+                          <a:latin typeface="Calibri" pitchFamily="34" charset="0"/>
+                          <a:ea typeface="Calibri" pitchFamily="34" charset="-122"/>
+                          <a:cs typeface="Calibri" pitchFamily="34" charset="-120"/>
+                        </a:rPr>
+                        <a:t>[IB_SOC_CAMP_2]</a:t>
+                      </a:r>
+                      <a:endParaRPr lang="en-US" sz="1100" dirty="0">
                         <a:latin typeface="Calibri" charset="0"/>
                         <a:ea typeface="Calibri" charset="0"/>
                         <a:cs typeface="Calibri" charset="0"/>
@@ -6511,7 +8128,7 @@
                         <a:buNone/>
                       </a:pPr>
                       <a:r>
-                        <a:rPr lang="en-US" sz="1150" b="1" dirty="0">
+                        <a:rPr lang="en-US" sz="1100" b="1" dirty="0">
                           <a:solidFill>
                             <a:srgbClr val="D78A27"/>
                           </a:solidFill>
@@ -6519,79 +8136,9 @@
                           <a:ea typeface="Calibri" pitchFamily="34" charset="-122"/>
                           <a:cs typeface="Calibri" pitchFamily="34" charset="-120"/>
                         </a:rPr>
-                        <a:t>[SOC_AUD_UK]</a:t>
+                        <a:t>[IB_SOC_SPEND_2]</a:t>
                       </a:r>
-                      <a:endParaRPr lang="en-US" sz="1150" dirty="0">
-                        <a:latin typeface="Calibri" charset="0"/>
-                        <a:ea typeface="Calibri" charset="0"/>
-                        <a:cs typeface="Calibri" charset="0"/>
-                      </a:endParaRPr>
-                    </a:p>
-                  </a:txBody>
-                  <a:tcPr marL="50800" marR="50800" marT="50800" marB="50800" anchor="ctr">
-                    <a:lnL w="12700" cap="flat" cmpd="sng" algn="ctr">
-                      <a:solidFill>
-                        <a:srgbClr val="DCE2E8"/>
-                      </a:solidFill>
-                      <a:prstDash val="solid"/>
-                      <a:round/>
-                      <a:headEnd type="none" w="med" len="med"/>
-                      <a:tailEnd type="none" w="med" len="med"/>
-                    </a:lnL>
-                    <a:lnR w="12700" cap="flat" cmpd="sng" algn="ctr">
-                      <a:solidFill>
-                        <a:srgbClr val="DCE2E8"/>
-                      </a:solidFill>
-                      <a:prstDash val="solid"/>
-                      <a:round/>
-                      <a:headEnd type="none" w="med" len="med"/>
-                      <a:tailEnd type="none" w="med" len="med"/>
-                    </a:lnR>
-                    <a:lnT w="12700" cap="flat" cmpd="sng" algn="ctr">
-                      <a:solidFill>
-                        <a:srgbClr val="DCE2E8"/>
-                      </a:solidFill>
-                      <a:prstDash val="solid"/>
-                      <a:round/>
-                      <a:headEnd type="none" w="med" len="med"/>
-                      <a:tailEnd type="none" w="med" len="med"/>
-                    </a:lnT>
-                    <a:lnB w="12700" cap="flat" cmpd="sng" algn="ctr">
-                      <a:solidFill>
-                        <a:srgbClr val="DCE2E8"/>
-                      </a:solidFill>
-                      <a:prstDash val="solid"/>
-                      <a:round/>
-                      <a:headEnd type="none" w="med" len="med"/>
-                      <a:tailEnd type="none" w="med" len="med"/>
-                    </a:lnB>
-                    <a:solidFill>
-                      <a:srgbClr val="FFFFFF"/>
-                    </a:solidFill>
-                  </a:tcPr>
-                </a:tc>
-              </a:tr>
-              <a:tr h="548640">
-                <a:tc>
-                  <a:txBody>
-                    <a:bodyPr/>
-                    <a:lstStyle/>
-                    <a:p>
-                      <a:pPr algn="l" indent="0" marL="0">
-                        <a:buNone/>
-                      </a:pPr>
-                      <a:r>
-                        <a:rPr lang="en-US" sz="1150" b="1" dirty="0">
-                          <a:solidFill>
-                            <a:srgbClr val="1F2733"/>
-                          </a:solidFill>
-                          <a:latin typeface="Calibri" pitchFamily="34" charset="0"/>
-                          <a:ea typeface="Calibri" pitchFamily="34" charset="-122"/>
-                          <a:cs typeface="Calibri" pitchFamily="34" charset="-120"/>
-                        </a:rPr>
-                        <a:t>Spain</a:t>
-                      </a:r>
-                      <a:endParaRPr lang="en-US" sz="1150" dirty="0">
+                      <a:endParaRPr lang="en-US" sz="1100" dirty="0">
                         <a:latin typeface="Calibri" charset="0"/>
                         <a:ea typeface="Calibri" charset="0"/>
                         <a:cs typeface="Calibri" charset="0"/>
@@ -6649,7 +8196,7 @@
                         <a:buNone/>
                       </a:pPr>
                       <a:r>
-                        <a:rPr lang="en-US" sz="1150" b="1" dirty="0">
+                        <a:rPr lang="en-US" sz="1100" b="1" dirty="0">
                           <a:solidFill>
                             <a:srgbClr val="D78A27"/>
                           </a:solidFill>
@@ -6657,9 +8204,9 @@
                           <a:ea typeface="Calibri" pitchFamily="34" charset="-122"/>
                           <a:cs typeface="Calibri" pitchFamily="34" charset="-120"/>
                         </a:rPr>
-                        <a:t>[SOC_SPEND_ES]</a:t>
+                        <a:t>[IB_SOC_RES_2]</a:t>
                       </a:r>
-                      <a:endParaRPr lang="en-US" sz="1150" dirty="0">
+                      <a:endParaRPr lang="en-US" sz="1100" dirty="0">
                         <a:latin typeface="Calibri" charset="0"/>
                         <a:ea typeface="Calibri" charset="0"/>
                         <a:cs typeface="Calibri" charset="0"/>
@@ -6717,7 +8264,7 @@
                         <a:buNone/>
                       </a:pPr>
                       <a:r>
-                        <a:rPr lang="en-US" sz="1150" b="1" dirty="0">
+                        <a:rPr lang="en-US" sz="1100" b="1" dirty="0">
                           <a:solidFill>
                             <a:srgbClr val="D78A27"/>
                           </a:solidFill>
@@ -6725,9 +8272,147 @@
                           <a:ea typeface="Calibri" pitchFamily="34" charset="-122"/>
                           <a:cs typeface="Calibri" pitchFamily="34" charset="-120"/>
                         </a:rPr>
-                        <a:t>[SOC_RES_ES]</a:t>
+                        <a:t>[IB_SOC_CPR_2]</a:t>
                       </a:r>
-                      <a:endParaRPr lang="en-US" sz="1150" dirty="0">
+                      <a:endParaRPr lang="en-US" sz="1100" dirty="0">
+                        <a:latin typeface="Calibri" charset="0"/>
+                        <a:ea typeface="Calibri" charset="0"/>
+                        <a:cs typeface="Calibri" charset="0"/>
+                      </a:endParaRPr>
+                    </a:p>
+                  </a:txBody>
+                  <a:tcPr marL="50800" marR="50800" marT="50800" marB="50800" anchor="ctr">
+                    <a:lnL w="12700" cap="flat" cmpd="sng" algn="ctr">
+                      <a:solidFill>
+                        <a:srgbClr val="DCE2E8"/>
+                      </a:solidFill>
+                      <a:prstDash val="solid"/>
+                      <a:round/>
+                      <a:headEnd type="none" w="med" len="med"/>
+                      <a:tailEnd type="none" w="med" len="med"/>
+                    </a:lnL>
+                    <a:lnR w="12700" cap="flat" cmpd="sng" algn="ctr">
+                      <a:solidFill>
+                        <a:srgbClr val="DCE2E8"/>
+                      </a:solidFill>
+                      <a:prstDash val="solid"/>
+                      <a:round/>
+                      <a:headEnd type="none" w="med" len="med"/>
+                      <a:tailEnd type="none" w="med" len="med"/>
+                    </a:lnR>
+                    <a:lnT w="12700" cap="flat" cmpd="sng" algn="ctr">
+                      <a:solidFill>
+                        <a:srgbClr val="DCE2E8"/>
+                      </a:solidFill>
+                      <a:prstDash val="solid"/>
+                      <a:round/>
+                      <a:headEnd type="none" w="med" len="med"/>
+                      <a:tailEnd type="none" w="med" len="med"/>
+                    </a:lnT>
+                    <a:lnB w="12700" cap="flat" cmpd="sng" algn="ctr">
+                      <a:solidFill>
+                        <a:srgbClr val="DCE2E8"/>
+                      </a:solidFill>
+                      <a:prstDash val="solid"/>
+                      <a:round/>
+                      <a:headEnd type="none" w="med" len="med"/>
+                      <a:tailEnd type="none" w="med" len="med"/>
+                    </a:lnB>
+                    <a:solidFill>
+                      <a:srgbClr val="FFFFFF"/>
+                    </a:solidFill>
+                  </a:tcPr>
+                </a:tc>
+                <a:tc>
+                  <a:txBody>
+                    <a:bodyPr/>
+                    <a:lstStyle/>
+                    <a:p>
+                      <a:pPr algn="l" indent="0" marL="0">
+                        <a:buNone/>
+                      </a:pPr>
+                      <a:r>
+                        <a:rPr lang="en-US" sz="1100" b="1" dirty="0">
+                          <a:solidFill>
+                            <a:srgbClr val="D78A27"/>
+                          </a:solidFill>
+                          <a:latin typeface="Calibri" pitchFamily="34" charset="0"/>
+                          <a:ea typeface="Calibri" pitchFamily="34" charset="-122"/>
+                          <a:cs typeface="Calibri" pitchFamily="34" charset="-120"/>
+                        </a:rPr>
+                        <a:t>[IB_SOC_AUD_2]</a:t>
+                      </a:r>
+                      <a:endParaRPr lang="en-US" sz="1100" dirty="0">
+                        <a:latin typeface="Calibri" charset="0"/>
+                        <a:ea typeface="Calibri" charset="0"/>
+                        <a:cs typeface="Calibri" charset="0"/>
+                      </a:endParaRPr>
+                    </a:p>
+                  </a:txBody>
+                  <a:tcPr marL="50800" marR="50800" marT="50800" marB="50800" anchor="ctr">
+                    <a:lnL w="12700" cap="flat" cmpd="sng" algn="ctr">
+                      <a:solidFill>
+                        <a:srgbClr val="DCE2E8"/>
+                      </a:solidFill>
+                      <a:prstDash val="solid"/>
+                      <a:round/>
+                      <a:headEnd type="none" w="med" len="med"/>
+                      <a:tailEnd type="none" w="med" len="med"/>
+                    </a:lnL>
+                    <a:lnR w="12700" cap="flat" cmpd="sng" algn="ctr">
+                      <a:solidFill>
+                        <a:srgbClr val="DCE2E8"/>
+                      </a:solidFill>
+                      <a:prstDash val="solid"/>
+                      <a:round/>
+                      <a:headEnd type="none" w="med" len="med"/>
+                      <a:tailEnd type="none" w="med" len="med"/>
+                    </a:lnR>
+                    <a:lnT w="12700" cap="flat" cmpd="sng" algn="ctr">
+                      <a:solidFill>
+                        <a:srgbClr val="DCE2E8"/>
+                      </a:solidFill>
+                      <a:prstDash val="solid"/>
+                      <a:round/>
+                      <a:headEnd type="none" w="med" len="med"/>
+                      <a:tailEnd type="none" w="med" len="med"/>
+                    </a:lnT>
+                    <a:lnB w="12700" cap="flat" cmpd="sng" algn="ctr">
+                      <a:solidFill>
+                        <a:srgbClr val="DCE2E8"/>
+                      </a:solidFill>
+                      <a:prstDash val="solid"/>
+                      <a:round/>
+                      <a:headEnd type="none" w="med" len="med"/>
+                      <a:tailEnd type="none" w="med" len="med"/>
+                    </a:lnB>
+                    <a:solidFill>
+                      <a:srgbClr val="FFFFFF"/>
+                    </a:solidFill>
+                  </a:tcPr>
+                </a:tc>
+              </a:tr>
+              <a:tr h="329184">
+                <a:tc>
+                  <a:txBody>
+                    <a:bodyPr/>
+                    <a:lstStyle/>
+                    <a:p>
+                      <a:pPr algn="l" indent="0" marL="0">
+                        <a:buNone/>
+                      </a:pPr>
+                      <a:r>
+                        <a:rPr lang="en-US" sz="1100" b="1" dirty="0">
+                          <a:solidFill>
+                            <a:srgbClr val="D78A27"/>
+                          </a:solidFill>
+                          <a:latin typeface="Calibri" pitchFamily="34" charset="0"/>
+                          <a:ea typeface="Calibri" pitchFamily="34" charset="-122"/>
+                          <a:cs typeface="Calibri" pitchFamily="34" charset="-120"/>
+                        </a:rPr>
+                        <a:t>[IB_SOC_CAMP_3]</a:t>
+                      </a:r>
+                      <a:endParaRPr lang="en-US" sz="1100" dirty="0">
                         <a:latin typeface="Calibri" charset="0"/>
                         <a:ea typeface="Calibri" charset="0"/>
                         <a:cs typeface="Calibri" charset="0"/>
@@ -6785,7 +8470,7 @@
                         <a:buNone/>
                       </a:pPr>
                       <a:r>
-                        <a:rPr lang="en-US" sz="1150" b="1" dirty="0">
+                        <a:rPr lang="en-US" sz="1100" b="1" dirty="0">
                           <a:solidFill>
                             <a:srgbClr val="D78A27"/>
                           </a:solidFill>
@@ -6793,9 +8478,9 @@
                           <a:ea typeface="Calibri" pitchFamily="34" charset="-122"/>
                           <a:cs typeface="Calibri" pitchFamily="34" charset="-120"/>
                         </a:rPr>
-                        <a:t>[SOC_CPR_ES]</a:t>
+                        <a:t>[IB_SOC_SPEND_3]</a:t>
                       </a:r>
-                      <a:endParaRPr lang="en-US" sz="1150" dirty="0">
+                      <a:endParaRPr lang="en-US" sz="1100" dirty="0">
                         <a:latin typeface="Calibri" charset="0"/>
                         <a:ea typeface="Calibri" charset="0"/>
                         <a:cs typeface="Calibri" charset="0"/>
@@ -6853,7 +8538,7 @@
                         <a:buNone/>
                       </a:pPr>
                       <a:r>
-                        <a:rPr lang="en-US" sz="1150" b="1" dirty="0">
+                        <a:rPr lang="en-US" sz="1100" b="1" dirty="0">
                           <a:solidFill>
                             <a:srgbClr val="D78A27"/>
                           </a:solidFill>
@@ -6861,79 +8546,9 @@
                           <a:ea typeface="Calibri" pitchFamily="34" charset="-122"/>
                           <a:cs typeface="Calibri" pitchFamily="34" charset="-120"/>
                         </a:rPr>
-                        <a:t>[SOC_AUD_ES]</a:t>
+                        <a:t>[IB_SOC_RES_3]</a:t>
                       </a:r>
-                      <a:endParaRPr lang="en-US" sz="1150" dirty="0">
-                        <a:latin typeface="Calibri" charset="0"/>
-                        <a:ea typeface="Calibri" charset="0"/>
-                        <a:cs typeface="Calibri" charset="0"/>
-                      </a:endParaRPr>
-                    </a:p>
-                  </a:txBody>
-                  <a:tcPr marL="50800" marR="50800" marT="50800" marB="50800" anchor="ctr">
-                    <a:lnL w="12700" cap="flat" cmpd="sng" algn="ctr">
-                      <a:solidFill>
-                        <a:srgbClr val="DCE2E8"/>
-                      </a:solidFill>
-                      <a:prstDash val="solid"/>
-                      <a:round/>
-                      <a:headEnd type="none" w="med" len="med"/>
-                      <a:tailEnd type="none" w="med" len="med"/>
-                    </a:lnL>
-                    <a:lnR w="12700" cap="flat" cmpd="sng" algn="ctr">
-                      <a:solidFill>
-                        <a:srgbClr val="DCE2E8"/>
-                      </a:solidFill>
-                      <a:prstDash val="solid"/>
-                      <a:round/>
-                      <a:headEnd type="none" w="med" len="med"/>
-                      <a:tailEnd type="none" w="med" len="med"/>
-                    </a:lnR>
-                    <a:lnT w="12700" cap="flat" cmpd="sng" algn="ctr">
-                      <a:solidFill>
-                        <a:srgbClr val="DCE2E8"/>
-                      </a:solidFill>
-                      <a:prstDash val="solid"/>
-                      <a:round/>
-                      <a:headEnd type="none" w="med" len="med"/>
-                      <a:tailEnd type="none" w="med" len="med"/>
-                    </a:lnT>
-                    <a:lnB w="12700" cap="flat" cmpd="sng" algn="ctr">
-                      <a:solidFill>
-                        <a:srgbClr val="DCE2E8"/>
-                      </a:solidFill>
-                      <a:prstDash val="solid"/>
-                      <a:round/>
-                      <a:headEnd type="none" w="med" len="med"/>
-                      <a:tailEnd type="none" w="med" len="med"/>
-                    </a:lnB>
-                    <a:solidFill>
-                      <a:srgbClr val="FFFFFF"/>
-                    </a:solidFill>
-                  </a:tcPr>
-                </a:tc>
-              </a:tr>
-              <a:tr h="548640">
-                <a:tc>
-                  <a:txBody>
-                    <a:bodyPr/>
-                    <a:lstStyle/>
-                    <a:p>
-                      <a:pPr algn="l" indent="0" marL="0">
-                        <a:buNone/>
-                      </a:pPr>
-                      <a:r>
-                        <a:rPr lang="en-US" sz="1150" b="1" dirty="0">
-                          <a:solidFill>
-                            <a:srgbClr val="1F2733"/>
-                          </a:solidFill>
-                          <a:latin typeface="Calibri" pitchFamily="34" charset="0"/>
-                          <a:ea typeface="Calibri" pitchFamily="34" charset="-122"/>
-                          <a:cs typeface="Calibri" pitchFamily="34" charset="-120"/>
-                        </a:rPr>
-                        <a:t>France</a:t>
-                      </a:r>
-                      <a:endParaRPr lang="en-US" sz="1150" dirty="0">
+                      <a:endParaRPr lang="en-US" sz="1100" dirty="0">
                         <a:latin typeface="Calibri" charset="0"/>
                         <a:ea typeface="Calibri" charset="0"/>
                         <a:cs typeface="Calibri" charset="0"/>
@@ -6991,7 +8606,7 @@
                         <a:buNone/>
                       </a:pPr>
                       <a:r>
-                        <a:rPr lang="en-US" sz="1150" b="1" dirty="0">
+                        <a:rPr lang="en-US" sz="1100" b="1" dirty="0">
                           <a:solidFill>
                             <a:srgbClr val="D78A27"/>
                           </a:solidFill>
@@ -6999,9 +8614,229 @@
                           <a:ea typeface="Calibri" pitchFamily="34" charset="-122"/>
                           <a:cs typeface="Calibri" pitchFamily="34" charset="-120"/>
                         </a:rPr>
-                        <a:t>[SOC_SPEND_FR]</a:t>
+                        <a:t>[IB_SOC_CPR_3]</a:t>
                       </a:r>
-                      <a:endParaRPr lang="en-US" sz="1150" dirty="0">
+                      <a:endParaRPr lang="en-US" sz="1100" dirty="0">
+                        <a:latin typeface="Calibri" charset="0"/>
+                        <a:ea typeface="Calibri" charset="0"/>
+                        <a:cs typeface="Calibri" charset="0"/>
+                      </a:endParaRPr>
+                    </a:p>
+                  </a:txBody>
+                  <a:tcPr marL="50800" marR="50800" marT="50800" marB="50800" anchor="ctr">
+                    <a:lnL w="12700" cap="flat" cmpd="sng" algn="ctr">
+                      <a:solidFill>
+                        <a:srgbClr val="DCE2E8"/>
+                      </a:solidFill>
+                      <a:prstDash val="solid"/>
+                      <a:round/>
+                      <a:headEnd type="none" w="med" len="med"/>
+                      <a:tailEnd type="none" w="med" len="med"/>
+                    </a:lnL>
+                    <a:lnR w="12700" cap="flat" cmpd="sng" algn="ctr">
+                      <a:solidFill>
+                        <a:srgbClr val="DCE2E8"/>
+                      </a:solidFill>
+                      <a:prstDash val="solid"/>
+                      <a:round/>
+                      <a:headEnd type="none" w="med" len="med"/>
+                      <a:tailEnd type="none" w="med" len="med"/>
+                    </a:lnR>
+                    <a:lnT w="12700" cap="flat" cmpd="sng" algn="ctr">
+                      <a:solidFill>
+                        <a:srgbClr val="DCE2E8"/>
+                      </a:solidFill>
+                      <a:prstDash val="solid"/>
+                      <a:round/>
+                      <a:headEnd type="none" w="med" len="med"/>
+                      <a:tailEnd type="none" w="med" len="med"/>
+                    </a:lnT>
+                    <a:lnB w="12700" cap="flat" cmpd="sng" algn="ctr">
+                      <a:solidFill>
+                        <a:srgbClr val="DCE2E8"/>
+                      </a:solidFill>
+                      <a:prstDash val="solid"/>
+                      <a:round/>
+                      <a:headEnd type="none" w="med" len="med"/>
+                      <a:tailEnd type="none" w="med" len="med"/>
+                    </a:lnB>
+                    <a:solidFill>
+                      <a:srgbClr val="FFFFFF"/>
+                    </a:solidFill>
+                  </a:tcPr>
+                </a:tc>
+                <a:tc>
+                  <a:txBody>
+                    <a:bodyPr/>
+                    <a:lstStyle/>
+                    <a:p>
+                      <a:pPr algn="l" indent="0" marL="0">
+                        <a:buNone/>
+                      </a:pPr>
+                      <a:r>
+                        <a:rPr lang="en-US" sz="1100" b="1" dirty="0">
+                          <a:solidFill>
+                            <a:srgbClr val="D78A27"/>
+                          </a:solidFill>
+                          <a:latin typeface="Calibri" pitchFamily="34" charset="0"/>
+                          <a:ea typeface="Calibri" pitchFamily="34" charset="-122"/>
+                          <a:cs typeface="Calibri" pitchFamily="34" charset="-120"/>
+                        </a:rPr>
+                        <a:t>[IB_SOC_AUD_3]</a:t>
+                      </a:r>
+                      <a:endParaRPr lang="en-US" sz="1100" dirty="0">
+                        <a:latin typeface="Calibri" charset="0"/>
+                        <a:ea typeface="Calibri" charset="0"/>
+                        <a:cs typeface="Calibri" charset="0"/>
+                      </a:endParaRPr>
+                    </a:p>
+                  </a:txBody>
+                  <a:tcPr marL="50800" marR="50800" marT="50800" marB="50800" anchor="ctr">
+                    <a:lnL w="12700" cap="flat" cmpd="sng" algn="ctr">
+                      <a:solidFill>
+                        <a:srgbClr val="DCE2E8"/>
+                      </a:solidFill>
+                      <a:prstDash val="solid"/>
+                      <a:round/>
+                      <a:headEnd type="none" w="med" len="med"/>
+                      <a:tailEnd type="none" w="med" len="med"/>
+                    </a:lnL>
+                    <a:lnR w="12700" cap="flat" cmpd="sng" algn="ctr">
+                      <a:solidFill>
+                        <a:srgbClr val="DCE2E8"/>
+                      </a:solidFill>
+                      <a:prstDash val="solid"/>
+                      <a:round/>
+                      <a:headEnd type="none" w="med" len="med"/>
+                      <a:tailEnd type="none" w="med" len="med"/>
+                    </a:lnR>
+                    <a:lnT w="12700" cap="flat" cmpd="sng" algn="ctr">
+                      <a:solidFill>
+                        <a:srgbClr val="DCE2E8"/>
+                      </a:solidFill>
+                      <a:prstDash val="solid"/>
+                      <a:round/>
+                      <a:headEnd type="none" w="med" len="med"/>
+                      <a:tailEnd type="none" w="med" len="med"/>
+                    </a:lnT>
+                    <a:lnB w="12700" cap="flat" cmpd="sng" algn="ctr">
+                      <a:solidFill>
+                        <a:srgbClr val="DCE2E8"/>
+                      </a:solidFill>
+                      <a:prstDash val="solid"/>
+                      <a:round/>
+                      <a:headEnd type="none" w="med" len="med"/>
+                      <a:tailEnd type="none" w="med" len="med"/>
+                    </a:lnB>
+                    <a:solidFill>
+                      <a:srgbClr val="FFFFFF"/>
+                    </a:solidFill>
+                  </a:tcPr>
+                </a:tc>
+              </a:tr>
+              <a:tr h="310896">
+                <a:tc gridSpan="5">
+                  <a:txBody>
+                    <a:bodyPr/>
+                    <a:lstStyle/>
+                    <a:p>
+                      <a:pPr algn="l" indent="0" marL="0">
+                        <a:buNone/>
+                      </a:pPr>
+                      <a:r>
+                        <a:rPr lang="en-US" sz="1200" b="1" dirty="0">
+                          <a:solidFill>
+                            <a:srgbClr val="D78A27"/>
+                          </a:solidFill>
+                          <a:latin typeface="Calibri" pitchFamily="34" charset="0"/>
+                          <a:ea typeface="Calibri" pitchFamily="34" charset="-122"/>
+                          <a:cs typeface="Calibri" pitchFamily="34" charset="-120"/>
+                        </a:rPr>
+                        <a:t>UK</a:t>
+                      </a:r>
+                      <a:endParaRPr lang="en-US" sz="1200" dirty="0">
+                        <a:latin typeface="Calibri" charset="0"/>
+                        <a:ea typeface="Calibri" charset="0"/>
+                        <a:cs typeface="Calibri" charset="0"/>
+                      </a:endParaRPr>
+                    </a:p>
+                  </a:txBody>
+                  <a:tcPr marL="50800" marR="50800" marT="50800" marB="50800" anchor="ctr">
+                    <a:lnL w="12700" cap="flat" cmpd="sng" algn="ctr">
+                      <a:solidFill>
+                        <a:srgbClr val="DCE2E8"/>
+                      </a:solidFill>
+                      <a:prstDash val="solid"/>
+                      <a:round/>
+                      <a:headEnd type="none" w="med" len="med"/>
+                      <a:tailEnd type="none" w="med" len="med"/>
+                    </a:lnL>
+                    <a:lnR w="12700" cap="flat" cmpd="sng" algn="ctr">
+                      <a:solidFill>
+                        <a:srgbClr val="DCE2E8"/>
+                      </a:solidFill>
+                      <a:prstDash val="solid"/>
+                      <a:round/>
+                      <a:headEnd type="none" w="med" len="med"/>
+                      <a:tailEnd type="none" w="med" len="med"/>
+                    </a:lnR>
+                    <a:lnT w="12700" cap="flat" cmpd="sng" algn="ctr">
+                      <a:solidFill>
+                        <a:srgbClr val="DCE2E8"/>
+                      </a:solidFill>
+                      <a:prstDash val="solid"/>
+                      <a:round/>
+                      <a:headEnd type="none" w="med" len="med"/>
+                      <a:tailEnd type="none" w="med" len="med"/>
+                    </a:lnT>
+                    <a:lnB w="12700" cap="flat" cmpd="sng" algn="ctr">
+                      <a:solidFill>
+                        <a:srgbClr val="DCE2E8"/>
+                      </a:solidFill>
+                      <a:prstDash val="solid"/>
+                      <a:round/>
+                      <a:headEnd type="none" w="med" len="med"/>
+                      <a:tailEnd type="none" w="med" len="med"/>
+                    </a:lnB>
+                    <a:solidFill>
+                      <a:srgbClr val="FBF1E0"/>
+                    </a:solidFill>
+                  </a:tcPr>
+                </a:tc>
+                <a:tc hMerge="1">
+                  <a:tcPr/>
+                </a:tc>
+                <a:tc hMerge="1">
+                  <a:tcPr/>
+                </a:tc>
+                <a:tc hMerge="1">
+                  <a:tcPr/>
+                </a:tc>
+                <a:tc hMerge="1">
+                  <a:tcPr/>
+                </a:tc>
+              </a:tr>
+              <a:tr h="329184">
+                <a:tc>
+                  <a:txBody>
+                    <a:bodyPr/>
+                    <a:lstStyle/>
+                    <a:p>
+                      <a:pPr algn="l" indent="0" marL="0">
+                        <a:buNone/>
+                      </a:pPr>
+                      <a:r>
+                        <a:rPr lang="en-US" sz="1100" b="1" dirty="0">
+                          <a:solidFill>
+                            <a:srgbClr val="D78A27"/>
+                          </a:solidFill>
+                          <a:latin typeface="Calibri" pitchFamily="34" charset="0"/>
+                          <a:ea typeface="Calibri" pitchFamily="34" charset="-122"/>
+                          <a:cs typeface="Calibri" pitchFamily="34" charset="-120"/>
+                        </a:rPr>
+                        <a:t>[UK_SOC_CAMP_1]</a:t>
+                      </a:r>
+                      <a:endParaRPr lang="en-US" sz="1100" dirty="0">
                         <a:latin typeface="Calibri" charset="0"/>
                         <a:ea typeface="Calibri" charset="0"/>
                         <a:cs typeface="Calibri" charset="0"/>
@@ -7059,7 +8894,7 @@
                         <a:buNone/>
                       </a:pPr>
                       <a:r>
-                        <a:rPr lang="en-US" sz="1150" b="1" dirty="0">
+                        <a:rPr lang="en-US" sz="1100" b="1" dirty="0">
                           <a:solidFill>
                             <a:srgbClr val="D78A27"/>
                           </a:solidFill>
@@ -7067,9 +8902,9 @@
                           <a:ea typeface="Calibri" pitchFamily="34" charset="-122"/>
                           <a:cs typeface="Calibri" pitchFamily="34" charset="-120"/>
                         </a:rPr>
-                        <a:t>[SOC_RES_FR]</a:t>
+                        <a:t>[UK_SOC_SPEND_1]</a:t>
                       </a:r>
-                      <a:endParaRPr lang="en-US" sz="1150" dirty="0">
+                      <a:endParaRPr lang="en-US" sz="1100" dirty="0">
                         <a:latin typeface="Calibri" charset="0"/>
                         <a:ea typeface="Calibri" charset="0"/>
                         <a:cs typeface="Calibri" charset="0"/>
@@ -7127,7 +8962,7 @@
                         <a:buNone/>
                       </a:pPr>
                       <a:r>
-                        <a:rPr lang="en-US" sz="1150" b="1" dirty="0">
+                        <a:rPr lang="en-US" sz="1100" b="1" dirty="0">
                           <a:solidFill>
                             <a:srgbClr val="D78A27"/>
                           </a:solidFill>
@@ -7135,9 +8970,9 @@
                           <a:ea typeface="Calibri" pitchFamily="34" charset="-122"/>
                           <a:cs typeface="Calibri" pitchFamily="34" charset="-120"/>
                         </a:rPr>
-                        <a:t>[SOC_CPR_FR]</a:t>
+                        <a:t>[UK_SOC_RES_1]</a:t>
                       </a:r>
-                      <a:endParaRPr lang="en-US" sz="1150" dirty="0">
+                      <a:endParaRPr lang="en-US" sz="1100" dirty="0">
                         <a:latin typeface="Calibri" charset="0"/>
                         <a:ea typeface="Calibri" charset="0"/>
                         <a:cs typeface="Calibri" charset="0"/>
@@ -7195,7 +9030,7 @@
                         <a:buNone/>
                       </a:pPr>
                       <a:r>
-                        <a:rPr lang="en-US" sz="1150" b="1" dirty="0">
+                        <a:rPr lang="en-US" sz="1100" b="1" dirty="0">
                           <a:solidFill>
                             <a:srgbClr val="D78A27"/>
                           </a:solidFill>
@@ -7203,9 +9038,1869 @@
                           <a:ea typeface="Calibri" pitchFamily="34" charset="-122"/>
                           <a:cs typeface="Calibri" pitchFamily="34" charset="-120"/>
                         </a:rPr>
-                        <a:t>[SOC_AUD_FR]</a:t>
+                        <a:t>[UK_SOC_CPR_1]</a:t>
                       </a:r>
-                      <a:endParaRPr lang="en-US" sz="1150" dirty="0">
+                      <a:endParaRPr lang="en-US" sz="1100" dirty="0">
+                        <a:latin typeface="Calibri" charset="0"/>
+                        <a:ea typeface="Calibri" charset="0"/>
+                        <a:cs typeface="Calibri" charset="0"/>
+                      </a:endParaRPr>
+                    </a:p>
+                  </a:txBody>
+                  <a:tcPr marL="50800" marR="50800" marT="50800" marB="50800" anchor="ctr">
+                    <a:lnL w="12700" cap="flat" cmpd="sng" algn="ctr">
+                      <a:solidFill>
+                        <a:srgbClr val="DCE2E8"/>
+                      </a:solidFill>
+                      <a:prstDash val="solid"/>
+                      <a:round/>
+                      <a:headEnd type="none" w="med" len="med"/>
+                      <a:tailEnd type="none" w="med" len="med"/>
+                    </a:lnL>
+                    <a:lnR w="12700" cap="flat" cmpd="sng" algn="ctr">
+                      <a:solidFill>
+                        <a:srgbClr val="DCE2E8"/>
+                      </a:solidFill>
+                      <a:prstDash val="solid"/>
+                      <a:round/>
+                      <a:headEnd type="none" w="med" len="med"/>
+                      <a:tailEnd type="none" w="med" len="med"/>
+                    </a:lnR>
+                    <a:lnT w="12700" cap="flat" cmpd="sng" algn="ctr">
+                      <a:solidFill>
+                        <a:srgbClr val="DCE2E8"/>
+                      </a:solidFill>
+                      <a:prstDash val="solid"/>
+                      <a:round/>
+                      <a:headEnd type="none" w="med" len="med"/>
+                      <a:tailEnd type="none" w="med" len="med"/>
+                    </a:lnT>
+                    <a:lnB w="12700" cap="flat" cmpd="sng" algn="ctr">
+                      <a:solidFill>
+                        <a:srgbClr val="DCE2E8"/>
+                      </a:solidFill>
+                      <a:prstDash val="solid"/>
+                      <a:round/>
+                      <a:headEnd type="none" w="med" len="med"/>
+                      <a:tailEnd type="none" w="med" len="med"/>
+                    </a:lnB>
+                    <a:solidFill>
+                      <a:srgbClr val="FFFFFF"/>
+                    </a:solidFill>
+                  </a:tcPr>
+                </a:tc>
+                <a:tc>
+                  <a:txBody>
+                    <a:bodyPr/>
+                    <a:lstStyle/>
+                    <a:p>
+                      <a:pPr algn="l" indent="0" marL="0">
+                        <a:buNone/>
+                      </a:pPr>
+                      <a:r>
+                        <a:rPr lang="en-US" sz="1100" b="1" dirty="0">
+                          <a:solidFill>
+                            <a:srgbClr val="D78A27"/>
+                          </a:solidFill>
+                          <a:latin typeface="Calibri" pitchFamily="34" charset="0"/>
+                          <a:ea typeface="Calibri" pitchFamily="34" charset="-122"/>
+                          <a:cs typeface="Calibri" pitchFamily="34" charset="-120"/>
+                        </a:rPr>
+                        <a:t>[UK_SOC_AUD_1]</a:t>
+                      </a:r>
+                      <a:endParaRPr lang="en-US" sz="1100" dirty="0">
+                        <a:latin typeface="Calibri" charset="0"/>
+                        <a:ea typeface="Calibri" charset="0"/>
+                        <a:cs typeface="Calibri" charset="0"/>
+                      </a:endParaRPr>
+                    </a:p>
+                  </a:txBody>
+                  <a:tcPr marL="50800" marR="50800" marT="50800" marB="50800" anchor="ctr">
+                    <a:lnL w="12700" cap="flat" cmpd="sng" algn="ctr">
+                      <a:solidFill>
+                        <a:srgbClr val="DCE2E8"/>
+                      </a:solidFill>
+                      <a:prstDash val="solid"/>
+                      <a:round/>
+                      <a:headEnd type="none" w="med" len="med"/>
+                      <a:tailEnd type="none" w="med" len="med"/>
+                    </a:lnL>
+                    <a:lnR w="12700" cap="flat" cmpd="sng" algn="ctr">
+                      <a:solidFill>
+                        <a:srgbClr val="DCE2E8"/>
+                      </a:solidFill>
+                      <a:prstDash val="solid"/>
+                      <a:round/>
+                      <a:headEnd type="none" w="med" len="med"/>
+                      <a:tailEnd type="none" w="med" len="med"/>
+                    </a:lnR>
+                    <a:lnT w="12700" cap="flat" cmpd="sng" algn="ctr">
+                      <a:solidFill>
+                        <a:srgbClr val="DCE2E8"/>
+                      </a:solidFill>
+                      <a:prstDash val="solid"/>
+                      <a:round/>
+                      <a:headEnd type="none" w="med" len="med"/>
+                      <a:tailEnd type="none" w="med" len="med"/>
+                    </a:lnT>
+                    <a:lnB w="12700" cap="flat" cmpd="sng" algn="ctr">
+                      <a:solidFill>
+                        <a:srgbClr val="DCE2E8"/>
+                      </a:solidFill>
+                      <a:prstDash val="solid"/>
+                      <a:round/>
+                      <a:headEnd type="none" w="med" len="med"/>
+                      <a:tailEnd type="none" w="med" len="med"/>
+                    </a:lnB>
+                    <a:solidFill>
+                      <a:srgbClr val="FFFFFF"/>
+                    </a:solidFill>
+                  </a:tcPr>
+                </a:tc>
+              </a:tr>
+              <a:tr h="329184">
+                <a:tc>
+                  <a:txBody>
+                    <a:bodyPr/>
+                    <a:lstStyle/>
+                    <a:p>
+                      <a:pPr algn="l" indent="0" marL="0">
+                        <a:buNone/>
+                      </a:pPr>
+                      <a:r>
+                        <a:rPr lang="en-US" sz="1100" b="1" dirty="0">
+                          <a:solidFill>
+                            <a:srgbClr val="D78A27"/>
+                          </a:solidFill>
+                          <a:latin typeface="Calibri" pitchFamily="34" charset="0"/>
+                          <a:ea typeface="Calibri" pitchFamily="34" charset="-122"/>
+                          <a:cs typeface="Calibri" pitchFamily="34" charset="-120"/>
+                        </a:rPr>
+                        <a:t>[UK_SOC_CAMP_2]</a:t>
+                      </a:r>
+                      <a:endParaRPr lang="en-US" sz="1100" dirty="0">
+                        <a:latin typeface="Calibri" charset="0"/>
+                        <a:ea typeface="Calibri" charset="0"/>
+                        <a:cs typeface="Calibri" charset="0"/>
+                      </a:endParaRPr>
+                    </a:p>
+                  </a:txBody>
+                  <a:tcPr marL="50800" marR="50800" marT="50800" marB="50800" anchor="ctr">
+                    <a:lnL w="12700" cap="flat" cmpd="sng" algn="ctr">
+                      <a:solidFill>
+                        <a:srgbClr val="DCE2E8"/>
+                      </a:solidFill>
+                      <a:prstDash val="solid"/>
+                      <a:round/>
+                      <a:headEnd type="none" w="med" len="med"/>
+                      <a:tailEnd type="none" w="med" len="med"/>
+                    </a:lnL>
+                    <a:lnR w="12700" cap="flat" cmpd="sng" algn="ctr">
+                      <a:solidFill>
+                        <a:srgbClr val="DCE2E8"/>
+                      </a:solidFill>
+                      <a:prstDash val="solid"/>
+                      <a:round/>
+                      <a:headEnd type="none" w="med" len="med"/>
+                      <a:tailEnd type="none" w="med" len="med"/>
+                    </a:lnR>
+                    <a:lnT w="12700" cap="flat" cmpd="sng" algn="ctr">
+                      <a:solidFill>
+                        <a:srgbClr val="DCE2E8"/>
+                      </a:solidFill>
+                      <a:prstDash val="solid"/>
+                      <a:round/>
+                      <a:headEnd type="none" w="med" len="med"/>
+                      <a:tailEnd type="none" w="med" len="med"/>
+                    </a:lnT>
+                    <a:lnB w="12700" cap="flat" cmpd="sng" algn="ctr">
+                      <a:solidFill>
+                        <a:srgbClr val="DCE2E8"/>
+                      </a:solidFill>
+                      <a:prstDash val="solid"/>
+                      <a:round/>
+                      <a:headEnd type="none" w="med" len="med"/>
+                      <a:tailEnd type="none" w="med" len="med"/>
+                    </a:lnB>
+                    <a:solidFill>
+                      <a:srgbClr val="FFFFFF"/>
+                    </a:solidFill>
+                  </a:tcPr>
+                </a:tc>
+                <a:tc>
+                  <a:txBody>
+                    <a:bodyPr/>
+                    <a:lstStyle/>
+                    <a:p>
+                      <a:pPr algn="ctr" indent="0" marL="0">
+                        <a:buNone/>
+                      </a:pPr>
+                      <a:r>
+                        <a:rPr lang="en-US" sz="1100" b="1" dirty="0">
+                          <a:solidFill>
+                            <a:srgbClr val="D78A27"/>
+                          </a:solidFill>
+                          <a:latin typeface="Calibri" pitchFamily="34" charset="0"/>
+                          <a:ea typeface="Calibri" pitchFamily="34" charset="-122"/>
+                          <a:cs typeface="Calibri" pitchFamily="34" charset="-120"/>
+                        </a:rPr>
+                        <a:t>[UK_SOC_SPEND_2]</a:t>
+                      </a:r>
+                      <a:endParaRPr lang="en-US" sz="1100" dirty="0">
+                        <a:latin typeface="Calibri" charset="0"/>
+                        <a:ea typeface="Calibri" charset="0"/>
+                        <a:cs typeface="Calibri" charset="0"/>
+                      </a:endParaRPr>
+                    </a:p>
+                  </a:txBody>
+                  <a:tcPr marL="50800" marR="50800" marT="50800" marB="50800" anchor="ctr">
+                    <a:lnL w="12700" cap="flat" cmpd="sng" algn="ctr">
+                      <a:solidFill>
+                        <a:srgbClr val="DCE2E8"/>
+                      </a:solidFill>
+                      <a:prstDash val="solid"/>
+                      <a:round/>
+                      <a:headEnd type="none" w="med" len="med"/>
+                      <a:tailEnd type="none" w="med" len="med"/>
+                    </a:lnL>
+                    <a:lnR w="12700" cap="flat" cmpd="sng" algn="ctr">
+                      <a:solidFill>
+                        <a:srgbClr val="DCE2E8"/>
+                      </a:solidFill>
+                      <a:prstDash val="solid"/>
+                      <a:round/>
+                      <a:headEnd type="none" w="med" len="med"/>
+                      <a:tailEnd type="none" w="med" len="med"/>
+                    </a:lnR>
+                    <a:lnT w="12700" cap="flat" cmpd="sng" algn="ctr">
+                      <a:solidFill>
+                        <a:srgbClr val="DCE2E8"/>
+                      </a:solidFill>
+                      <a:prstDash val="solid"/>
+                      <a:round/>
+                      <a:headEnd type="none" w="med" len="med"/>
+                      <a:tailEnd type="none" w="med" len="med"/>
+                    </a:lnT>
+                    <a:lnB w="12700" cap="flat" cmpd="sng" algn="ctr">
+                      <a:solidFill>
+                        <a:srgbClr val="DCE2E8"/>
+                      </a:solidFill>
+                      <a:prstDash val="solid"/>
+                      <a:round/>
+                      <a:headEnd type="none" w="med" len="med"/>
+                      <a:tailEnd type="none" w="med" len="med"/>
+                    </a:lnB>
+                    <a:solidFill>
+                      <a:srgbClr val="FFFFFF"/>
+                    </a:solidFill>
+                  </a:tcPr>
+                </a:tc>
+                <a:tc>
+                  <a:txBody>
+                    <a:bodyPr/>
+                    <a:lstStyle/>
+                    <a:p>
+                      <a:pPr algn="ctr" indent="0" marL="0">
+                        <a:buNone/>
+                      </a:pPr>
+                      <a:r>
+                        <a:rPr lang="en-US" sz="1100" b="1" dirty="0">
+                          <a:solidFill>
+                            <a:srgbClr val="D78A27"/>
+                          </a:solidFill>
+                          <a:latin typeface="Calibri" pitchFamily="34" charset="0"/>
+                          <a:ea typeface="Calibri" pitchFamily="34" charset="-122"/>
+                          <a:cs typeface="Calibri" pitchFamily="34" charset="-120"/>
+                        </a:rPr>
+                        <a:t>[UK_SOC_RES_2]</a:t>
+                      </a:r>
+                      <a:endParaRPr lang="en-US" sz="1100" dirty="0">
+                        <a:latin typeface="Calibri" charset="0"/>
+                        <a:ea typeface="Calibri" charset="0"/>
+                        <a:cs typeface="Calibri" charset="0"/>
+                      </a:endParaRPr>
+                    </a:p>
+                  </a:txBody>
+                  <a:tcPr marL="50800" marR="50800" marT="50800" marB="50800" anchor="ctr">
+                    <a:lnL w="12700" cap="flat" cmpd="sng" algn="ctr">
+                      <a:solidFill>
+                        <a:srgbClr val="DCE2E8"/>
+                      </a:solidFill>
+                      <a:prstDash val="solid"/>
+                      <a:round/>
+                      <a:headEnd type="none" w="med" len="med"/>
+                      <a:tailEnd type="none" w="med" len="med"/>
+                    </a:lnL>
+                    <a:lnR w="12700" cap="flat" cmpd="sng" algn="ctr">
+                      <a:solidFill>
+                        <a:srgbClr val="DCE2E8"/>
+                      </a:solidFill>
+                      <a:prstDash val="solid"/>
+                      <a:round/>
+                      <a:headEnd type="none" w="med" len="med"/>
+                      <a:tailEnd type="none" w="med" len="med"/>
+                    </a:lnR>
+                    <a:lnT w="12700" cap="flat" cmpd="sng" algn="ctr">
+                      <a:solidFill>
+                        <a:srgbClr val="DCE2E8"/>
+                      </a:solidFill>
+                      <a:prstDash val="solid"/>
+                      <a:round/>
+                      <a:headEnd type="none" w="med" len="med"/>
+                      <a:tailEnd type="none" w="med" len="med"/>
+                    </a:lnT>
+                    <a:lnB w="12700" cap="flat" cmpd="sng" algn="ctr">
+                      <a:solidFill>
+                        <a:srgbClr val="DCE2E8"/>
+                      </a:solidFill>
+                      <a:prstDash val="solid"/>
+                      <a:round/>
+                      <a:headEnd type="none" w="med" len="med"/>
+                      <a:tailEnd type="none" w="med" len="med"/>
+                    </a:lnB>
+                    <a:solidFill>
+                      <a:srgbClr val="FFFFFF"/>
+                    </a:solidFill>
+                  </a:tcPr>
+                </a:tc>
+                <a:tc>
+                  <a:txBody>
+                    <a:bodyPr/>
+                    <a:lstStyle/>
+                    <a:p>
+                      <a:pPr algn="ctr" indent="0" marL="0">
+                        <a:buNone/>
+                      </a:pPr>
+                      <a:r>
+                        <a:rPr lang="en-US" sz="1100" b="1" dirty="0">
+                          <a:solidFill>
+                            <a:srgbClr val="D78A27"/>
+                          </a:solidFill>
+                          <a:latin typeface="Calibri" pitchFamily="34" charset="0"/>
+                          <a:ea typeface="Calibri" pitchFamily="34" charset="-122"/>
+                          <a:cs typeface="Calibri" pitchFamily="34" charset="-120"/>
+                        </a:rPr>
+                        <a:t>[UK_SOC_CPR_2]</a:t>
+                      </a:r>
+                      <a:endParaRPr lang="en-US" sz="1100" dirty="0">
+                        <a:latin typeface="Calibri" charset="0"/>
+                        <a:ea typeface="Calibri" charset="0"/>
+                        <a:cs typeface="Calibri" charset="0"/>
+                      </a:endParaRPr>
+                    </a:p>
+                  </a:txBody>
+                  <a:tcPr marL="50800" marR="50800" marT="50800" marB="50800" anchor="ctr">
+                    <a:lnL w="12700" cap="flat" cmpd="sng" algn="ctr">
+                      <a:solidFill>
+                        <a:srgbClr val="DCE2E8"/>
+                      </a:solidFill>
+                      <a:prstDash val="solid"/>
+                      <a:round/>
+                      <a:headEnd type="none" w="med" len="med"/>
+                      <a:tailEnd type="none" w="med" len="med"/>
+                    </a:lnL>
+                    <a:lnR w="12700" cap="flat" cmpd="sng" algn="ctr">
+                      <a:solidFill>
+                        <a:srgbClr val="DCE2E8"/>
+                      </a:solidFill>
+                      <a:prstDash val="solid"/>
+                      <a:round/>
+                      <a:headEnd type="none" w="med" len="med"/>
+                      <a:tailEnd type="none" w="med" len="med"/>
+                    </a:lnR>
+                    <a:lnT w="12700" cap="flat" cmpd="sng" algn="ctr">
+                      <a:solidFill>
+                        <a:srgbClr val="DCE2E8"/>
+                      </a:solidFill>
+                      <a:prstDash val="solid"/>
+                      <a:round/>
+                      <a:headEnd type="none" w="med" len="med"/>
+                      <a:tailEnd type="none" w="med" len="med"/>
+                    </a:lnT>
+                    <a:lnB w="12700" cap="flat" cmpd="sng" algn="ctr">
+                      <a:solidFill>
+                        <a:srgbClr val="DCE2E8"/>
+                      </a:solidFill>
+                      <a:prstDash val="solid"/>
+                      <a:round/>
+                      <a:headEnd type="none" w="med" len="med"/>
+                      <a:tailEnd type="none" w="med" len="med"/>
+                    </a:lnB>
+                    <a:solidFill>
+                      <a:srgbClr val="FFFFFF"/>
+                    </a:solidFill>
+                  </a:tcPr>
+                </a:tc>
+                <a:tc>
+                  <a:txBody>
+                    <a:bodyPr/>
+                    <a:lstStyle/>
+                    <a:p>
+                      <a:pPr algn="l" indent="0" marL="0">
+                        <a:buNone/>
+                      </a:pPr>
+                      <a:r>
+                        <a:rPr lang="en-US" sz="1100" b="1" dirty="0">
+                          <a:solidFill>
+                            <a:srgbClr val="D78A27"/>
+                          </a:solidFill>
+                          <a:latin typeface="Calibri" pitchFamily="34" charset="0"/>
+                          <a:ea typeface="Calibri" pitchFamily="34" charset="-122"/>
+                          <a:cs typeface="Calibri" pitchFamily="34" charset="-120"/>
+                        </a:rPr>
+                        <a:t>[UK_SOC_AUD_2]</a:t>
+                      </a:r>
+                      <a:endParaRPr lang="en-US" sz="1100" dirty="0">
+                        <a:latin typeface="Calibri" charset="0"/>
+                        <a:ea typeface="Calibri" charset="0"/>
+                        <a:cs typeface="Calibri" charset="0"/>
+                      </a:endParaRPr>
+                    </a:p>
+                  </a:txBody>
+                  <a:tcPr marL="50800" marR="50800" marT="50800" marB="50800" anchor="ctr">
+                    <a:lnL w="12700" cap="flat" cmpd="sng" algn="ctr">
+                      <a:solidFill>
+                        <a:srgbClr val="DCE2E8"/>
+                      </a:solidFill>
+                      <a:prstDash val="solid"/>
+                      <a:round/>
+                      <a:headEnd type="none" w="med" len="med"/>
+                      <a:tailEnd type="none" w="med" len="med"/>
+                    </a:lnL>
+                    <a:lnR w="12700" cap="flat" cmpd="sng" algn="ctr">
+                      <a:solidFill>
+                        <a:srgbClr val="DCE2E8"/>
+                      </a:solidFill>
+                      <a:prstDash val="solid"/>
+                      <a:round/>
+                      <a:headEnd type="none" w="med" len="med"/>
+                      <a:tailEnd type="none" w="med" len="med"/>
+                    </a:lnR>
+                    <a:lnT w="12700" cap="flat" cmpd="sng" algn="ctr">
+                      <a:solidFill>
+                        <a:srgbClr val="DCE2E8"/>
+                      </a:solidFill>
+                      <a:prstDash val="solid"/>
+                      <a:round/>
+                      <a:headEnd type="none" w="med" len="med"/>
+                      <a:tailEnd type="none" w="med" len="med"/>
+                    </a:lnT>
+                    <a:lnB w="12700" cap="flat" cmpd="sng" algn="ctr">
+                      <a:solidFill>
+                        <a:srgbClr val="DCE2E8"/>
+                      </a:solidFill>
+                      <a:prstDash val="solid"/>
+                      <a:round/>
+                      <a:headEnd type="none" w="med" len="med"/>
+                      <a:tailEnd type="none" w="med" len="med"/>
+                    </a:lnB>
+                    <a:solidFill>
+                      <a:srgbClr val="FFFFFF"/>
+                    </a:solidFill>
+                  </a:tcPr>
+                </a:tc>
+              </a:tr>
+              <a:tr h="329184">
+                <a:tc>
+                  <a:txBody>
+                    <a:bodyPr/>
+                    <a:lstStyle/>
+                    <a:p>
+                      <a:pPr algn="l" indent="0" marL="0">
+                        <a:buNone/>
+                      </a:pPr>
+                      <a:r>
+                        <a:rPr lang="en-US" sz="1100" b="1" dirty="0">
+                          <a:solidFill>
+                            <a:srgbClr val="D78A27"/>
+                          </a:solidFill>
+                          <a:latin typeface="Calibri" pitchFamily="34" charset="0"/>
+                          <a:ea typeface="Calibri" pitchFamily="34" charset="-122"/>
+                          <a:cs typeface="Calibri" pitchFamily="34" charset="-120"/>
+                        </a:rPr>
+                        <a:t>[UK_SOC_CAMP_3]</a:t>
+                      </a:r>
+                      <a:endParaRPr lang="en-US" sz="1100" dirty="0">
+                        <a:latin typeface="Calibri" charset="0"/>
+                        <a:ea typeface="Calibri" charset="0"/>
+                        <a:cs typeface="Calibri" charset="0"/>
+                      </a:endParaRPr>
+                    </a:p>
+                  </a:txBody>
+                  <a:tcPr marL="50800" marR="50800" marT="50800" marB="50800" anchor="ctr">
+                    <a:lnL w="12700" cap="flat" cmpd="sng" algn="ctr">
+                      <a:solidFill>
+                        <a:srgbClr val="DCE2E8"/>
+                      </a:solidFill>
+                      <a:prstDash val="solid"/>
+                      <a:round/>
+                      <a:headEnd type="none" w="med" len="med"/>
+                      <a:tailEnd type="none" w="med" len="med"/>
+                    </a:lnL>
+                    <a:lnR w="12700" cap="flat" cmpd="sng" algn="ctr">
+                      <a:solidFill>
+                        <a:srgbClr val="DCE2E8"/>
+                      </a:solidFill>
+                      <a:prstDash val="solid"/>
+                      <a:round/>
+                      <a:headEnd type="none" w="med" len="med"/>
+                      <a:tailEnd type="none" w="med" len="med"/>
+                    </a:lnR>
+                    <a:lnT w="12700" cap="flat" cmpd="sng" algn="ctr">
+                      <a:solidFill>
+                        <a:srgbClr val="DCE2E8"/>
+                      </a:solidFill>
+                      <a:prstDash val="solid"/>
+                      <a:round/>
+                      <a:headEnd type="none" w="med" len="med"/>
+                      <a:tailEnd type="none" w="med" len="med"/>
+                    </a:lnT>
+                    <a:lnB w="12700" cap="flat" cmpd="sng" algn="ctr">
+                      <a:solidFill>
+                        <a:srgbClr val="DCE2E8"/>
+                      </a:solidFill>
+                      <a:prstDash val="solid"/>
+                      <a:round/>
+                      <a:headEnd type="none" w="med" len="med"/>
+                      <a:tailEnd type="none" w="med" len="med"/>
+                    </a:lnB>
+                    <a:solidFill>
+                      <a:srgbClr val="FFFFFF"/>
+                    </a:solidFill>
+                  </a:tcPr>
+                </a:tc>
+                <a:tc>
+                  <a:txBody>
+                    <a:bodyPr/>
+                    <a:lstStyle/>
+                    <a:p>
+                      <a:pPr algn="ctr" indent="0" marL="0">
+                        <a:buNone/>
+                      </a:pPr>
+                      <a:r>
+                        <a:rPr lang="en-US" sz="1100" b="1" dirty="0">
+                          <a:solidFill>
+                            <a:srgbClr val="D78A27"/>
+                          </a:solidFill>
+                          <a:latin typeface="Calibri" pitchFamily="34" charset="0"/>
+                          <a:ea typeface="Calibri" pitchFamily="34" charset="-122"/>
+                          <a:cs typeface="Calibri" pitchFamily="34" charset="-120"/>
+                        </a:rPr>
+                        <a:t>[UK_SOC_SPEND_3]</a:t>
+                      </a:r>
+                      <a:endParaRPr lang="en-US" sz="1100" dirty="0">
+                        <a:latin typeface="Calibri" charset="0"/>
+                        <a:ea typeface="Calibri" charset="0"/>
+                        <a:cs typeface="Calibri" charset="0"/>
+                      </a:endParaRPr>
+                    </a:p>
+                  </a:txBody>
+                  <a:tcPr marL="50800" marR="50800" marT="50800" marB="50800" anchor="ctr">
+                    <a:lnL w="12700" cap="flat" cmpd="sng" algn="ctr">
+                      <a:solidFill>
+                        <a:srgbClr val="DCE2E8"/>
+                      </a:solidFill>
+                      <a:prstDash val="solid"/>
+                      <a:round/>
+                      <a:headEnd type="none" w="med" len="med"/>
+                      <a:tailEnd type="none" w="med" len="med"/>
+                    </a:lnL>
+                    <a:lnR w="12700" cap="flat" cmpd="sng" algn="ctr">
+                      <a:solidFill>
+                        <a:srgbClr val="DCE2E8"/>
+                      </a:solidFill>
+                      <a:prstDash val="solid"/>
+                      <a:round/>
+                      <a:headEnd type="none" w="med" len="med"/>
+                      <a:tailEnd type="none" w="med" len="med"/>
+                    </a:lnR>
+                    <a:lnT w="12700" cap="flat" cmpd="sng" algn="ctr">
+                      <a:solidFill>
+                        <a:srgbClr val="DCE2E8"/>
+                      </a:solidFill>
+                      <a:prstDash val="solid"/>
+                      <a:round/>
+                      <a:headEnd type="none" w="med" len="med"/>
+                      <a:tailEnd type="none" w="med" len="med"/>
+                    </a:lnT>
+                    <a:lnB w="12700" cap="flat" cmpd="sng" algn="ctr">
+                      <a:solidFill>
+                        <a:srgbClr val="DCE2E8"/>
+                      </a:solidFill>
+                      <a:prstDash val="solid"/>
+                      <a:round/>
+                      <a:headEnd type="none" w="med" len="med"/>
+                      <a:tailEnd type="none" w="med" len="med"/>
+                    </a:lnB>
+                    <a:solidFill>
+                      <a:srgbClr val="FFFFFF"/>
+                    </a:solidFill>
+                  </a:tcPr>
+                </a:tc>
+                <a:tc>
+                  <a:txBody>
+                    <a:bodyPr/>
+                    <a:lstStyle/>
+                    <a:p>
+                      <a:pPr algn="ctr" indent="0" marL="0">
+                        <a:buNone/>
+                      </a:pPr>
+                      <a:r>
+                        <a:rPr lang="en-US" sz="1100" b="1" dirty="0">
+                          <a:solidFill>
+                            <a:srgbClr val="D78A27"/>
+                          </a:solidFill>
+                          <a:latin typeface="Calibri" pitchFamily="34" charset="0"/>
+                          <a:ea typeface="Calibri" pitchFamily="34" charset="-122"/>
+                          <a:cs typeface="Calibri" pitchFamily="34" charset="-120"/>
+                        </a:rPr>
+                        <a:t>[UK_SOC_RES_3]</a:t>
+                      </a:r>
+                      <a:endParaRPr lang="en-US" sz="1100" dirty="0">
+                        <a:latin typeface="Calibri" charset="0"/>
+                        <a:ea typeface="Calibri" charset="0"/>
+                        <a:cs typeface="Calibri" charset="0"/>
+                      </a:endParaRPr>
+                    </a:p>
+                  </a:txBody>
+                  <a:tcPr marL="50800" marR="50800" marT="50800" marB="50800" anchor="ctr">
+                    <a:lnL w="12700" cap="flat" cmpd="sng" algn="ctr">
+                      <a:solidFill>
+                        <a:srgbClr val="DCE2E8"/>
+                      </a:solidFill>
+                      <a:prstDash val="solid"/>
+                      <a:round/>
+                      <a:headEnd type="none" w="med" len="med"/>
+                      <a:tailEnd type="none" w="med" len="med"/>
+                    </a:lnL>
+                    <a:lnR w="12700" cap="flat" cmpd="sng" algn="ctr">
+                      <a:solidFill>
+                        <a:srgbClr val="DCE2E8"/>
+                      </a:solidFill>
+                      <a:prstDash val="solid"/>
+                      <a:round/>
+                      <a:headEnd type="none" w="med" len="med"/>
+                      <a:tailEnd type="none" w="med" len="med"/>
+                    </a:lnR>
+                    <a:lnT w="12700" cap="flat" cmpd="sng" algn="ctr">
+                      <a:solidFill>
+                        <a:srgbClr val="DCE2E8"/>
+                      </a:solidFill>
+                      <a:prstDash val="solid"/>
+                      <a:round/>
+                      <a:headEnd type="none" w="med" len="med"/>
+                      <a:tailEnd type="none" w="med" len="med"/>
+                    </a:lnT>
+                    <a:lnB w="12700" cap="flat" cmpd="sng" algn="ctr">
+                      <a:solidFill>
+                        <a:srgbClr val="DCE2E8"/>
+                      </a:solidFill>
+                      <a:prstDash val="solid"/>
+                      <a:round/>
+                      <a:headEnd type="none" w="med" len="med"/>
+                      <a:tailEnd type="none" w="med" len="med"/>
+                    </a:lnB>
+                    <a:solidFill>
+                      <a:srgbClr val="FFFFFF"/>
+                    </a:solidFill>
+                  </a:tcPr>
+                </a:tc>
+                <a:tc>
+                  <a:txBody>
+                    <a:bodyPr/>
+                    <a:lstStyle/>
+                    <a:p>
+                      <a:pPr algn="ctr" indent="0" marL="0">
+                        <a:buNone/>
+                      </a:pPr>
+                      <a:r>
+                        <a:rPr lang="en-US" sz="1100" b="1" dirty="0">
+                          <a:solidFill>
+                            <a:srgbClr val="D78A27"/>
+                          </a:solidFill>
+                          <a:latin typeface="Calibri" pitchFamily="34" charset="0"/>
+                          <a:ea typeface="Calibri" pitchFamily="34" charset="-122"/>
+                          <a:cs typeface="Calibri" pitchFamily="34" charset="-120"/>
+                        </a:rPr>
+                        <a:t>[UK_SOC_CPR_3]</a:t>
+                      </a:r>
+                      <a:endParaRPr lang="en-US" sz="1100" dirty="0">
+                        <a:latin typeface="Calibri" charset="0"/>
+                        <a:ea typeface="Calibri" charset="0"/>
+                        <a:cs typeface="Calibri" charset="0"/>
+                      </a:endParaRPr>
+                    </a:p>
+                  </a:txBody>
+                  <a:tcPr marL="50800" marR="50800" marT="50800" marB="50800" anchor="ctr">
+                    <a:lnL w="12700" cap="flat" cmpd="sng" algn="ctr">
+                      <a:solidFill>
+                        <a:srgbClr val="DCE2E8"/>
+                      </a:solidFill>
+                      <a:prstDash val="solid"/>
+                      <a:round/>
+                      <a:headEnd type="none" w="med" len="med"/>
+                      <a:tailEnd type="none" w="med" len="med"/>
+                    </a:lnL>
+                    <a:lnR w="12700" cap="flat" cmpd="sng" algn="ctr">
+                      <a:solidFill>
+                        <a:srgbClr val="DCE2E8"/>
+                      </a:solidFill>
+                      <a:prstDash val="solid"/>
+                      <a:round/>
+                      <a:headEnd type="none" w="med" len="med"/>
+                      <a:tailEnd type="none" w="med" len="med"/>
+                    </a:lnR>
+                    <a:lnT w="12700" cap="flat" cmpd="sng" algn="ctr">
+                      <a:solidFill>
+                        <a:srgbClr val="DCE2E8"/>
+                      </a:solidFill>
+                      <a:prstDash val="solid"/>
+                      <a:round/>
+                      <a:headEnd type="none" w="med" len="med"/>
+                      <a:tailEnd type="none" w="med" len="med"/>
+                    </a:lnT>
+                    <a:lnB w="12700" cap="flat" cmpd="sng" algn="ctr">
+                      <a:solidFill>
+                        <a:srgbClr val="DCE2E8"/>
+                      </a:solidFill>
+                      <a:prstDash val="solid"/>
+                      <a:round/>
+                      <a:headEnd type="none" w="med" len="med"/>
+                      <a:tailEnd type="none" w="med" len="med"/>
+                    </a:lnB>
+                    <a:solidFill>
+                      <a:srgbClr val="FFFFFF"/>
+                    </a:solidFill>
+                  </a:tcPr>
+                </a:tc>
+                <a:tc>
+                  <a:txBody>
+                    <a:bodyPr/>
+                    <a:lstStyle/>
+                    <a:p>
+                      <a:pPr algn="l" indent="0" marL="0">
+                        <a:buNone/>
+                      </a:pPr>
+                      <a:r>
+                        <a:rPr lang="en-US" sz="1100" b="1" dirty="0">
+                          <a:solidFill>
+                            <a:srgbClr val="D78A27"/>
+                          </a:solidFill>
+                          <a:latin typeface="Calibri" pitchFamily="34" charset="0"/>
+                          <a:ea typeface="Calibri" pitchFamily="34" charset="-122"/>
+                          <a:cs typeface="Calibri" pitchFamily="34" charset="-120"/>
+                        </a:rPr>
+                        <a:t>[UK_SOC_AUD_3]</a:t>
+                      </a:r>
+                      <a:endParaRPr lang="en-US" sz="1100" dirty="0">
+                        <a:latin typeface="Calibri" charset="0"/>
+                        <a:ea typeface="Calibri" charset="0"/>
+                        <a:cs typeface="Calibri" charset="0"/>
+                      </a:endParaRPr>
+                    </a:p>
+                  </a:txBody>
+                  <a:tcPr marL="50800" marR="50800" marT="50800" marB="50800" anchor="ctr">
+                    <a:lnL w="12700" cap="flat" cmpd="sng" algn="ctr">
+                      <a:solidFill>
+                        <a:srgbClr val="DCE2E8"/>
+                      </a:solidFill>
+                      <a:prstDash val="solid"/>
+                      <a:round/>
+                      <a:headEnd type="none" w="med" len="med"/>
+                      <a:tailEnd type="none" w="med" len="med"/>
+                    </a:lnL>
+                    <a:lnR w="12700" cap="flat" cmpd="sng" algn="ctr">
+                      <a:solidFill>
+                        <a:srgbClr val="DCE2E8"/>
+                      </a:solidFill>
+                      <a:prstDash val="solid"/>
+                      <a:round/>
+                      <a:headEnd type="none" w="med" len="med"/>
+                      <a:tailEnd type="none" w="med" len="med"/>
+                    </a:lnR>
+                    <a:lnT w="12700" cap="flat" cmpd="sng" algn="ctr">
+                      <a:solidFill>
+                        <a:srgbClr val="DCE2E8"/>
+                      </a:solidFill>
+                      <a:prstDash val="solid"/>
+                      <a:round/>
+                      <a:headEnd type="none" w="med" len="med"/>
+                      <a:tailEnd type="none" w="med" len="med"/>
+                    </a:lnT>
+                    <a:lnB w="12700" cap="flat" cmpd="sng" algn="ctr">
+                      <a:solidFill>
+                        <a:srgbClr val="DCE2E8"/>
+                      </a:solidFill>
+                      <a:prstDash val="solid"/>
+                      <a:round/>
+                      <a:headEnd type="none" w="med" len="med"/>
+                      <a:tailEnd type="none" w="med" len="med"/>
+                    </a:lnB>
+                    <a:solidFill>
+                      <a:srgbClr val="FFFFFF"/>
+                    </a:solidFill>
+                  </a:tcPr>
+                </a:tc>
+              </a:tr>
+              <a:tr h="310896">
+                <a:tc gridSpan="5">
+                  <a:txBody>
+                    <a:bodyPr/>
+                    <a:lstStyle/>
+                    <a:p>
+                      <a:pPr algn="l" indent="0" marL="0">
+                        <a:buNone/>
+                      </a:pPr>
+                      <a:r>
+                        <a:rPr lang="en-US" sz="1200" b="1" dirty="0">
+                          <a:solidFill>
+                            <a:srgbClr val="D78A27"/>
+                          </a:solidFill>
+                          <a:latin typeface="Calibri" pitchFamily="34" charset="0"/>
+                          <a:ea typeface="Calibri" pitchFamily="34" charset="-122"/>
+                          <a:cs typeface="Calibri" pitchFamily="34" charset="-120"/>
+                        </a:rPr>
+                        <a:t>France</a:t>
+                      </a:r>
+                      <a:endParaRPr lang="en-US" sz="1200" dirty="0">
+                        <a:latin typeface="Calibri" charset="0"/>
+                        <a:ea typeface="Calibri" charset="0"/>
+                        <a:cs typeface="Calibri" charset="0"/>
+                      </a:endParaRPr>
+                    </a:p>
+                  </a:txBody>
+                  <a:tcPr marL="50800" marR="50800" marT="50800" marB="50800" anchor="ctr">
+                    <a:lnL w="12700" cap="flat" cmpd="sng" algn="ctr">
+                      <a:solidFill>
+                        <a:srgbClr val="DCE2E8"/>
+                      </a:solidFill>
+                      <a:prstDash val="solid"/>
+                      <a:round/>
+                      <a:headEnd type="none" w="med" len="med"/>
+                      <a:tailEnd type="none" w="med" len="med"/>
+                    </a:lnL>
+                    <a:lnR w="12700" cap="flat" cmpd="sng" algn="ctr">
+                      <a:solidFill>
+                        <a:srgbClr val="DCE2E8"/>
+                      </a:solidFill>
+                      <a:prstDash val="solid"/>
+                      <a:round/>
+                      <a:headEnd type="none" w="med" len="med"/>
+                      <a:tailEnd type="none" w="med" len="med"/>
+                    </a:lnR>
+                    <a:lnT w="12700" cap="flat" cmpd="sng" algn="ctr">
+                      <a:solidFill>
+                        <a:srgbClr val="DCE2E8"/>
+                      </a:solidFill>
+                      <a:prstDash val="solid"/>
+                      <a:round/>
+                      <a:headEnd type="none" w="med" len="med"/>
+                      <a:tailEnd type="none" w="med" len="med"/>
+                    </a:lnT>
+                    <a:lnB w="12700" cap="flat" cmpd="sng" algn="ctr">
+                      <a:solidFill>
+                        <a:srgbClr val="DCE2E8"/>
+                      </a:solidFill>
+                      <a:prstDash val="solid"/>
+                      <a:round/>
+                      <a:headEnd type="none" w="med" len="med"/>
+                      <a:tailEnd type="none" w="med" len="med"/>
+                    </a:lnB>
+                    <a:solidFill>
+                      <a:srgbClr val="FBF1E0"/>
+                    </a:solidFill>
+                  </a:tcPr>
+                </a:tc>
+                <a:tc hMerge="1">
+                  <a:tcPr/>
+                </a:tc>
+                <a:tc hMerge="1">
+                  <a:tcPr/>
+                </a:tc>
+                <a:tc hMerge="1">
+                  <a:tcPr/>
+                </a:tc>
+                <a:tc hMerge="1">
+                  <a:tcPr/>
+                </a:tc>
+              </a:tr>
+              <a:tr h="329184">
+                <a:tc>
+                  <a:txBody>
+                    <a:bodyPr/>
+                    <a:lstStyle/>
+                    <a:p>
+                      <a:pPr algn="l" indent="0" marL="0">
+                        <a:buNone/>
+                      </a:pPr>
+                      <a:r>
+                        <a:rPr lang="en-US" sz="1100" b="1" dirty="0">
+                          <a:solidFill>
+                            <a:srgbClr val="D78A27"/>
+                          </a:solidFill>
+                          <a:latin typeface="Calibri" pitchFamily="34" charset="0"/>
+                          <a:ea typeface="Calibri" pitchFamily="34" charset="-122"/>
+                          <a:cs typeface="Calibri" pitchFamily="34" charset="-120"/>
+                        </a:rPr>
+                        <a:t>[FR_SOC_CAMP_1]</a:t>
+                      </a:r>
+                      <a:endParaRPr lang="en-US" sz="1100" dirty="0">
+                        <a:latin typeface="Calibri" charset="0"/>
+                        <a:ea typeface="Calibri" charset="0"/>
+                        <a:cs typeface="Calibri" charset="0"/>
+                      </a:endParaRPr>
+                    </a:p>
+                  </a:txBody>
+                  <a:tcPr marL="50800" marR="50800" marT="50800" marB="50800" anchor="ctr">
+                    <a:lnL w="12700" cap="flat" cmpd="sng" algn="ctr">
+                      <a:solidFill>
+                        <a:srgbClr val="DCE2E8"/>
+                      </a:solidFill>
+                      <a:prstDash val="solid"/>
+                      <a:round/>
+                      <a:headEnd type="none" w="med" len="med"/>
+                      <a:tailEnd type="none" w="med" len="med"/>
+                    </a:lnL>
+                    <a:lnR w="12700" cap="flat" cmpd="sng" algn="ctr">
+                      <a:solidFill>
+                        <a:srgbClr val="DCE2E8"/>
+                      </a:solidFill>
+                      <a:prstDash val="solid"/>
+                      <a:round/>
+                      <a:headEnd type="none" w="med" len="med"/>
+                      <a:tailEnd type="none" w="med" len="med"/>
+                    </a:lnR>
+                    <a:lnT w="12700" cap="flat" cmpd="sng" algn="ctr">
+                      <a:solidFill>
+                        <a:srgbClr val="DCE2E8"/>
+                      </a:solidFill>
+                      <a:prstDash val="solid"/>
+                      <a:round/>
+                      <a:headEnd type="none" w="med" len="med"/>
+                      <a:tailEnd type="none" w="med" len="med"/>
+                    </a:lnT>
+                    <a:lnB w="12700" cap="flat" cmpd="sng" algn="ctr">
+                      <a:solidFill>
+                        <a:srgbClr val="DCE2E8"/>
+                      </a:solidFill>
+                      <a:prstDash val="solid"/>
+                      <a:round/>
+                      <a:headEnd type="none" w="med" len="med"/>
+                      <a:tailEnd type="none" w="med" len="med"/>
+                    </a:lnB>
+                    <a:solidFill>
+                      <a:srgbClr val="FFFFFF"/>
+                    </a:solidFill>
+                  </a:tcPr>
+                </a:tc>
+                <a:tc>
+                  <a:txBody>
+                    <a:bodyPr/>
+                    <a:lstStyle/>
+                    <a:p>
+                      <a:pPr algn="ctr" indent="0" marL="0">
+                        <a:buNone/>
+                      </a:pPr>
+                      <a:r>
+                        <a:rPr lang="en-US" sz="1100" b="1" dirty="0">
+                          <a:solidFill>
+                            <a:srgbClr val="D78A27"/>
+                          </a:solidFill>
+                          <a:latin typeface="Calibri" pitchFamily="34" charset="0"/>
+                          <a:ea typeface="Calibri" pitchFamily="34" charset="-122"/>
+                          <a:cs typeface="Calibri" pitchFamily="34" charset="-120"/>
+                        </a:rPr>
+                        <a:t>[FR_SOC_SPEND_1]</a:t>
+                      </a:r>
+                      <a:endParaRPr lang="en-US" sz="1100" dirty="0">
+                        <a:latin typeface="Calibri" charset="0"/>
+                        <a:ea typeface="Calibri" charset="0"/>
+                        <a:cs typeface="Calibri" charset="0"/>
+                      </a:endParaRPr>
+                    </a:p>
+                  </a:txBody>
+                  <a:tcPr marL="50800" marR="50800" marT="50800" marB="50800" anchor="ctr">
+                    <a:lnL w="12700" cap="flat" cmpd="sng" algn="ctr">
+                      <a:solidFill>
+                        <a:srgbClr val="DCE2E8"/>
+                      </a:solidFill>
+                      <a:prstDash val="solid"/>
+                      <a:round/>
+                      <a:headEnd type="none" w="med" len="med"/>
+                      <a:tailEnd type="none" w="med" len="med"/>
+                    </a:lnL>
+                    <a:lnR w="12700" cap="flat" cmpd="sng" algn="ctr">
+                      <a:solidFill>
+                        <a:srgbClr val="DCE2E8"/>
+                      </a:solidFill>
+                      <a:prstDash val="solid"/>
+                      <a:round/>
+                      <a:headEnd type="none" w="med" len="med"/>
+                      <a:tailEnd type="none" w="med" len="med"/>
+                    </a:lnR>
+                    <a:lnT w="12700" cap="flat" cmpd="sng" algn="ctr">
+                      <a:solidFill>
+                        <a:srgbClr val="DCE2E8"/>
+                      </a:solidFill>
+                      <a:prstDash val="solid"/>
+                      <a:round/>
+                      <a:headEnd type="none" w="med" len="med"/>
+                      <a:tailEnd type="none" w="med" len="med"/>
+                    </a:lnT>
+                    <a:lnB w="12700" cap="flat" cmpd="sng" algn="ctr">
+                      <a:solidFill>
+                        <a:srgbClr val="DCE2E8"/>
+                      </a:solidFill>
+                      <a:prstDash val="solid"/>
+                      <a:round/>
+                      <a:headEnd type="none" w="med" len="med"/>
+                      <a:tailEnd type="none" w="med" len="med"/>
+                    </a:lnB>
+                    <a:solidFill>
+                      <a:srgbClr val="FFFFFF"/>
+                    </a:solidFill>
+                  </a:tcPr>
+                </a:tc>
+                <a:tc>
+                  <a:txBody>
+                    <a:bodyPr/>
+                    <a:lstStyle/>
+                    <a:p>
+                      <a:pPr algn="ctr" indent="0" marL="0">
+                        <a:buNone/>
+                      </a:pPr>
+                      <a:r>
+                        <a:rPr lang="en-US" sz="1100" b="1" dirty="0">
+                          <a:solidFill>
+                            <a:srgbClr val="D78A27"/>
+                          </a:solidFill>
+                          <a:latin typeface="Calibri" pitchFamily="34" charset="0"/>
+                          <a:ea typeface="Calibri" pitchFamily="34" charset="-122"/>
+                          <a:cs typeface="Calibri" pitchFamily="34" charset="-120"/>
+                        </a:rPr>
+                        <a:t>[FR_SOC_RES_1]</a:t>
+                      </a:r>
+                      <a:endParaRPr lang="en-US" sz="1100" dirty="0">
+                        <a:latin typeface="Calibri" charset="0"/>
+                        <a:ea typeface="Calibri" charset="0"/>
+                        <a:cs typeface="Calibri" charset="0"/>
+                      </a:endParaRPr>
+                    </a:p>
+                  </a:txBody>
+                  <a:tcPr marL="50800" marR="50800" marT="50800" marB="50800" anchor="ctr">
+                    <a:lnL w="12700" cap="flat" cmpd="sng" algn="ctr">
+                      <a:solidFill>
+                        <a:srgbClr val="DCE2E8"/>
+                      </a:solidFill>
+                      <a:prstDash val="solid"/>
+                      <a:round/>
+                      <a:headEnd type="none" w="med" len="med"/>
+                      <a:tailEnd type="none" w="med" len="med"/>
+                    </a:lnL>
+                    <a:lnR w="12700" cap="flat" cmpd="sng" algn="ctr">
+                      <a:solidFill>
+                        <a:srgbClr val="DCE2E8"/>
+                      </a:solidFill>
+                      <a:prstDash val="solid"/>
+                      <a:round/>
+                      <a:headEnd type="none" w="med" len="med"/>
+                      <a:tailEnd type="none" w="med" len="med"/>
+                    </a:lnR>
+                    <a:lnT w="12700" cap="flat" cmpd="sng" algn="ctr">
+                      <a:solidFill>
+                        <a:srgbClr val="DCE2E8"/>
+                      </a:solidFill>
+                      <a:prstDash val="solid"/>
+                      <a:round/>
+                      <a:headEnd type="none" w="med" len="med"/>
+                      <a:tailEnd type="none" w="med" len="med"/>
+                    </a:lnT>
+                    <a:lnB w="12700" cap="flat" cmpd="sng" algn="ctr">
+                      <a:solidFill>
+                        <a:srgbClr val="DCE2E8"/>
+                      </a:solidFill>
+                      <a:prstDash val="solid"/>
+                      <a:round/>
+                      <a:headEnd type="none" w="med" len="med"/>
+                      <a:tailEnd type="none" w="med" len="med"/>
+                    </a:lnB>
+                    <a:solidFill>
+                      <a:srgbClr val="FFFFFF"/>
+                    </a:solidFill>
+                  </a:tcPr>
+                </a:tc>
+                <a:tc>
+                  <a:txBody>
+                    <a:bodyPr/>
+                    <a:lstStyle/>
+                    <a:p>
+                      <a:pPr algn="ctr" indent="0" marL="0">
+                        <a:buNone/>
+                      </a:pPr>
+                      <a:r>
+                        <a:rPr lang="en-US" sz="1100" b="1" dirty="0">
+                          <a:solidFill>
+                            <a:srgbClr val="D78A27"/>
+                          </a:solidFill>
+                          <a:latin typeface="Calibri" pitchFamily="34" charset="0"/>
+                          <a:ea typeface="Calibri" pitchFamily="34" charset="-122"/>
+                          <a:cs typeface="Calibri" pitchFamily="34" charset="-120"/>
+                        </a:rPr>
+                        <a:t>[FR_SOC_CPR_1]</a:t>
+                      </a:r>
+                      <a:endParaRPr lang="en-US" sz="1100" dirty="0">
+                        <a:latin typeface="Calibri" charset="0"/>
+                        <a:ea typeface="Calibri" charset="0"/>
+                        <a:cs typeface="Calibri" charset="0"/>
+                      </a:endParaRPr>
+                    </a:p>
+                  </a:txBody>
+                  <a:tcPr marL="50800" marR="50800" marT="50800" marB="50800" anchor="ctr">
+                    <a:lnL w="12700" cap="flat" cmpd="sng" algn="ctr">
+                      <a:solidFill>
+                        <a:srgbClr val="DCE2E8"/>
+                      </a:solidFill>
+                      <a:prstDash val="solid"/>
+                      <a:round/>
+                      <a:headEnd type="none" w="med" len="med"/>
+                      <a:tailEnd type="none" w="med" len="med"/>
+                    </a:lnL>
+                    <a:lnR w="12700" cap="flat" cmpd="sng" algn="ctr">
+                      <a:solidFill>
+                        <a:srgbClr val="DCE2E8"/>
+                      </a:solidFill>
+                      <a:prstDash val="solid"/>
+                      <a:round/>
+                      <a:headEnd type="none" w="med" len="med"/>
+                      <a:tailEnd type="none" w="med" len="med"/>
+                    </a:lnR>
+                    <a:lnT w="12700" cap="flat" cmpd="sng" algn="ctr">
+                      <a:solidFill>
+                        <a:srgbClr val="DCE2E8"/>
+                      </a:solidFill>
+                      <a:prstDash val="solid"/>
+                      <a:round/>
+                      <a:headEnd type="none" w="med" len="med"/>
+                      <a:tailEnd type="none" w="med" len="med"/>
+                    </a:lnT>
+                    <a:lnB w="12700" cap="flat" cmpd="sng" algn="ctr">
+                      <a:solidFill>
+                        <a:srgbClr val="DCE2E8"/>
+                      </a:solidFill>
+                      <a:prstDash val="solid"/>
+                      <a:round/>
+                      <a:headEnd type="none" w="med" len="med"/>
+                      <a:tailEnd type="none" w="med" len="med"/>
+                    </a:lnB>
+                    <a:solidFill>
+                      <a:srgbClr val="FFFFFF"/>
+                    </a:solidFill>
+                  </a:tcPr>
+                </a:tc>
+                <a:tc>
+                  <a:txBody>
+                    <a:bodyPr/>
+                    <a:lstStyle/>
+                    <a:p>
+                      <a:pPr algn="l" indent="0" marL="0">
+                        <a:buNone/>
+                      </a:pPr>
+                      <a:r>
+                        <a:rPr lang="en-US" sz="1100" b="1" dirty="0">
+                          <a:solidFill>
+                            <a:srgbClr val="D78A27"/>
+                          </a:solidFill>
+                          <a:latin typeface="Calibri" pitchFamily="34" charset="0"/>
+                          <a:ea typeface="Calibri" pitchFamily="34" charset="-122"/>
+                          <a:cs typeface="Calibri" pitchFamily="34" charset="-120"/>
+                        </a:rPr>
+                        <a:t>[FR_SOC_AUD_1]</a:t>
+                      </a:r>
+                      <a:endParaRPr lang="en-US" sz="1100" dirty="0">
+                        <a:latin typeface="Calibri" charset="0"/>
+                        <a:ea typeface="Calibri" charset="0"/>
+                        <a:cs typeface="Calibri" charset="0"/>
+                      </a:endParaRPr>
+                    </a:p>
+                  </a:txBody>
+                  <a:tcPr marL="50800" marR="50800" marT="50800" marB="50800" anchor="ctr">
+                    <a:lnL w="12700" cap="flat" cmpd="sng" algn="ctr">
+                      <a:solidFill>
+                        <a:srgbClr val="DCE2E8"/>
+                      </a:solidFill>
+                      <a:prstDash val="solid"/>
+                      <a:round/>
+                      <a:headEnd type="none" w="med" len="med"/>
+                      <a:tailEnd type="none" w="med" len="med"/>
+                    </a:lnL>
+                    <a:lnR w="12700" cap="flat" cmpd="sng" algn="ctr">
+                      <a:solidFill>
+                        <a:srgbClr val="DCE2E8"/>
+                      </a:solidFill>
+                      <a:prstDash val="solid"/>
+                      <a:round/>
+                      <a:headEnd type="none" w="med" len="med"/>
+                      <a:tailEnd type="none" w="med" len="med"/>
+                    </a:lnR>
+                    <a:lnT w="12700" cap="flat" cmpd="sng" algn="ctr">
+                      <a:solidFill>
+                        <a:srgbClr val="DCE2E8"/>
+                      </a:solidFill>
+                      <a:prstDash val="solid"/>
+                      <a:round/>
+                      <a:headEnd type="none" w="med" len="med"/>
+                      <a:tailEnd type="none" w="med" len="med"/>
+                    </a:lnT>
+                    <a:lnB w="12700" cap="flat" cmpd="sng" algn="ctr">
+                      <a:solidFill>
+                        <a:srgbClr val="DCE2E8"/>
+                      </a:solidFill>
+                      <a:prstDash val="solid"/>
+                      <a:round/>
+                      <a:headEnd type="none" w="med" len="med"/>
+                      <a:tailEnd type="none" w="med" len="med"/>
+                    </a:lnB>
+                    <a:solidFill>
+                      <a:srgbClr val="FFFFFF"/>
+                    </a:solidFill>
+                  </a:tcPr>
+                </a:tc>
+              </a:tr>
+              <a:tr h="329184">
+                <a:tc>
+                  <a:txBody>
+                    <a:bodyPr/>
+                    <a:lstStyle/>
+                    <a:p>
+                      <a:pPr algn="l" indent="0" marL="0">
+                        <a:buNone/>
+                      </a:pPr>
+                      <a:r>
+                        <a:rPr lang="en-US" sz="1100" b="1" dirty="0">
+                          <a:solidFill>
+                            <a:srgbClr val="D78A27"/>
+                          </a:solidFill>
+                          <a:latin typeface="Calibri" pitchFamily="34" charset="0"/>
+                          <a:ea typeface="Calibri" pitchFamily="34" charset="-122"/>
+                          <a:cs typeface="Calibri" pitchFamily="34" charset="-120"/>
+                        </a:rPr>
+                        <a:t>[FR_SOC_CAMP_2]</a:t>
+                      </a:r>
+                      <a:endParaRPr lang="en-US" sz="1100" dirty="0">
+                        <a:latin typeface="Calibri" charset="0"/>
+                        <a:ea typeface="Calibri" charset="0"/>
+                        <a:cs typeface="Calibri" charset="0"/>
+                      </a:endParaRPr>
+                    </a:p>
+                  </a:txBody>
+                  <a:tcPr marL="50800" marR="50800" marT="50800" marB="50800" anchor="ctr">
+                    <a:lnL w="12700" cap="flat" cmpd="sng" algn="ctr">
+                      <a:solidFill>
+                        <a:srgbClr val="DCE2E8"/>
+                      </a:solidFill>
+                      <a:prstDash val="solid"/>
+                      <a:round/>
+                      <a:headEnd type="none" w="med" len="med"/>
+                      <a:tailEnd type="none" w="med" len="med"/>
+                    </a:lnL>
+                    <a:lnR w="12700" cap="flat" cmpd="sng" algn="ctr">
+                      <a:solidFill>
+                        <a:srgbClr val="DCE2E8"/>
+                      </a:solidFill>
+                      <a:prstDash val="solid"/>
+                      <a:round/>
+                      <a:headEnd type="none" w="med" len="med"/>
+                      <a:tailEnd type="none" w="med" len="med"/>
+                    </a:lnR>
+                    <a:lnT w="12700" cap="flat" cmpd="sng" algn="ctr">
+                      <a:solidFill>
+                        <a:srgbClr val="DCE2E8"/>
+                      </a:solidFill>
+                      <a:prstDash val="solid"/>
+                      <a:round/>
+                      <a:headEnd type="none" w="med" len="med"/>
+                      <a:tailEnd type="none" w="med" len="med"/>
+                    </a:lnT>
+                    <a:lnB w="12700" cap="flat" cmpd="sng" algn="ctr">
+                      <a:solidFill>
+                        <a:srgbClr val="DCE2E8"/>
+                      </a:solidFill>
+                      <a:prstDash val="solid"/>
+                      <a:round/>
+                      <a:headEnd type="none" w="med" len="med"/>
+                      <a:tailEnd type="none" w="med" len="med"/>
+                    </a:lnB>
+                    <a:solidFill>
+                      <a:srgbClr val="FFFFFF"/>
+                    </a:solidFill>
+                  </a:tcPr>
+                </a:tc>
+                <a:tc>
+                  <a:txBody>
+                    <a:bodyPr/>
+                    <a:lstStyle/>
+                    <a:p>
+                      <a:pPr algn="ctr" indent="0" marL="0">
+                        <a:buNone/>
+                      </a:pPr>
+                      <a:r>
+                        <a:rPr lang="en-US" sz="1100" b="1" dirty="0">
+                          <a:solidFill>
+                            <a:srgbClr val="D78A27"/>
+                          </a:solidFill>
+                          <a:latin typeface="Calibri" pitchFamily="34" charset="0"/>
+                          <a:ea typeface="Calibri" pitchFamily="34" charset="-122"/>
+                          <a:cs typeface="Calibri" pitchFamily="34" charset="-120"/>
+                        </a:rPr>
+                        <a:t>[FR_SOC_SPEND_2]</a:t>
+                      </a:r>
+                      <a:endParaRPr lang="en-US" sz="1100" dirty="0">
+                        <a:latin typeface="Calibri" charset="0"/>
+                        <a:ea typeface="Calibri" charset="0"/>
+                        <a:cs typeface="Calibri" charset="0"/>
+                      </a:endParaRPr>
+                    </a:p>
+                  </a:txBody>
+                  <a:tcPr marL="50800" marR="50800" marT="50800" marB="50800" anchor="ctr">
+                    <a:lnL w="12700" cap="flat" cmpd="sng" algn="ctr">
+                      <a:solidFill>
+                        <a:srgbClr val="DCE2E8"/>
+                      </a:solidFill>
+                      <a:prstDash val="solid"/>
+                      <a:round/>
+                      <a:headEnd type="none" w="med" len="med"/>
+                      <a:tailEnd type="none" w="med" len="med"/>
+                    </a:lnL>
+                    <a:lnR w="12700" cap="flat" cmpd="sng" algn="ctr">
+                      <a:solidFill>
+                        <a:srgbClr val="DCE2E8"/>
+                      </a:solidFill>
+                      <a:prstDash val="solid"/>
+                      <a:round/>
+                      <a:headEnd type="none" w="med" len="med"/>
+                      <a:tailEnd type="none" w="med" len="med"/>
+                    </a:lnR>
+                    <a:lnT w="12700" cap="flat" cmpd="sng" algn="ctr">
+                      <a:solidFill>
+                        <a:srgbClr val="DCE2E8"/>
+                      </a:solidFill>
+                      <a:prstDash val="solid"/>
+                      <a:round/>
+                      <a:headEnd type="none" w="med" len="med"/>
+                      <a:tailEnd type="none" w="med" len="med"/>
+                    </a:lnT>
+                    <a:lnB w="12700" cap="flat" cmpd="sng" algn="ctr">
+                      <a:solidFill>
+                        <a:srgbClr val="DCE2E8"/>
+                      </a:solidFill>
+                      <a:prstDash val="solid"/>
+                      <a:round/>
+                      <a:headEnd type="none" w="med" len="med"/>
+                      <a:tailEnd type="none" w="med" len="med"/>
+                    </a:lnB>
+                    <a:solidFill>
+                      <a:srgbClr val="FFFFFF"/>
+                    </a:solidFill>
+                  </a:tcPr>
+                </a:tc>
+                <a:tc>
+                  <a:txBody>
+                    <a:bodyPr/>
+                    <a:lstStyle/>
+                    <a:p>
+                      <a:pPr algn="ctr" indent="0" marL="0">
+                        <a:buNone/>
+                      </a:pPr>
+                      <a:r>
+                        <a:rPr lang="en-US" sz="1100" b="1" dirty="0">
+                          <a:solidFill>
+                            <a:srgbClr val="D78A27"/>
+                          </a:solidFill>
+                          <a:latin typeface="Calibri" pitchFamily="34" charset="0"/>
+                          <a:ea typeface="Calibri" pitchFamily="34" charset="-122"/>
+                          <a:cs typeface="Calibri" pitchFamily="34" charset="-120"/>
+                        </a:rPr>
+                        <a:t>[FR_SOC_RES_2]</a:t>
+                      </a:r>
+                      <a:endParaRPr lang="en-US" sz="1100" dirty="0">
+                        <a:latin typeface="Calibri" charset="0"/>
+                        <a:ea typeface="Calibri" charset="0"/>
+                        <a:cs typeface="Calibri" charset="0"/>
+                      </a:endParaRPr>
+                    </a:p>
+                  </a:txBody>
+                  <a:tcPr marL="50800" marR="50800" marT="50800" marB="50800" anchor="ctr">
+                    <a:lnL w="12700" cap="flat" cmpd="sng" algn="ctr">
+                      <a:solidFill>
+                        <a:srgbClr val="DCE2E8"/>
+                      </a:solidFill>
+                      <a:prstDash val="solid"/>
+                      <a:round/>
+                      <a:headEnd type="none" w="med" len="med"/>
+                      <a:tailEnd type="none" w="med" len="med"/>
+                    </a:lnL>
+                    <a:lnR w="12700" cap="flat" cmpd="sng" algn="ctr">
+                      <a:solidFill>
+                        <a:srgbClr val="DCE2E8"/>
+                      </a:solidFill>
+                      <a:prstDash val="solid"/>
+                      <a:round/>
+                      <a:headEnd type="none" w="med" len="med"/>
+                      <a:tailEnd type="none" w="med" len="med"/>
+                    </a:lnR>
+                    <a:lnT w="12700" cap="flat" cmpd="sng" algn="ctr">
+                      <a:solidFill>
+                        <a:srgbClr val="DCE2E8"/>
+                      </a:solidFill>
+                      <a:prstDash val="solid"/>
+                      <a:round/>
+                      <a:headEnd type="none" w="med" len="med"/>
+                      <a:tailEnd type="none" w="med" len="med"/>
+                    </a:lnT>
+                    <a:lnB w="12700" cap="flat" cmpd="sng" algn="ctr">
+                      <a:solidFill>
+                        <a:srgbClr val="DCE2E8"/>
+                      </a:solidFill>
+                      <a:prstDash val="solid"/>
+                      <a:round/>
+                      <a:headEnd type="none" w="med" len="med"/>
+                      <a:tailEnd type="none" w="med" len="med"/>
+                    </a:lnB>
+                    <a:solidFill>
+                      <a:srgbClr val="FFFFFF"/>
+                    </a:solidFill>
+                  </a:tcPr>
+                </a:tc>
+                <a:tc>
+                  <a:txBody>
+                    <a:bodyPr/>
+                    <a:lstStyle/>
+                    <a:p>
+                      <a:pPr algn="ctr" indent="0" marL="0">
+                        <a:buNone/>
+                      </a:pPr>
+                      <a:r>
+                        <a:rPr lang="en-US" sz="1100" b="1" dirty="0">
+                          <a:solidFill>
+                            <a:srgbClr val="D78A27"/>
+                          </a:solidFill>
+                          <a:latin typeface="Calibri" pitchFamily="34" charset="0"/>
+                          <a:ea typeface="Calibri" pitchFamily="34" charset="-122"/>
+                          <a:cs typeface="Calibri" pitchFamily="34" charset="-120"/>
+                        </a:rPr>
+                        <a:t>[FR_SOC_CPR_2]</a:t>
+                      </a:r>
+                      <a:endParaRPr lang="en-US" sz="1100" dirty="0">
+                        <a:latin typeface="Calibri" charset="0"/>
+                        <a:ea typeface="Calibri" charset="0"/>
+                        <a:cs typeface="Calibri" charset="0"/>
+                      </a:endParaRPr>
+                    </a:p>
+                  </a:txBody>
+                  <a:tcPr marL="50800" marR="50800" marT="50800" marB="50800" anchor="ctr">
+                    <a:lnL w="12700" cap="flat" cmpd="sng" algn="ctr">
+                      <a:solidFill>
+                        <a:srgbClr val="DCE2E8"/>
+                      </a:solidFill>
+                      <a:prstDash val="solid"/>
+                      <a:round/>
+                      <a:headEnd type="none" w="med" len="med"/>
+                      <a:tailEnd type="none" w="med" len="med"/>
+                    </a:lnL>
+                    <a:lnR w="12700" cap="flat" cmpd="sng" algn="ctr">
+                      <a:solidFill>
+                        <a:srgbClr val="DCE2E8"/>
+                      </a:solidFill>
+                      <a:prstDash val="solid"/>
+                      <a:round/>
+                      <a:headEnd type="none" w="med" len="med"/>
+                      <a:tailEnd type="none" w="med" len="med"/>
+                    </a:lnR>
+                    <a:lnT w="12700" cap="flat" cmpd="sng" algn="ctr">
+                      <a:solidFill>
+                        <a:srgbClr val="DCE2E8"/>
+                      </a:solidFill>
+                      <a:prstDash val="solid"/>
+                      <a:round/>
+                      <a:headEnd type="none" w="med" len="med"/>
+                      <a:tailEnd type="none" w="med" len="med"/>
+                    </a:lnT>
+                    <a:lnB w="12700" cap="flat" cmpd="sng" algn="ctr">
+                      <a:solidFill>
+                        <a:srgbClr val="DCE2E8"/>
+                      </a:solidFill>
+                      <a:prstDash val="solid"/>
+                      <a:round/>
+                      <a:headEnd type="none" w="med" len="med"/>
+                      <a:tailEnd type="none" w="med" len="med"/>
+                    </a:lnB>
+                    <a:solidFill>
+                      <a:srgbClr val="FFFFFF"/>
+                    </a:solidFill>
+                  </a:tcPr>
+                </a:tc>
+                <a:tc>
+                  <a:txBody>
+                    <a:bodyPr/>
+                    <a:lstStyle/>
+                    <a:p>
+                      <a:pPr algn="l" indent="0" marL="0">
+                        <a:buNone/>
+                      </a:pPr>
+                      <a:r>
+                        <a:rPr lang="en-US" sz="1100" b="1" dirty="0">
+                          <a:solidFill>
+                            <a:srgbClr val="D78A27"/>
+                          </a:solidFill>
+                          <a:latin typeface="Calibri" pitchFamily="34" charset="0"/>
+                          <a:ea typeface="Calibri" pitchFamily="34" charset="-122"/>
+                          <a:cs typeface="Calibri" pitchFamily="34" charset="-120"/>
+                        </a:rPr>
+                        <a:t>[FR_SOC_AUD_2]</a:t>
+                      </a:r>
+                      <a:endParaRPr lang="en-US" sz="1100" dirty="0">
+                        <a:latin typeface="Calibri" charset="0"/>
+                        <a:ea typeface="Calibri" charset="0"/>
+                        <a:cs typeface="Calibri" charset="0"/>
+                      </a:endParaRPr>
+                    </a:p>
+                  </a:txBody>
+                  <a:tcPr marL="50800" marR="50800" marT="50800" marB="50800" anchor="ctr">
+                    <a:lnL w="12700" cap="flat" cmpd="sng" algn="ctr">
+                      <a:solidFill>
+                        <a:srgbClr val="DCE2E8"/>
+                      </a:solidFill>
+                      <a:prstDash val="solid"/>
+                      <a:round/>
+                      <a:headEnd type="none" w="med" len="med"/>
+                      <a:tailEnd type="none" w="med" len="med"/>
+                    </a:lnL>
+                    <a:lnR w="12700" cap="flat" cmpd="sng" algn="ctr">
+                      <a:solidFill>
+                        <a:srgbClr val="DCE2E8"/>
+                      </a:solidFill>
+                      <a:prstDash val="solid"/>
+                      <a:round/>
+                      <a:headEnd type="none" w="med" len="med"/>
+                      <a:tailEnd type="none" w="med" len="med"/>
+                    </a:lnR>
+                    <a:lnT w="12700" cap="flat" cmpd="sng" algn="ctr">
+                      <a:solidFill>
+                        <a:srgbClr val="DCE2E8"/>
+                      </a:solidFill>
+                      <a:prstDash val="solid"/>
+                      <a:round/>
+                      <a:headEnd type="none" w="med" len="med"/>
+                      <a:tailEnd type="none" w="med" len="med"/>
+                    </a:lnT>
+                    <a:lnB w="12700" cap="flat" cmpd="sng" algn="ctr">
+                      <a:solidFill>
+                        <a:srgbClr val="DCE2E8"/>
+                      </a:solidFill>
+                      <a:prstDash val="solid"/>
+                      <a:round/>
+                      <a:headEnd type="none" w="med" len="med"/>
+                      <a:tailEnd type="none" w="med" len="med"/>
+                    </a:lnB>
+                    <a:solidFill>
+                      <a:srgbClr val="FFFFFF"/>
+                    </a:solidFill>
+                  </a:tcPr>
+                </a:tc>
+              </a:tr>
+              <a:tr h="329184">
+                <a:tc>
+                  <a:txBody>
+                    <a:bodyPr/>
+                    <a:lstStyle/>
+                    <a:p>
+                      <a:pPr algn="l" indent="0" marL="0">
+                        <a:buNone/>
+                      </a:pPr>
+                      <a:r>
+                        <a:rPr lang="en-US" sz="1100" b="1" dirty="0">
+                          <a:solidFill>
+                            <a:srgbClr val="D78A27"/>
+                          </a:solidFill>
+                          <a:latin typeface="Calibri" pitchFamily="34" charset="0"/>
+                          <a:ea typeface="Calibri" pitchFamily="34" charset="-122"/>
+                          <a:cs typeface="Calibri" pitchFamily="34" charset="-120"/>
+                        </a:rPr>
+                        <a:t>[FR_SOC_CAMP_3]</a:t>
+                      </a:r>
+                      <a:endParaRPr lang="en-US" sz="1100" dirty="0">
+                        <a:latin typeface="Calibri" charset="0"/>
+                        <a:ea typeface="Calibri" charset="0"/>
+                        <a:cs typeface="Calibri" charset="0"/>
+                      </a:endParaRPr>
+                    </a:p>
+                  </a:txBody>
+                  <a:tcPr marL="50800" marR="50800" marT="50800" marB="50800" anchor="ctr">
+                    <a:lnL w="12700" cap="flat" cmpd="sng" algn="ctr">
+                      <a:solidFill>
+                        <a:srgbClr val="DCE2E8"/>
+                      </a:solidFill>
+                      <a:prstDash val="solid"/>
+                      <a:round/>
+                      <a:headEnd type="none" w="med" len="med"/>
+                      <a:tailEnd type="none" w="med" len="med"/>
+                    </a:lnL>
+                    <a:lnR w="12700" cap="flat" cmpd="sng" algn="ctr">
+                      <a:solidFill>
+                        <a:srgbClr val="DCE2E8"/>
+                      </a:solidFill>
+                      <a:prstDash val="solid"/>
+                      <a:round/>
+                      <a:headEnd type="none" w="med" len="med"/>
+                      <a:tailEnd type="none" w="med" len="med"/>
+                    </a:lnR>
+                    <a:lnT w="12700" cap="flat" cmpd="sng" algn="ctr">
+                      <a:solidFill>
+                        <a:srgbClr val="DCE2E8"/>
+                      </a:solidFill>
+                      <a:prstDash val="solid"/>
+                      <a:round/>
+                      <a:headEnd type="none" w="med" len="med"/>
+                      <a:tailEnd type="none" w="med" len="med"/>
+                    </a:lnT>
+                    <a:lnB w="12700" cap="flat" cmpd="sng" algn="ctr">
+                      <a:solidFill>
+                        <a:srgbClr val="DCE2E8"/>
+                      </a:solidFill>
+                      <a:prstDash val="solid"/>
+                      <a:round/>
+                      <a:headEnd type="none" w="med" len="med"/>
+                      <a:tailEnd type="none" w="med" len="med"/>
+                    </a:lnB>
+                    <a:solidFill>
+                      <a:srgbClr val="FFFFFF"/>
+                    </a:solidFill>
+                  </a:tcPr>
+                </a:tc>
+                <a:tc>
+                  <a:txBody>
+                    <a:bodyPr/>
+                    <a:lstStyle/>
+                    <a:p>
+                      <a:pPr algn="ctr" indent="0" marL="0">
+                        <a:buNone/>
+                      </a:pPr>
+                      <a:r>
+                        <a:rPr lang="en-US" sz="1100" b="1" dirty="0">
+                          <a:solidFill>
+                            <a:srgbClr val="D78A27"/>
+                          </a:solidFill>
+                          <a:latin typeface="Calibri" pitchFamily="34" charset="0"/>
+                          <a:ea typeface="Calibri" pitchFamily="34" charset="-122"/>
+                          <a:cs typeface="Calibri" pitchFamily="34" charset="-120"/>
+                        </a:rPr>
+                        <a:t>[FR_SOC_SPEND_3]</a:t>
+                      </a:r>
+                      <a:endParaRPr lang="en-US" sz="1100" dirty="0">
+                        <a:latin typeface="Calibri" charset="0"/>
+                        <a:ea typeface="Calibri" charset="0"/>
+                        <a:cs typeface="Calibri" charset="0"/>
+                      </a:endParaRPr>
+                    </a:p>
+                  </a:txBody>
+                  <a:tcPr marL="50800" marR="50800" marT="50800" marB="50800" anchor="ctr">
+                    <a:lnL w="12700" cap="flat" cmpd="sng" algn="ctr">
+                      <a:solidFill>
+                        <a:srgbClr val="DCE2E8"/>
+                      </a:solidFill>
+                      <a:prstDash val="solid"/>
+                      <a:round/>
+                      <a:headEnd type="none" w="med" len="med"/>
+                      <a:tailEnd type="none" w="med" len="med"/>
+                    </a:lnL>
+                    <a:lnR w="12700" cap="flat" cmpd="sng" algn="ctr">
+                      <a:solidFill>
+                        <a:srgbClr val="DCE2E8"/>
+                      </a:solidFill>
+                      <a:prstDash val="solid"/>
+                      <a:round/>
+                      <a:headEnd type="none" w="med" len="med"/>
+                      <a:tailEnd type="none" w="med" len="med"/>
+                    </a:lnR>
+                    <a:lnT w="12700" cap="flat" cmpd="sng" algn="ctr">
+                      <a:solidFill>
+                        <a:srgbClr val="DCE2E8"/>
+                      </a:solidFill>
+                      <a:prstDash val="solid"/>
+                      <a:round/>
+                      <a:headEnd type="none" w="med" len="med"/>
+                      <a:tailEnd type="none" w="med" len="med"/>
+                    </a:lnT>
+                    <a:lnB w="12700" cap="flat" cmpd="sng" algn="ctr">
+                      <a:solidFill>
+                        <a:srgbClr val="DCE2E8"/>
+                      </a:solidFill>
+                      <a:prstDash val="solid"/>
+                      <a:round/>
+                      <a:headEnd type="none" w="med" len="med"/>
+                      <a:tailEnd type="none" w="med" len="med"/>
+                    </a:lnB>
+                    <a:solidFill>
+                      <a:srgbClr val="FFFFFF"/>
+                    </a:solidFill>
+                  </a:tcPr>
+                </a:tc>
+                <a:tc>
+                  <a:txBody>
+                    <a:bodyPr/>
+                    <a:lstStyle/>
+                    <a:p>
+                      <a:pPr algn="ctr" indent="0" marL="0">
+                        <a:buNone/>
+                      </a:pPr>
+                      <a:r>
+                        <a:rPr lang="en-US" sz="1100" b="1" dirty="0">
+                          <a:solidFill>
+                            <a:srgbClr val="D78A27"/>
+                          </a:solidFill>
+                          <a:latin typeface="Calibri" pitchFamily="34" charset="0"/>
+                          <a:ea typeface="Calibri" pitchFamily="34" charset="-122"/>
+                          <a:cs typeface="Calibri" pitchFamily="34" charset="-120"/>
+                        </a:rPr>
+                        <a:t>[FR_SOC_RES_3]</a:t>
+                      </a:r>
+                      <a:endParaRPr lang="en-US" sz="1100" dirty="0">
+                        <a:latin typeface="Calibri" charset="0"/>
+                        <a:ea typeface="Calibri" charset="0"/>
+                        <a:cs typeface="Calibri" charset="0"/>
+                      </a:endParaRPr>
+                    </a:p>
+                  </a:txBody>
+                  <a:tcPr marL="50800" marR="50800" marT="50800" marB="50800" anchor="ctr">
+                    <a:lnL w="12700" cap="flat" cmpd="sng" algn="ctr">
+                      <a:solidFill>
+                        <a:srgbClr val="DCE2E8"/>
+                      </a:solidFill>
+                      <a:prstDash val="solid"/>
+                      <a:round/>
+                      <a:headEnd type="none" w="med" len="med"/>
+                      <a:tailEnd type="none" w="med" len="med"/>
+                    </a:lnL>
+                    <a:lnR w="12700" cap="flat" cmpd="sng" algn="ctr">
+                      <a:solidFill>
+                        <a:srgbClr val="DCE2E8"/>
+                      </a:solidFill>
+                      <a:prstDash val="solid"/>
+                      <a:round/>
+                      <a:headEnd type="none" w="med" len="med"/>
+                      <a:tailEnd type="none" w="med" len="med"/>
+                    </a:lnR>
+                    <a:lnT w="12700" cap="flat" cmpd="sng" algn="ctr">
+                      <a:solidFill>
+                        <a:srgbClr val="DCE2E8"/>
+                      </a:solidFill>
+                      <a:prstDash val="solid"/>
+                      <a:round/>
+                      <a:headEnd type="none" w="med" len="med"/>
+                      <a:tailEnd type="none" w="med" len="med"/>
+                    </a:lnT>
+                    <a:lnB w="12700" cap="flat" cmpd="sng" algn="ctr">
+                      <a:solidFill>
+                        <a:srgbClr val="DCE2E8"/>
+                      </a:solidFill>
+                      <a:prstDash val="solid"/>
+                      <a:round/>
+                      <a:headEnd type="none" w="med" len="med"/>
+                      <a:tailEnd type="none" w="med" len="med"/>
+                    </a:lnB>
+                    <a:solidFill>
+                      <a:srgbClr val="FFFFFF"/>
+                    </a:solidFill>
+                  </a:tcPr>
+                </a:tc>
+                <a:tc>
+                  <a:txBody>
+                    <a:bodyPr/>
+                    <a:lstStyle/>
+                    <a:p>
+                      <a:pPr algn="ctr" indent="0" marL="0">
+                        <a:buNone/>
+                      </a:pPr>
+                      <a:r>
+                        <a:rPr lang="en-US" sz="1100" b="1" dirty="0">
+                          <a:solidFill>
+                            <a:srgbClr val="D78A27"/>
+                          </a:solidFill>
+                          <a:latin typeface="Calibri" pitchFamily="34" charset="0"/>
+                          <a:ea typeface="Calibri" pitchFamily="34" charset="-122"/>
+                          <a:cs typeface="Calibri" pitchFamily="34" charset="-120"/>
+                        </a:rPr>
+                        <a:t>[FR_SOC_CPR_3]</a:t>
+                      </a:r>
+                      <a:endParaRPr lang="en-US" sz="1100" dirty="0">
+                        <a:latin typeface="Calibri" charset="0"/>
+                        <a:ea typeface="Calibri" charset="0"/>
+                        <a:cs typeface="Calibri" charset="0"/>
+                      </a:endParaRPr>
+                    </a:p>
+                  </a:txBody>
+                  <a:tcPr marL="50800" marR="50800" marT="50800" marB="50800" anchor="ctr">
+                    <a:lnL w="12700" cap="flat" cmpd="sng" algn="ctr">
+                      <a:solidFill>
+                        <a:srgbClr val="DCE2E8"/>
+                      </a:solidFill>
+                      <a:prstDash val="solid"/>
+                      <a:round/>
+                      <a:headEnd type="none" w="med" len="med"/>
+                      <a:tailEnd type="none" w="med" len="med"/>
+                    </a:lnL>
+                    <a:lnR w="12700" cap="flat" cmpd="sng" algn="ctr">
+                      <a:solidFill>
+                        <a:srgbClr val="DCE2E8"/>
+                      </a:solidFill>
+                      <a:prstDash val="solid"/>
+                      <a:round/>
+                      <a:headEnd type="none" w="med" len="med"/>
+                      <a:tailEnd type="none" w="med" len="med"/>
+                    </a:lnR>
+                    <a:lnT w="12700" cap="flat" cmpd="sng" algn="ctr">
+                      <a:solidFill>
+                        <a:srgbClr val="DCE2E8"/>
+                      </a:solidFill>
+                      <a:prstDash val="solid"/>
+                      <a:round/>
+                      <a:headEnd type="none" w="med" len="med"/>
+                      <a:tailEnd type="none" w="med" len="med"/>
+                    </a:lnT>
+                    <a:lnB w="12700" cap="flat" cmpd="sng" algn="ctr">
+                      <a:solidFill>
+                        <a:srgbClr val="DCE2E8"/>
+                      </a:solidFill>
+                      <a:prstDash val="solid"/>
+                      <a:round/>
+                      <a:headEnd type="none" w="med" len="med"/>
+                      <a:tailEnd type="none" w="med" len="med"/>
+                    </a:lnB>
+                    <a:solidFill>
+                      <a:srgbClr val="FFFFFF"/>
+                    </a:solidFill>
+                  </a:tcPr>
+                </a:tc>
+                <a:tc>
+                  <a:txBody>
+                    <a:bodyPr/>
+                    <a:lstStyle/>
+                    <a:p>
+                      <a:pPr algn="l" indent="0" marL="0">
+                        <a:buNone/>
+                      </a:pPr>
+                      <a:r>
+                        <a:rPr lang="en-US" sz="1100" b="1" dirty="0">
+                          <a:solidFill>
+                            <a:srgbClr val="D78A27"/>
+                          </a:solidFill>
+                          <a:latin typeface="Calibri" pitchFamily="34" charset="0"/>
+                          <a:ea typeface="Calibri" pitchFamily="34" charset="-122"/>
+                          <a:cs typeface="Calibri" pitchFamily="34" charset="-120"/>
+                        </a:rPr>
+                        <a:t>[FR_SOC_AUD_3]</a:t>
+                      </a:r>
+                      <a:endParaRPr lang="en-US" sz="1100" dirty="0">
                         <a:latin typeface="Calibri" charset="0"/>
                         <a:ea typeface="Calibri" charset="0"/>
                         <a:cs typeface="Calibri" charset="0"/>
@@ -7261,75 +10956,36 @@
       </p:graphicFrame>
       <p:sp>
         <p:nvSpPr>
-          <p:cNvPr id="5" name="Text 2"/>
+          <p:cNvPr id="5" name="Shape 2"/>
           <p:cNvSpPr/>
           <p:nvPr/>
         </p:nvSpPr>
         <p:spPr>
           <a:xfrm>
-            <a:off x="548640" y="3886200"/>
-            <a:ext cx="7040880" cy="320040"/>
-          </a:xfrm>
-          <a:prstGeom prst="rect">
-            <a:avLst/>
-          </a:prstGeom>
-          <a:noFill/>
-          <a:ln/>
-        </p:spPr>
-        <p:txBody>
-          <a:bodyPr wrap="square" lIns="0" tIns="0" rIns="0" bIns="0" rtlCol="0" anchor="t"/>
-          <a:lstStyle/>
-          <a:p>
-            <a:pPr algn="l" indent="0" marL="0">
-              <a:buNone/>
-            </a:pPr>
-            <a:r>
-              <a:rPr lang="en-US" sz="1300" b="1" dirty="0">
-                <a:solidFill>
-                  <a:srgbClr val="1F2733"/>
-                </a:solidFill>
-                <a:latin typeface="Calibri" pitchFamily="34" charset="0"/>
-                <a:ea typeface="Calibri" pitchFamily="34" charset="-122"/>
-                <a:cs typeface="Calibri" pitchFamily="34" charset="-120"/>
-              </a:rPr>
-              <a:t>Warm audiences in play</a:t>
-            </a:r>
-            <a:endParaRPr lang="en-US" sz="1300" dirty="0"/>
-          </a:p>
-        </p:txBody>
-      </p:sp>
-      <p:sp>
-        <p:nvSpPr>
-          <p:cNvPr id="6" name="Shape 3"/>
-          <p:cNvSpPr/>
-          <p:nvPr/>
-        </p:nvSpPr>
-        <p:spPr>
-          <a:xfrm>
-            <a:off x="548640" y="4251960"/>
-            <a:ext cx="7040880" cy="548640"/>
+            <a:off x="548640" y="5806440"/>
+            <a:ext cx="11091672" cy="566928"/>
           </a:xfrm>
           <a:prstGeom prst="roundRect">
             <a:avLst>
-              <a:gd name="adj" fmla="val 16667"/>
+              <a:gd name="adj" fmla="val 16129"/>
             </a:avLst>
           </a:prstGeom>
           <a:solidFill>
-            <a:srgbClr val="FBF1E0"/>
+            <a:srgbClr val="EAF6F2"/>
           </a:solidFill>
           <a:ln/>
         </p:spPr>
       </p:sp>
       <p:sp>
         <p:nvSpPr>
-          <p:cNvPr id="7" name="Text 4"/>
+          <p:cNvPr id="6" name="Text 3"/>
           <p:cNvSpPr/>
           <p:nvPr/>
         </p:nvSpPr>
         <p:spPr>
           <a:xfrm>
-            <a:off x="731520" y="4251960"/>
-            <a:ext cx="6675120" cy="548640"/>
+            <a:off x="777240" y="5806440"/>
+            <a:ext cx="10634472" cy="566928"/>
           </a:xfrm>
           <a:prstGeom prst="rect">
             <a:avLst/>
@@ -7345,68 +11001,7 @@
               <a:buNone/>
             </a:pPr>
             <a:r>
-              <a:rPr lang="en-US" sz="1300" b="1" dirty="0">
-                <a:solidFill>
-                  <a:srgbClr val="D78A27"/>
-                </a:solidFill>
-                <a:latin typeface="Calibri" pitchFamily="34" charset="0"/>
-                <a:ea typeface="Calibri" pitchFamily="34" charset="-122"/>
-                <a:cs typeface="Calibri" pitchFamily="34" charset="-120"/>
-              </a:rPr>
-              <a:t>[ WARM_AUDIENCES ]</a:t>
-            </a:r>
-            <a:endParaRPr lang="en-US" sz="1300" dirty="0"/>
-          </a:p>
-        </p:txBody>
-      </p:sp>
-      <p:sp>
-        <p:nvSpPr>
-          <p:cNvPr id="8" name="Shape 5"/>
-          <p:cNvSpPr/>
-          <p:nvPr/>
-        </p:nvSpPr>
-        <p:spPr>
-          <a:xfrm>
-            <a:off x="548640" y="5074920"/>
-            <a:ext cx="7040880" cy="914400"/>
-          </a:xfrm>
-          <a:prstGeom prst="roundRect">
-            <a:avLst>
-              <a:gd name="adj" fmla="val 10000"/>
-            </a:avLst>
-          </a:prstGeom>
-          <a:solidFill>
-            <a:srgbClr val="EAF6F2"/>
-          </a:solidFill>
-          <a:ln/>
-        </p:spPr>
-      </p:sp>
-      <p:sp>
-        <p:nvSpPr>
-          <p:cNvPr id="9" name="Text 6"/>
-          <p:cNvSpPr/>
-          <p:nvPr/>
-        </p:nvSpPr>
-        <p:spPr>
-          <a:xfrm>
-            <a:off x="777240" y="5074920"/>
-            <a:ext cx="6583680" cy="914400"/>
-          </a:xfrm>
-          <a:prstGeom prst="rect">
-            <a:avLst/>
-          </a:prstGeom>
-          <a:noFill/>
-          <a:ln/>
-        </p:spPr>
-        <p:txBody>
-          <a:bodyPr wrap="square" lIns="0" tIns="0" rIns="0" bIns="0" rtlCol="0" anchor="ctr"/>
-          <a:lstStyle/>
-          <a:p>
-            <a:pPr algn="l" indent="0" marL="0">
-              <a:buNone/>
-            </a:pPr>
-            <a:r>
-              <a:rPr lang="en-US" sz="1450" b="1" dirty="0">
+              <a:rPr lang="en-US" sz="1400" b="1" dirty="0">
                 <a:solidFill>
                   <a:srgbClr val="16235C"/>
                 </a:solidFill>
@@ -7416,101 +11011,7 @@
               </a:rPr>
               <a:t>Search drives the pipeline. Social is for warm retargeting and nurture.</a:t>
             </a:r>
-            <a:endParaRPr lang="en-US" sz="1450" dirty="0"/>
-          </a:p>
-        </p:txBody>
-      </p:sp>
-      <p:sp>
-        <p:nvSpPr>
-          <p:cNvPr id="10" name="Text 7"/>
-          <p:cNvSpPr/>
-          <p:nvPr/>
-        </p:nvSpPr>
-        <p:spPr>
-          <a:xfrm>
-            <a:off x="7955280" y="1463040"/>
-            <a:ext cx="3703320" cy="320040"/>
-          </a:xfrm>
-          <a:prstGeom prst="rect">
-            <a:avLst/>
-          </a:prstGeom>
-          <a:noFill/>
-          <a:ln/>
-        </p:spPr>
-        <p:txBody>
-          <a:bodyPr wrap="square" lIns="0" tIns="0" rIns="0" bIns="0" rtlCol="0" anchor="t"/>
-          <a:lstStyle/>
-          <a:p>
-            <a:pPr algn="l" indent="0" marL="0">
-              <a:buNone/>
-            </a:pPr>
-            <a:r>
-              <a:rPr lang="en-US" sz="1300" b="1" dirty="0">
-                <a:solidFill>
-                  <a:srgbClr val="1F2733"/>
-                </a:solidFill>
-                <a:latin typeface="Calibri" pitchFamily="34" charset="0"/>
-                <a:ea typeface="Calibri" pitchFamily="34" charset="-122"/>
-                <a:cs typeface="Calibri" pitchFamily="34" charset="-120"/>
-              </a:rPr>
-              <a:t>Social spend by market</a:t>
-            </a:r>
-            <a:endParaRPr lang="en-US" sz="1300" dirty="0"/>
-          </a:p>
-        </p:txBody>
-      </p:sp>
-      <p:graphicFrame>
-        <p:nvGraphicFramePr>
-          <p:cNvPr id="11" name="Chart 0" descr=""/>
-          <p:cNvGraphicFramePr/>
-          <p:nvPr/>
-        </p:nvGraphicFramePr>
-        <p:xfrm>
-          <a:off x="7863840" y="1828800"/>
-          <a:ext cx="3840480" cy="3291840"/>
-        </p:xfrm>
-        <a:graphic xmlns:a="http://schemas.openxmlformats.org/drawingml/2006/main">
-          <a:graphicData uri="http://schemas.openxmlformats.org/drawingml/2006/chart">
-            <c:chart xmlns:c="http://schemas.openxmlformats.org/drawingml/2006/chart" r:id="rId1"/>
-          </a:graphicData>
-        </a:graphic>
-      </p:graphicFrame>
-      <p:sp>
-        <p:nvSpPr>
-          <p:cNvPr id="12" name="Text 8"/>
-          <p:cNvSpPr/>
-          <p:nvPr/>
-        </p:nvSpPr>
-        <p:spPr>
-          <a:xfrm>
-            <a:off x="7955280" y="5138928"/>
-            <a:ext cx="3703320" cy="274320"/>
-          </a:xfrm>
-          <a:prstGeom prst="rect">
-            <a:avLst/>
-          </a:prstGeom>
-          <a:noFill/>
-          <a:ln/>
-        </p:spPr>
-        <p:txBody>
-          <a:bodyPr wrap="square" lIns="0" tIns="0" rIns="0" bIns="0" rtlCol="0" anchor="t"/>
-          <a:lstStyle/>
-          <a:p>
-            <a:pPr algn="l" indent="0" marL="0">
-              <a:buNone/>
-            </a:pPr>
-            <a:r>
-              <a:rPr lang="en-US" sz="1050" i="1" dirty="0">
-                <a:solidFill>
-                  <a:srgbClr val="5B6773"/>
-                </a:solidFill>
-                <a:latin typeface="Calibri" pitchFamily="34" charset="0"/>
-                <a:ea typeface="Calibri" pitchFamily="34" charset="-122"/>
-                <a:cs typeface="Calibri" pitchFamily="34" charset="-120"/>
-              </a:rPr>
-              <a:t>Placeholder values. Replace with Monday figures.</a:t>
-            </a:r>
-            <a:endParaRPr lang="en-US" sz="1050" dirty="0"/>
+            <a:endParaRPr lang="en-US" sz="1400" dirty="0"/>
           </a:p>
         </p:txBody>
       </p:sp>
